--- a/VorldX_RBAC_Presentation_15Slides.pptx
+++ b/VorldX_RBAC_Presentation_15Slides.pptx
@@ -4,6 +4,9 @@
   <p:sldMasterIdLst>
     <p:sldMasterId id="2147483648" r:id="rId1"/>
   </p:sldMasterIdLst>
+  <p:notesMasterIdLst>
+    <p:notesMasterId r:id="rId17"/>
+  </p:notesMasterIdLst>
   <p:sldIdLst>
     <p:sldId id="256" r:id="rId2"/>
     <p:sldId id="257" r:id="rId3"/>
@@ -21,10 +24,7 @@
     <p:sldId id="269" r:id="rId15"/>
     <p:sldId id="270" r:id="rId16"/>
   </p:sldIdLst>
-  <p:notesMasterIdLst>
-    <p:notesMasterId r:id="rId17"/>
-  </p:notesMasterIdLst>
-  <p:sldSz cx="9144000" cy="5143500"/>
+  <p:sldSz cx="9144000" cy="5143500" type="screen16x9"/>
   <p:notesSz cx="5143500" cy="9144000"/>
   <p:defaultTextStyle>
     <a:lvl1pPr marL="0" algn="l" defTabSz="914400" rtl="0" eaLnBrk="1" latinLnBrk="0" hangingPunct="1">
@@ -118,7 +118,41 @@
       </a:defRPr>
     </a:lvl9pPr>
   </p:defaultTextStyle>
+  <p:extLst>
+    <p:ext uri="{EFAFB233-063F-42B5-8137-9DF3F51BA10A}">
+      <p15:sldGuideLst xmlns:p15="http://schemas.microsoft.com/office/powerpoint/2012/main"/>
+    </p:ext>
+  </p:extLst>
 </p:presentation>
+</file>
+
+<file path=ppt/changesInfos/changesInfo1.xml><?xml version="1.0" encoding="utf-8"?>
+<pc:chgInfo xmlns:a="http://schemas.openxmlformats.org/drawingml/2006/main" xmlns:r="http://schemas.openxmlformats.org/officeDocument/2006/relationships" xmlns:ac="http://schemas.microsoft.com/office/drawing/2013/main/command" xmlns:pc="http://schemas.microsoft.com/office/powerpoint/2013/main/command">
+  <pc:docChgLst>
+    <pc:chgData name="shreya yadav" userId="b8e810d6d1c34b8c" providerId="LiveId" clId="{60271CD6-E8DD-46C5-8D2D-9FB459FAE870}"/>
+    <pc:docChg chg="modSld">
+      <pc:chgData name="shreya yadav" userId="b8e810d6d1c34b8c" providerId="LiveId" clId="{60271CD6-E8DD-46C5-8D2D-9FB459FAE870}" dt="2026-10-24T12:25:17.531" v="0" actId="1076"/>
+      <pc:docMkLst>
+        <pc:docMk/>
+      </pc:docMkLst>
+      <pc:sldChg chg="modSp mod">
+        <pc:chgData name="shreya yadav" userId="b8e810d6d1c34b8c" providerId="LiveId" clId="{60271CD6-E8DD-46C5-8D2D-9FB459FAE870}" dt="2026-10-24T12:25:17.531" v="0" actId="1076"/>
+        <pc:sldMkLst>
+          <pc:docMk/>
+          <pc:sldMk cId="0" sldId="269"/>
+        </pc:sldMkLst>
+        <pc:spChg chg="mod">
+          <ac:chgData name="shreya yadav" userId="b8e810d6d1c34b8c" providerId="LiveId" clId="{60271CD6-E8DD-46C5-8D2D-9FB459FAE870}" dt="2026-10-24T12:25:17.531" v="0" actId="1076"/>
+          <ac:spMkLst>
+            <pc:docMk/>
+            <pc:sldMk cId="0" sldId="269"/>
+            <ac:spMk id="23" creationId="{00000000-0000-0000-0000-000000000000}"/>
+          </ac:spMkLst>
+        </pc:spChg>
+      </pc:sldChg>
+    </pc:docChg>
+  </pc:docChgLst>
+</pc:chgInfo>
 </file>
 
 <file path=ppt/notesMasters/notesMaster1.xml><?xml version="1.0" encoding="utf-8"?>
@@ -143,234 +177,10 @@
           <a:chExt cx="0" cy="0"/>
         </a:xfrm>
       </p:grpSpPr>
-      <p:sp>
-        <p:nvSpPr>
-          <p:cNvPr id="2" name="Header Placeholder 1"/>
-          <p:cNvSpPr>
-            <a:spLocks noGrp="1"/>
-          </p:cNvSpPr>
-          <p:nvPr>
-            <p:ph type="hdr" sz="quarter"/>
-          </p:nvPr>
-        </p:nvSpPr>
-        <p:spPr>
-          <a:xfrm>
-            <a:off x="0" y="0"/>
-            <a:ext cx="2971800" cy="458788"/>
-          </a:xfrm>
-          <a:prstGeom prst="rect">
-            <a:avLst/>
-          </a:prstGeom>
-        </p:spPr>
-        <p:txBody>
-          <a:bodyPr vert="horz" lIns="91440" tIns="45720" rIns="91440" bIns="45720" rtlCol="0"/>
-          <a:lstStyle>
-            <a:lvl1pPr algn="l">
-              <a:defRPr sz="1200"/>
-            </a:lvl1pPr>
-          </a:lstStyle>
-          <a:p>
-            <a:endParaRPr lang="en-US"/>
-          </a:p>
-        </p:txBody>
-      </p:sp>
-      <p:sp>
-        <p:nvSpPr>
-          <p:cNvPr id="3" name="Date Placeholder 2"/>
-          <p:cNvSpPr>
-            <a:spLocks noGrp="1"/>
-          </p:cNvSpPr>
-          <p:nvPr>
-            <p:ph type="dt" idx="1"/>
-          </p:nvPr>
-        </p:nvSpPr>
-        <p:spPr>
-          <a:xfrm>
-            <a:off x="3884613" y="0"/>
-            <a:ext cx="2971800" cy="458788"/>
-          </a:xfrm>
-          <a:prstGeom prst="rect">
-            <a:avLst/>
-          </a:prstGeom>
-        </p:spPr>
-        <p:txBody>
-          <a:bodyPr vert="horz" lIns="91440" tIns="45720" rIns="91440" bIns="45720" rtlCol="0"/>
-          <a:lstStyle>
-            <a:lvl1pPr algn="r">
-              <a:defRPr sz="1200"/>
-            </a:lvl1pPr>
-          </a:lstStyle>
-          <a:p>
-            <a:fld id="{5282F153-3F37-0F45-9E97-73ACFA13230C}" type="datetimeFigureOut">
-              <a:rPr lang="en-US"/>
-              <a:t>7/23/19</a:t>
-            </a:fld>
-            <a:endParaRPr lang="en-US"/>
-          </a:p>
-        </p:txBody>
-      </p:sp>
-      <p:sp>
-        <p:nvSpPr>
-          <p:cNvPr id="4" name="Slide Image Placeholder 3"/>
-          <p:cNvSpPr>
-            <a:spLocks noGrp="1" noRot="1" noChangeAspect="1"/>
-          </p:cNvSpPr>
-          <p:nvPr>
-            <p:ph type="sldImg" idx="2"/>
-          </p:nvPr>
-        </p:nvSpPr>
-        <p:spPr>
-          <a:xfrm>
-            <a:off x="685800" y="1143000"/>
-            <a:ext cx="5486400" cy="3086100"/>
-          </a:xfrm>
-          <a:prstGeom prst="rect">
-            <a:avLst/>
-          </a:prstGeom>
-          <a:noFill/>
-          <a:ln w="12700">
-            <a:solidFill>
-              <a:prstClr val="black"/>
-            </a:solidFill>
-          </a:ln>
-        </p:spPr>
-        <p:txBody>
-          <a:bodyPr vert="horz" lIns="91440" tIns="45720" rIns="91440" bIns="45720" rtlCol="0" anchor="ctr"/>
-          <a:lstStyle/>
-          <a:p>
-            <a:endParaRPr lang="en-US"/>
-          </a:p>
-        </p:txBody>
-      </p:sp>
-      <p:sp>
-        <p:nvSpPr>
-          <p:cNvPr id="5" name="Notes Placeholder 4"/>
-          <p:cNvSpPr>
-            <a:spLocks noGrp="1"/>
-          </p:cNvSpPr>
-          <p:nvPr>
-            <p:ph type="body" sz="quarter" idx="3"/>
-          </p:nvPr>
-        </p:nvSpPr>
-        <p:spPr>
-          <a:xfrm>
-            <a:off x="685800" y="4400550"/>
-            <a:ext cx="5486400" cy="3600450"/>
-          </a:xfrm>
-          <a:prstGeom prst="rect">
-            <a:avLst/>
-          </a:prstGeom>
-        </p:spPr>
-        <p:txBody>
-          <a:bodyPr vert="horz" lIns="91440" tIns="45720" rIns="91440" bIns="45720" rtlCol="0"/>
-          <a:lstStyle/>
-          <a:p>
-            <a:pPr lvl="0"/>
-            <a:r>
-              <a:rPr lang="en-US"/>
-              <a:t>Click to edit Master text styles</a:t>
-            </a:r>
-          </a:p>
-          <a:p>
-            <a:pPr lvl="1"/>
-            <a:r>
-              <a:rPr lang="en-US"/>
-              <a:t>Second level</a:t>
-            </a:r>
-          </a:p>
-          <a:p>
-            <a:pPr lvl="2"/>
-            <a:r>
-              <a:rPr lang="en-US"/>
-              <a:t>Third level</a:t>
-            </a:r>
-          </a:p>
-          <a:p>
-            <a:pPr lvl="3"/>
-            <a:r>
-              <a:rPr lang="en-US"/>
-              <a:t>Fourth level</a:t>
-            </a:r>
-          </a:p>
-          <a:p>
-            <a:pPr lvl="4"/>
-            <a:r>
-              <a:rPr lang="en-US"/>
-              <a:t>Fifth level</a:t>
-            </a:r>
-          </a:p>
-        </p:txBody>
-      </p:sp>
-      <p:sp>
-        <p:nvSpPr>
-          <p:cNvPr id="6" name="Footer Placeholder 5"/>
-          <p:cNvSpPr>
-            <a:spLocks noGrp="1"/>
-          </p:cNvSpPr>
-          <p:nvPr>
-            <p:ph type="ftr" sz="quarter" idx="4"/>
-          </p:nvPr>
-        </p:nvSpPr>
-        <p:spPr>
-          <a:xfrm>
-            <a:off x="0" y="8685213"/>
-            <a:ext cx="2971800" cy="458787"/>
-          </a:xfrm>
-          <a:prstGeom prst="rect">
-            <a:avLst/>
-          </a:prstGeom>
-        </p:spPr>
-        <p:txBody>
-          <a:bodyPr vert="horz" lIns="91440" tIns="45720" rIns="91440" bIns="45720" rtlCol="0" anchor="b"/>
-          <a:lstStyle>
-            <a:lvl1pPr algn="l">
-              <a:defRPr sz="1200"/>
-            </a:lvl1pPr>
-          </a:lstStyle>
-          <a:p>
-            <a:endParaRPr lang="en-US"/>
-          </a:p>
-        </p:txBody>
-      </p:sp>
-      <p:sp>
-        <p:nvSpPr>
-          <p:cNvPr id="7" name="Slide Number Placeholder 6"/>
-          <p:cNvSpPr>
-            <a:spLocks noGrp="1"/>
-          </p:cNvSpPr>
-          <p:nvPr>
-            <p:ph type="sldNum" sz="quarter" idx="5"/>
-          </p:nvPr>
-        </p:nvSpPr>
-        <p:spPr>
-          <a:xfrm>
-            <a:off x="3884613" y="8685213"/>
-            <a:ext cx="2971800" cy="458787"/>
-          </a:xfrm>
-          <a:prstGeom prst="rect">
-            <a:avLst/>
-          </a:prstGeom>
-        </p:spPr>
-        <p:txBody>
-          <a:bodyPr vert="horz" lIns="91440" tIns="45720" rIns="91440" bIns="45720" rtlCol="0" anchor="b"/>
-          <a:lstStyle>
-            <a:lvl1pPr algn="r">
-              <a:defRPr sz="1200"/>
-            </a:lvl1pPr>
-          </a:lstStyle>
-          <a:p>
-            <a:fld id="{CE5E9CC1-C706-0F49-92D6-E571CC5EEA8F}" type="slidenum">
-              <a:rPr lang="en-US"/>
-              <a:t>‹#›</a:t>
-            </a:fld>
-            <a:endParaRPr lang="en-US"/>
-          </a:p>
-        </p:txBody>
-      </p:sp>
     </p:spTree>
     <p:extLst>
       <p:ext uri="{BB962C8B-B14F-4D97-AF65-F5344CB8AC3E}">
-        <p14:creationId xmlns:p14="http://schemas.microsoft.com/office/powerpoint/2010/main" val="1024086991"/>
+        <p14:creationId xmlns:p14="http://schemas.microsoft.com/office/powerpoint/2010/main" val="2823963876"/>
       </p:ext>
     </p:extLst>
   </p:cSld>
@@ -514,10 +324,6 @@
           <a:bodyPr/>
           <a:lstStyle/>
           <a:p>
-            <a:r>
-              <a:rPr lang="en-US" dirty="0"/>
-              <a:t/>
-            </a:r>
             <a:endParaRPr lang="en-US" dirty="0"/>
           </a:p>
         </p:txBody>
@@ -602,10 +408,6 @@
           <a:bodyPr/>
           <a:lstStyle/>
           <a:p>
-            <a:r>
-              <a:rPr lang="en-US" dirty="0"/>
-              <a:t/>
-            </a:r>
             <a:endParaRPr lang="en-US" dirty="0"/>
           </a:p>
         </p:txBody>
@@ -690,10 +492,6 @@
           <a:bodyPr/>
           <a:lstStyle/>
           <a:p>
-            <a:r>
-              <a:rPr lang="en-US" dirty="0"/>
-              <a:t/>
-            </a:r>
             <a:endParaRPr lang="en-US" dirty="0"/>
           </a:p>
         </p:txBody>
@@ -778,10 +576,6 @@
           <a:bodyPr/>
           <a:lstStyle/>
           <a:p>
-            <a:r>
-              <a:rPr lang="en-US" dirty="0"/>
-              <a:t/>
-            </a:r>
             <a:endParaRPr lang="en-US" dirty="0"/>
           </a:p>
         </p:txBody>
@@ -866,10 +660,6 @@
           <a:bodyPr/>
           <a:lstStyle/>
           <a:p>
-            <a:r>
-              <a:rPr lang="en-US" dirty="0"/>
-              <a:t/>
-            </a:r>
             <a:endParaRPr lang="en-US" dirty="0"/>
           </a:p>
         </p:txBody>
@@ -954,10 +744,6 @@
           <a:bodyPr/>
           <a:lstStyle/>
           <a:p>
-            <a:r>
-              <a:rPr lang="en-US" dirty="0"/>
-              <a:t/>
-            </a:r>
             <a:endParaRPr lang="en-US" dirty="0"/>
           </a:p>
         </p:txBody>
@@ -1042,10 +828,6 @@
           <a:bodyPr/>
           <a:lstStyle/>
           <a:p>
-            <a:r>
-              <a:rPr lang="en-US" dirty="0"/>
-              <a:t/>
-            </a:r>
             <a:endParaRPr lang="en-US" dirty="0"/>
           </a:p>
         </p:txBody>
@@ -1130,10 +912,6 @@
           <a:bodyPr/>
           <a:lstStyle/>
           <a:p>
-            <a:r>
-              <a:rPr lang="en-US" dirty="0"/>
-              <a:t/>
-            </a:r>
             <a:endParaRPr lang="en-US" dirty="0"/>
           </a:p>
         </p:txBody>
@@ -1218,10 +996,6 @@
           <a:bodyPr/>
           <a:lstStyle/>
           <a:p>
-            <a:r>
-              <a:rPr lang="en-US" dirty="0"/>
-              <a:t/>
-            </a:r>
             <a:endParaRPr lang="en-US" dirty="0"/>
           </a:p>
         </p:txBody>
@@ -1306,10 +1080,6 @@
           <a:bodyPr/>
           <a:lstStyle/>
           <a:p>
-            <a:r>
-              <a:rPr lang="en-US" dirty="0"/>
-              <a:t/>
-            </a:r>
             <a:endParaRPr lang="en-US" dirty="0"/>
           </a:p>
         </p:txBody>
@@ -1394,10 +1164,6 @@
           <a:bodyPr/>
           <a:lstStyle/>
           <a:p>
-            <a:r>
-              <a:rPr lang="en-US" dirty="0"/>
-              <a:t/>
-            </a:r>
             <a:endParaRPr lang="en-US" dirty="0"/>
           </a:p>
         </p:txBody>
@@ -1482,10 +1248,6 @@
           <a:bodyPr/>
           <a:lstStyle/>
           <a:p>
-            <a:r>
-              <a:rPr lang="en-US" dirty="0"/>
-              <a:t/>
-            </a:r>
             <a:endParaRPr lang="en-US" dirty="0"/>
           </a:p>
         </p:txBody>
@@ -1570,10 +1332,6 @@
           <a:bodyPr/>
           <a:lstStyle/>
           <a:p>
-            <a:r>
-              <a:rPr lang="en-US" dirty="0"/>
-              <a:t/>
-            </a:r>
             <a:endParaRPr lang="en-US" dirty="0"/>
           </a:p>
         </p:txBody>
@@ -1658,10 +1416,6 @@
           <a:bodyPr/>
           <a:lstStyle/>
           <a:p>
-            <a:r>
-              <a:rPr lang="en-US" dirty="0"/>
-              <a:t/>
-            </a:r>
             <a:endParaRPr lang="en-US" dirty="0"/>
           </a:p>
         </p:txBody>
@@ -1746,10 +1500,6 @@
           <a:bodyPr/>
           <a:lstStyle/>
           <a:p>
-            <a:r>
-              <a:rPr lang="en-US" dirty="0"/>
-              <a:t/>
-            </a:r>
             <a:endParaRPr lang="en-US" dirty="0"/>
           </a:p>
         </p:txBody>
@@ -1823,6 +1573,11 @@
 <file path=ppt/slideMasters/slideMaster1.xml><?xml version="1.0" encoding="utf-8"?>
 <p:sldMaster xmlns:a="http://schemas.openxmlformats.org/drawingml/2006/main" xmlns:r="http://schemas.openxmlformats.org/officeDocument/2006/relationships" xmlns:p="http://schemas.openxmlformats.org/presentationml/2006/main">
   <p:cSld>
+    <p:bg>
+      <p:bgRef idx="1001">
+        <a:schemeClr val="bg1"/>
+      </p:bgRef>
+    </p:bg>
     <p:spTree>
       <p:nvGrpSpPr>
         <p:cNvPr id="1" name=""/>
@@ -2105,6 +1860,7 @@
         <a:solidFill>
           <a:srgbClr val="090E1A"/>
         </a:solidFill>
+        <a:effectLst/>
       </p:bgPr>
     </p:bg>
     <p:spTree>
@@ -2145,6 +1901,13 @@
             <a:prstDash val="solid"/>
           </a:ln>
         </p:spPr>
+        <p:txBody>
+          <a:bodyPr/>
+          <a:lstStyle/>
+          <a:p>
+            <a:endParaRPr lang="en-IN"/>
+          </a:p>
+        </p:txBody>
       </p:sp>
       <p:sp>
         <p:nvSpPr>
@@ -2172,6 +1935,13 @@
             <a:prstDash val="solid"/>
           </a:ln>
         </p:spPr>
+        <p:txBody>
+          <a:bodyPr/>
+          <a:lstStyle/>
+          <a:p>
+            <a:endParaRPr lang="en-IN"/>
+          </a:p>
+        </p:txBody>
       </p:sp>
       <p:sp>
         <p:nvSpPr>
@@ -2194,7 +1964,7 @@
           <a:bodyPr wrap="square" rtlCol="0" anchor="ctr"/>
           <a:lstStyle/>
           <a:p>
-            <a:pPr algn="ctr" indent="0" marL="0">
+            <a:pPr marL="0" indent="0" algn="ctr">
               <a:buNone/>
             </a:pPr>
             <a:r>
@@ -2230,7 +2000,7 @@
           <a:bodyPr wrap="square" rtlCol="0" anchor="ctr"/>
           <a:lstStyle/>
           <a:p>
-            <a:pPr indent="0" marL="0">
+            <a:pPr marL="0" indent="0">
               <a:buNone/>
             </a:pPr>
             <a:r>
@@ -2269,7 +2039,7 @@
           <a:bodyPr wrap="square" rtlCol="0" anchor="ctr"/>
           <a:lstStyle/>
           <a:p>
-            <a:pPr indent="0" marL="0">
+            <a:pPr marL="0" indent="0">
               <a:buNone/>
             </a:pPr>
             <a:r>
@@ -2308,7 +2078,7 @@
           <a:bodyPr wrap="square" rtlCol="0" anchor="ctr"/>
           <a:lstStyle/>
           <a:p>
-            <a:pPr indent="0" marL="0">
+            <a:pPr marL="0" indent="0">
               <a:buNone/>
             </a:pPr>
             <a:r>
@@ -2348,6 +2118,13 @@
             <a:prstDash val="solid"/>
           </a:ln>
         </p:spPr>
+        <p:txBody>
+          <a:bodyPr/>
+          <a:lstStyle/>
+          <a:p>
+            <a:endParaRPr lang="en-IN"/>
+          </a:p>
+        </p:txBody>
       </p:sp>
       <p:sp>
         <p:nvSpPr>
@@ -2375,6 +2152,13 @@
             <a:prstDash val="solid"/>
           </a:ln>
         </p:spPr>
+        <p:txBody>
+          <a:bodyPr/>
+          <a:lstStyle/>
+          <a:p>
+            <a:endParaRPr lang="en-IN"/>
+          </a:p>
+        </p:txBody>
       </p:sp>
       <p:sp>
         <p:nvSpPr>
@@ -2397,7 +2181,7 @@
           <a:bodyPr wrap="square" rtlCol="0" anchor="ctr"/>
           <a:lstStyle/>
           <a:p>
-            <a:pPr indent="0" marL="0">
+            <a:pPr marL="0" indent="0">
               <a:buNone/>
             </a:pPr>
             <a:r>
@@ -2433,7 +2217,7 @@
           <a:bodyPr wrap="square" rtlCol="0" anchor="ctr"/>
           <a:lstStyle/>
           <a:p>
-            <a:pPr indent="0" marL="0">
+            <a:pPr marL="0" indent="0">
               <a:buNone/>
             </a:pPr>
             <a:r>
@@ -2469,7 +2253,7 @@
           <a:bodyPr wrap="square" rtlCol="0" anchor="ctr"/>
           <a:lstStyle/>
           <a:p>
-            <a:pPr indent="0" marL="0">
+            <a:pPr marL="0" indent="0">
               <a:buNone/>
             </a:pPr>
             <a:r>
@@ -2510,6 +2294,13 @@
             <a:prstDash val="solid"/>
           </a:ln>
         </p:spPr>
+        <p:txBody>
+          <a:bodyPr/>
+          <a:lstStyle/>
+          <a:p>
+            <a:endParaRPr lang="en-IN"/>
+          </a:p>
+        </p:txBody>
       </p:sp>
       <p:sp>
         <p:nvSpPr>
@@ -2532,7 +2323,7 @@
           <a:bodyPr wrap="square" rtlCol="0" anchor="ctr"/>
           <a:lstStyle/>
           <a:p>
-            <a:pPr indent="0" marL="0">
+            <a:pPr marL="0" indent="0">
               <a:buNone/>
             </a:pPr>
             <a:r>
@@ -2568,7 +2359,7 @@
           <a:bodyPr wrap="square" rtlCol="0" anchor="ctr"/>
           <a:lstStyle/>
           <a:p>
-            <a:pPr indent="0" marL="0">
+            <a:pPr marL="0" indent="0">
               <a:buNone/>
             </a:pPr>
             <a:r>
@@ -2604,7 +2395,7 @@
           <a:bodyPr wrap="square" rtlCol="0" anchor="ctr"/>
           <a:lstStyle/>
           <a:p>
-            <a:pPr indent="0" marL="0">
+            <a:pPr marL="0" indent="0">
               <a:buNone/>
             </a:pPr>
             <a:r>
@@ -2645,6 +2436,13 @@
             <a:prstDash val="solid"/>
           </a:ln>
         </p:spPr>
+        <p:txBody>
+          <a:bodyPr/>
+          <a:lstStyle/>
+          <a:p>
+            <a:endParaRPr lang="en-IN"/>
+          </a:p>
+        </p:txBody>
       </p:sp>
       <p:sp>
         <p:nvSpPr>
@@ -2667,7 +2465,7 @@
           <a:bodyPr wrap="square" rtlCol="0" anchor="ctr"/>
           <a:lstStyle/>
           <a:p>
-            <a:pPr indent="0" marL="0">
+            <a:pPr marL="0" indent="0">
               <a:buNone/>
             </a:pPr>
             <a:r>
@@ -2703,7 +2501,7 @@
           <a:bodyPr wrap="square" rtlCol="0" anchor="ctr"/>
           <a:lstStyle/>
           <a:p>
-            <a:pPr indent="0" marL="0">
+            <a:pPr marL="0" indent="0">
               <a:buNone/>
             </a:pPr>
             <a:r>
@@ -2739,7 +2537,7 @@
           <a:bodyPr wrap="square" rtlCol="0" anchor="ctr"/>
           <a:lstStyle/>
           <a:p>
-            <a:pPr indent="0" marL="0">
+            <a:pPr marL="0" indent="0">
               <a:buNone/>
             </a:pPr>
             <a:r>
@@ -2770,6 +2568,7 @@
         <a:solidFill>
           <a:srgbClr val="090E1A"/>
         </a:solidFill>
+        <a:effectLst/>
       </p:bgPr>
     </p:bg>
     <p:spTree>
@@ -2810,6 +2609,13 @@
             <a:prstDash val="solid"/>
           </a:ln>
         </p:spPr>
+        <p:txBody>
+          <a:bodyPr/>
+          <a:lstStyle/>
+          <a:p>
+            <a:endParaRPr lang="en-IN"/>
+          </a:p>
+        </p:txBody>
       </p:sp>
       <p:sp>
         <p:nvSpPr>
@@ -2832,7 +2638,7 @@
           <a:bodyPr wrap="square" rtlCol="0" anchor="ctr"/>
           <a:lstStyle/>
           <a:p>
-            <a:pPr indent="0" marL="0">
+            <a:pPr marL="0" indent="0">
               <a:buNone/>
             </a:pPr>
             <a:r>
@@ -2871,7 +2677,7 @@
           <a:bodyPr wrap="square" rtlCol="0" anchor="ctr"/>
           <a:lstStyle/>
           <a:p>
-            <a:pPr indent="0" marL="0">
+            <a:pPr marL="0" indent="0">
               <a:buNone/>
             </a:pPr>
             <a:r>
@@ -2910,6 +2716,13 @@
           </a:solidFill>
           <a:ln/>
         </p:spPr>
+        <p:txBody>
+          <a:bodyPr/>
+          <a:lstStyle/>
+          <a:p>
+            <a:endParaRPr lang="en-IN"/>
+          </a:p>
+        </p:txBody>
       </p:sp>
       <p:sp>
         <p:nvSpPr>
@@ -2932,7 +2745,7 @@
           <a:bodyPr wrap="square" rtlCol="0" anchor="ctr"/>
           <a:lstStyle/>
           <a:p>
-            <a:pPr algn="ctr" indent="0" marL="0">
+            <a:pPr marL="0" indent="0" algn="ctr">
               <a:buNone/>
             </a:pPr>
             <a:r>
@@ -2971,7 +2784,7 @@
           <a:bodyPr wrap="square" rtlCol="0" anchor="ctr"/>
           <a:lstStyle/>
           <a:p>
-            <a:pPr indent="0" marL="0">
+            <a:pPr marL="0" indent="0">
               <a:buNone/>
             </a:pPr>
             <a:r>
@@ -3010,7 +2823,7 @@
           <a:bodyPr wrap="square" rtlCol="0" anchor="ctr"/>
           <a:lstStyle/>
           <a:p>
-            <a:pPr algn="r" indent="0" marL="0">
+            <a:pPr marL="0" indent="0" algn="r">
               <a:buNone/>
             </a:pPr>
             <a:r>
@@ -3051,11 +2864,41 @@
             <a:tbl>
               <a:tblPr/>
               <a:tblGrid>
-                <a:gridCol w="3044952"/>
-                <a:gridCol w="2057400"/>
-                <a:gridCol w="2057400"/>
-                <a:gridCol w="2057400"/>
-                <a:gridCol w="2057400"/>
+                <a:gridCol w="3044952">
+                  <a:extLst>
+                    <a:ext uri="{9D8B030D-6E8A-4147-A177-3AD203B41FA5}">
+                      <a16:colId xmlns:a16="http://schemas.microsoft.com/office/drawing/2014/main" val="20000"/>
+                    </a:ext>
+                  </a:extLst>
+                </a:gridCol>
+                <a:gridCol w="2057400">
+                  <a:extLst>
+                    <a:ext uri="{9D8B030D-6E8A-4147-A177-3AD203B41FA5}">
+                      <a16:colId xmlns:a16="http://schemas.microsoft.com/office/drawing/2014/main" val="20001"/>
+                    </a:ext>
+                  </a:extLst>
+                </a:gridCol>
+                <a:gridCol w="2057400">
+                  <a:extLst>
+                    <a:ext uri="{9D8B030D-6E8A-4147-A177-3AD203B41FA5}">
+                      <a16:colId xmlns:a16="http://schemas.microsoft.com/office/drawing/2014/main" val="20002"/>
+                    </a:ext>
+                  </a:extLst>
+                </a:gridCol>
+                <a:gridCol w="2057400">
+                  <a:extLst>
+                    <a:ext uri="{9D8B030D-6E8A-4147-A177-3AD203B41FA5}">
+                      <a16:colId xmlns:a16="http://schemas.microsoft.com/office/drawing/2014/main" val="20003"/>
+                    </a:ext>
+                  </a:extLst>
+                </a:gridCol>
+                <a:gridCol w="2057400">
+                  <a:extLst>
+                    <a:ext uri="{9D8B030D-6E8A-4147-A177-3AD203B41FA5}">
+                      <a16:colId xmlns:a16="http://schemas.microsoft.com/office/drawing/2014/main" val="20004"/>
+                    </a:ext>
+                  </a:extLst>
+                </a:gridCol>
               </a:tblGrid>
               <a:tr h="475488">
                 <a:tc>
@@ -3063,7 +2906,7 @@
                     <a:bodyPr/>
                     <a:lstStyle/>
                     <a:p>
-                      <a:pPr algn="ctr" indent="0" marL="0">
+                      <a:pPr marL="0" indent="0" algn="ctr">
                         <a:buNone/>
                       </a:pPr>
                       <a:r>
@@ -3077,7 +2920,7 @@
                       <a:endParaRPr lang="en-US" sz="850" dirty="0"/>
                     </a:p>
                   </a:txBody>
-                  <a:tcPr marL="91440" marR="91440" marT="45720" marB="45720" anchor="ctr">
+                  <a:tcPr anchor="ctr">
                     <a:lnL w="12700" cap="flat" cmpd="sng" algn="ctr">
                       <a:solidFill>
                         <a:srgbClr val="1F2937"/>
@@ -3124,7 +2967,7 @@
                     <a:bodyPr/>
                     <a:lstStyle/>
                     <a:p>
-                      <a:pPr algn="ctr" indent="0" marL="0">
+                      <a:pPr marL="0" indent="0" algn="ctr">
                         <a:buNone/>
                       </a:pPr>
                       <a:r>
@@ -3138,7 +2981,7 @@
                       <a:endParaRPr lang="en-US" sz="850" dirty="0"/>
                     </a:p>
                   </a:txBody>
-                  <a:tcPr marL="91440" marR="91440" marT="45720" marB="45720" anchor="ctr">
+                  <a:tcPr anchor="ctr">
                     <a:lnL w="12700" cap="flat" cmpd="sng" algn="ctr">
                       <a:solidFill>
                         <a:srgbClr val="1F2937"/>
@@ -3185,7 +3028,7 @@
                     <a:bodyPr/>
                     <a:lstStyle/>
                     <a:p>
-                      <a:pPr algn="ctr" indent="0" marL="0">
+                      <a:pPr marL="0" indent="0" algn="ctr">
                         <a:buNone/>
                       </a:pPr>
                       <a:r>
@@ -3199,7 +3042,7 @@
                       <a:endParaRPr lang="en-US" sz="850" dirty="0"/>
                     </a:p>
                   </a:txBody>
-                  <a:tcPr marL="91440" marR="91440" marT="45720" marB="45720" anchor="ctr">
+                  <a:tcPr anchor="ctr">
                     <a:lnL w="12700" cap="flat" cmpd="sng" algn="ctr">
                       <a:solidFill>
                         <a:srgbClr val="1F2937"/>
@@ -3246,7 +3089,7 @@
                     <a:bodyPr/>
                     <a:lstStyle/>
                     <a:p>
-                      <a:pPr algn="ctr" indent="0" marL="0">
+                      <a:pPr marL="0" indent="0" algn="ctr">
                         <a:buNone/>
                       </a:pPr>
                       <a:r>
@@ -3260,7 +3103,7 @@
                       <a:endParaRPr lang="en-US" sz="850" dirty="0"/>
                     </a:p>
                   </a:txBody>
-                  <a:tcPr marL="91440" marR="91440" marT="45720" marB="45720" anchor="ctr">
+                  <a:tcPr anchor="ctr">
                     <a:lnL w="12700" cap="flat" cmpd="sng" algn="ctr">
                       <a:solidFill>
                         <a:srgbClr val="1F2937"/>
@@ -3307,7 +3150,7 @@
                     <a:bodyPr/>
                     <a:lstStyle/>
                     <a:p>
-                      <a:pPr algn="ctr" indent="0" marL="0">
+                      <a:pPr marL="0" indent="0" algn="ctr">
                         <a:buNone/>
                       </a:pPr>
                       <a:r>
@@ -3321,7 +3164,7 @@
                       <a:endParaRPr lang="en-US" sz="850" dirty="0"/>
                     </a:p>
                   </a:txBody>
-                  <a:tcPr marL="91440" marR="91440" marT="45720" marB="45720" anchor="ctr">
+                  <a:tcPr anchor="ctr">
                     <a:lnL w="12700" cap="flat" cmpd="sng" algn="ctr">
                       <a:solidFill>
                         <a:srgbClr val="1F2937"/>
@@ -3363,6 +3206,11 @@
                     </a:solidFill>
                   </a:tcPr>
                 </a:tc>
+                <a:extLst>
+                  <a:ext uri="{0D108BD9-81ED-4DB2-BD59-A6C34878D82A}">
+                    <a16:rowId xmlns:a16="http://schemas.microsoft.com/office/drawing/2014/main" val="10000"/>
+                  </a:ext>
+                </a:extLst>
               </a:tr>
               <a:tr h="475488">
                 <a:tc>
@@ -3370,7 +3218,7 @@
                     <a:bodyPr/>
                     <a:lstStyle/>
                     <a:p>
-                      <a:pPr algn="ctr" indent="0" marL="0">
+                      <a:pPr marL="0" indent="0" algn="ctr">
                         <a:buNone/>
                       </a:pPr>
                       <a:r>
@@ -3384,7 +3232,7 @@
                       <a:endParaRPr lang="en-US" sz="850" dirty="0"/>
                     </a:p>
                   </a:txBody>
-                  <a:tcPr marL="91440" marR="91440" marT="45720" marB="45720" anchor="ctr">
+                  <a:tcPr anchor="ctr">
                     <a:lnL w="12700" cap="flat" cmpd="sng" algn="ctr">
                       <a:solidFill>
                         <a:srgbClr val="1F2937"/>
@@ -3431,7 +3279,7 @@
                     <a:bodyPr/>
                     <a:lstStyle/>
                     <a:p>
-                      <a:pPr algn="ctr" indent="0" marL="0">
+                      <a:pPr marL="0" indent="0" algn="ctr">
                         <a:buNone/>
                       </a:pPr>
                       <a:r>
@@ -3445,7 +3293,7 @@
                       <a:endParaRPr lang="en-US" sz="850" dirty="0"/>
                     </a:p>
                   </a:txBody>
-                  <a:tcPr marL="91440" marR="91440" marT="45720" marB="45720" anchor="ctr">
+                  <a:tcPr anchor="ctr">
                     <a:lnL w="12700" cap="flat" cmpd="sng" algn="ctr">
                       <a:solidFill>
                         <a:srgbClr val="1F2937"/>
@@ -3492,7 +3340,7 @@
                     <a:bodyPr/>
                     <a:lstStyle/>
                     <a:p>
-                      <a:pPr algn="ctr" indent="0" marL="0">
+                      <a:pPr marL="0" indent="0" algn="ctr">
                         <a:buNone/>
                       </a:pPr>
                       <a:r>
@@ -3506,7 +3354,7 @@
                       <a:endParaRPr lang="en-US" sz="850" dirty="0"/>
                     </a:p>
                   </a:txBody>
-                  <a:tcPr marL="91440" marR="91440" marT="45720" marB="45720" anchor="ctr">
+                  <a:tcPr anchor="ctr">
                     <a:lnL w="12700" cap="flat" cmpd="sng" algn="ctr">
                       <a:solidFill>
                         <a:srgbClr val="1F2937"/>
@@ -3553,7 +3401,7 @@
                     <a:bodyPr/>
                     <a:lstStyle/>
                     <a:p>
-                      <a:pPr algn="ctr" indent="0" marL="0">
+                      <a:pPr marL="0" indent="0" algn="ctr">
                         <a:buNone/>
                       </a:pPr>
                       <a:r>
@@ -3567,7 +3415,7 @@
                       <a:endParaRPr lang="en-US" sz="850" dirty="0"/>
                     </a:p>
                   </a:txBody>
-                  <a:tcPr marL="91440" marR="91440" marT="45720" marB="45720" anchor="ctr">
+                  <a:tcPr anchor="ctr">
                     <a:lnL w="12700" cap="flat" cmpd="sng" algn="ctr">
                       <a:solidFill>
                         <a:srgbClr val="1F2937"/>
@@ -3614,7 +3462,7 @@
                     <a:bodyPr/>
                     <a:lstStyle/>
                     <a:p>
-                      <a:pPr algn="ctr" indent="0" marL="0">
+                      <a:pPr marL="0" indent="0" algn="ctr">
                         <a:buNone/>
                       </a:pPr>
                       <a:r>
@@ -3628,7 +3476,7 @@
                       <a:endParaRPr lang="en-US" sz="850" dirty="0"/>
                     </a:p>
                   </a:txBody>
-                  <a:tcPr marL="91440" marR="91440" marT="45720" marB="45720" anchor="ctr">
+                  <a:tcPr anchor="ctr">
                     <a:lnL w="12700" cap="flat" cmpd="sng" algn="ctr">
                       <a:solidFill>
                         <a:srgbClr val="1F2937"/>
@@ -3670,6 +3518,11 @@
                     </a:solidFill>
                   </a:tcPr>
                 </a:tc>
+                <a:extLst>
+                  <a:ext uri="{0D108BD9-81ED-4DB2-BD59-A6C34878D82A}">
+                    <a16:rowId xmlns:a16="http://schemas.microsoft.com/office/drawing/2014/main" val="10001"/>
+                  </a:ext>
+                </a:extLst>
               </a:tr>
               <a:tr h="475488">
                 <a:tc>
@@ -3677,7 +3530,7 @@
                     <a:bodyPr/>
                     <a:lstStyle/>
                     <a:p>
-                      <a:pPr algn="ctr" indent="0" marL="0">
+                      <a:pPr marL="0" indent="0" algn="ctr">
                         <a:buNone/>
                       </a:pPr>
                       <a:r>
@@ -3691,7 +3544,7 @@
                       <a:endParaRPr lang="en-US" sz="850" dirty="0"/>
                     </a:p>
                   </a:txBody>
-                  <a:tcPr marL="91440" marR="91440" marT="45720" marB="45720" anchor="ctr">
+                  <a:tcPr anchor="ctr">
                     <a:lnL w="12700" cap="flat" cmpd="sng" algn="ctr">
                       <a:solidFill>
                         <a:srgbClr val="1F2937"/>
@@ -3738,7 +3591,7 @@
                     <a:bodyPr/>
                     <a:lstStyle/>
                     <a:p>
-                      <a:pPr algn="ctr" indent="0" marL="0">
+                      <a:pPr marL="0" indent="0" algn="ctr">
                         <a:buNone/>
                       </a:pPr>
                       <a:r>
@@ -3752,7 +3605,7 @@
                       <a:endParaRPr lang="en-US" sz="850" dirty="0"/>
                     </a:p>
                   </a:txBody>
-                  <a:tcPr marL="91440" marR="91440" marT="45720" marB="45720" anchor="ctr">
+                  <a:tcPr anchor="ctr">
                     <a:lnL w="12700" cap="flat" cmpd="sng" algn="ctr">
                       <a:solidFill>
                         <a:srgbClr val="1F2937"/>
@@ -3799,7 +3652,7 @@
                     <a:bodyPr/>
                     <a:lstStyle/>
                     <a:p>
-                      <a:pPr algn="ctr" indent="0" marL="0">
+                      <a:pPr marL="0" indent="0" algn="ctr">
                         <a:buNone/>
                       </a:pPr>
                       <a:r>
@@ -3813,7 +3666,7 @@
                       <a:endParaRPr lang="en-US" sz="850" dirty="0"/>
                     </a:p>
                   </a:txBody>
-                  <a:tcPr marL="91440" marR="91440" marT="45720" marB="45720" anchor="ctr">
+                  <a:tcPr anchor="ctr">
                     <a:lnL w="12700" cap="flat" cmpd="sng" algn="ctr">
                       <a:solidFill>
                         <a:srgbClr val="1F2937"/>
@@ -3860,7 +3713,7 @@
                     <a:bodyPr/>
                     <a:lstStyle/>
                     <a:p>
-                      <a:pPr algn="ctr" indent="0" marL="0">
+                      <a:pPr marL="0" indent="0" algn="ctr">
                         <a:buNone/>
                       </a:pPr>
                       <a:r>
@@ -3874,7 +3727,7 @@
                       <a:endParaRPr lang="en-US" sz="850" dirty="0"/>
                     </a:p>
                   </a:txBody>
-                  <a:tcPr marL="91440" marR="91440" marT="45720" marB="45720" anchor="ctr">
+                  <a:tcPr anchor="ctr">
                     <a:lnL w="12700" cap="flat" cmpd="sng" algn="ctr">
                       <a:solidFill>
                         <a:srgbClr val="1F2937"/>
@@ -3921,7 +3774,7 @@
                     <a:bodyPr/>
                     <a:lstStyle/>
                     <a:p>
-                      <a:pPr algn="ctr" indent="0" marL="0">
+                      <a:pPr marL="0" indent="0" algn="ctr">
                         <a:buNone/>
                       </a:pPr>
                       <a:r>
@@ -3935,7 +3788,7 @@
                       <a:endParaRPr lang="en-US" sz="850" dirty="0"/>
                     </a:p>
                   </a:txBody>
-                  <a:tcPr marL="91440" marR="91440" marT="45720" marB="45720" anchor="ctr">
+                  <a:tcPr anchor="ctr">
                     <a:lnL w="12700" cap="flat" cmpd="sng" algn="ctr">
                       <a:solidFill>
                         <a:srgbClr val="1F2937"/>
@@ -3977,6 +3830,11 @@
                     </a:solidFill>
                   </a:tcPr>
                 </a:tc>
+                <a:extLst>
+                  <a:ext uri="{0D108BD9-81ED-4DB2-BD59-A6C34878D82A}">
+                    <a16:rowId xmlns:a16="http://schemas.microsoft.com/office/drawing/2014/main" val="10002"/>
+                  </a:ext>
+                </a:extLst>
               </a:tr>
               <a:tr h="475488">
                 <a:tc>
@@ -3984,7 +3842,7 @@
                     <a:bodyPr/>
                     <a:lstStyle/>
                     <a:p>
-                      <a:pPr algn="ctr" indent="0" marL="0">
+                      <a:pPr marL="0" indent="0" algn="ctr">
                         <a:buNone/>
                       </a:pPr>
                       <a:r>
@@ -3998,7 +3856,7 @@
                       <a:endParaRPr lang="en-US" sz="850" dirty="0"/>
                     </a:p>
                   </a:txBody>
-                  <a:tcPr marL="91440" marR="91440" marT="45720" marB="45720" anchor="ctr">
+                  <a:tcPr anchor="ctr">
                     <a:lnL w="12700" cap="flat" cmpd="sng" algn="ctr">
                       <a:solidFill>
                         <a:srgbClr val="1F2937"/>
@@ -4045,7 +3903,7 @@
                     <a:bodyPr/>
                     <a:lstStyle/>
                     <a:p>
-                      <a:pPr algn="ctr" indent="0" marL="0">
+                      <a:pPr marL="0" indent="0" algn="ctr">
                         <a:buNone/>
                       </a:pPr>
                       <a:r>
@@ -4059,7 +3917,7 @@
                       <a:endParaRPr lang="en-US" sz="850" dirty="0"/>
                     </a:p>
                   </a:txBody>
-                  <a:tcPr marL="91440" marR="91440" marT="45720" marB="45720" anchor="ctr">
+                  <a:tcPr anchor="ctr">
                     <a:lnL w="12700" cap="flat" cmpd="sng" algn="ctr">
                       <a:solidFill>
                         <a:srgbClr val="1F2937"/>
@@ -4106,7 +3964,7 @@
                     <a:bodyPr/>
                     <a:lstStyle/>
                     <a:p>
-                      <a:pPr algn="ctr" indent="0" marL="0">
+                      <a:pPr marL="0" indent="0" algn="ctr">
                         <a:buNone/>
                       </a:pPr>
                       <a:r>
@@ -4120,7 +3978,7 @@
                       <a:endParaRPr lang="en-US" sz="850" dirty="0"/>
                     </a:p>
                   </a:txBody>
-                  <a:tcPr marL="91440" marR="91440" marT="45720" marB="45720" anchor="ctr">
+                  <a:tcPr anchor="ctr">
                     <a:lnL w="12700" cap="flat" cmpd="sng" algn="ctr">
                       <a:solidFill>
                         <a:srgbClr val="1F2937"/>
@@ -4167,7 +4025,7 @@
                     <a:bodyPr/>
                     <a:lstStyle/>
                     <a:p>
-                      <a:pPr algn="ctr" indent="0" marL="0">
+                      <a:pPr marL="0" indent="0" algn="ctr">
                         <a:buNone/>
                       </a:pPr>
                       <a:r>
@@ -4181,7 +4039,7 @@
                       <a:endParaRPr lang="en-US" sz="850" dirty="0"/>
                     </a:p>
                   </a:txBody>
-                  <a:tcPr marL="91440" marR="91440" marT="45720" marB="45720" anchor="ctr">
+                  <a:tcPr anchor="ctr">
                     <a:lnL w="12700" cap="flat" cmpd="sng" algn="ctr">
                       <a:solidFill>
                         <a:srgbClr val="1F2937"/>
@@ -4228,7 +4086,7 @@
                     <a:bodyPr/>
                     <a:lstStyle/>
                     <a:p>
-                      <a:pPr algn="ctr" indent="0" marL="0">
+                      <a:pPr marL="0" indent="0" algn="ctr">
                         <a:buNone/>
                       </a:pPr>
                       <a:r>
@@ -4242,7 +4100,7 @@
                       <a:endParaRPr lang="en-US" sz="850" dirty="0"/>
                     </a:p>
                   </a:txBody>
-                  <a:tcPr marL="91440" marR="91440" marT="45720" marB="45720" anchor="ctr">
+                  <a:tcPr anchor="ctr">
                     <a:lnL w="12700" cap="flat" cmpd="sng" algn="ctr">
                       <a:solidFill>
                         <a:srgbClr val="1F2937"/>
@@ -4284,6 +4142,11 @@
                     </a:solidFill>
                   </a:tcPr>
                 </a:tc>
+                <a:extLst>
+                  <a:ext uri="{0D108BD9-81ED-4DB2-BD59-A6C34878D82A}">
+                    <a16:rowId xmlns:a16="http://schemas.microsoft.com/office/drawing/2014/main" val="10003"/>
+                  </a:ext>
+                </a:extLst>
               </a:tr>
               <a:tr h="475488">
                 <a:tc>
@@ -4291,7 +4154,7 @@
                     <a:bodyPr/>
                     <a:lstStyle/>
                     <a:p>
-                      <a:pPr algn="ctr" indent="0" marL="0">
+                      <a:pPr marL="0" indent="0" algn="ctr">
                         <a:buNone/>
                       </a:pPr>
                       <a:r>
@@ -4305,7 +4168,7 @@
                       <a:endParaRPr lang="en-US" sz="850" dirty="0"/>
                     </a:p>
                   </a:txBody>
-                  <a:tcPr marL="91440" marR="91440" marT="45720" marB="45720" anchor="ctr">
+                  <a:tcPr anchor="ctr">
                     <a:lnL w="12700" cap="flat" cmpd="sng" algn="ctr">
                       <a:solidFill>
                         <a:srgbClr val="1F2937"/>
@@ -4352,7 +4215,7 @@
                     <a:bodyPr/>
                     <a:lstStyle/>
                     <a:p>
-                      <a:pPr algn="ctr" indent="0" marL="0">
+                      <a:pPr marL="0" indent="0" algn="ctr">
                         <a:buNone/>
                       </a:pPr>
                       <a:r>
@@ -4366,7 +4229,7 @@
                       <a:endParaRPr lang="en-US" sz="850" dirty="0"/>
                     </a:p>
                   </a:txBody>
-                  <a:tcPr marL="91440" marR="91440" marT="45720" marB="45720" anchor="ctr">
+                  <a:tcPr anchor="ctr">
                     <a:lnL w="12700" cap="flat" cmpd="sng" algn="ctr">
                       <a:solidFill>
                         <a:srgbClr val="1F2937"/>
@@ -4413,7 +4276,7 @@
                     <a:bodyPr/>
                     <a:lstStyle/>
                     <a:p>
-                      <a:pPr algn="ctr" indent="0" marL="0">
+                      <a:pPr marL="0" indent="0" algn="ctr">
                         <a:buNone/>
                       </a:pPr>
                       <a:r>
@@ -4427,7 +4290,7 @@
                       <a:endParaRPr lang="en-US" sz="850" dirty="0"/>
                     </a:p>
                   </a:txBody>
-                  <a:tcPr marL="91440" marR="91440" marT="45720" marB="45720" anchor="ctr">
+                  <a:tcPr anchor="ctr">
                     <a:lnL w="12700" cap="flat" cmpd="sng" algn="ctr">
                       <a:solidFill>
                         <a:srgbClr val="1F2937"/>
@@ -4474,7 +4337,7 @@
                     <a:bodyPr/>
                     <a:lstStyle/>
                     <a:p>
-                      <a:pPr algn="ctr" indent="0" marL="0">
+                      <a:pPr marL="0" indent="0" algn="ctr">
                         <a:buNone/>
                       </a:pPr>
                       <a:r>
@@ -4488,7 +4351,7 @@
                       <a:endParaRPr lang="en-US" sz="850" dirty="0"/>
                     </a:p>
                   </a:txBody>
-                  <a:tcPr marL="91440" marR="91440" marT="45720" marB="45720" anchor="ctr">
+                  <a:tcPr anchor="ctr">
                     <a:lnL w="12700" cap="flat" cmpd="sng" algn="ctr">
                       <a:solidFill>
                         <a:srgbClr val="1F2937"/>
@@ -4535,7 +4398,7 @@
                     <a:bodyPr/>
                     <a:lstStyle/>
                     <a:p>
-                      <a:pPr algn="ctr" indent="0" marL="0">
+                      <a:pPr marL="0" indent="0" algn="ctr">
                         <a:buNone/>
                       </a:pPr>
                       <a:r>
@@ -4549,7 +4412,7 @@
                       <a:endParaRPr lang="en-US" sz="850" dirty="0"/>
                     </a:p>
                   </a:txBody>
-                  <a:tcPr marL="91440" marR="91440" marT="45720" marB="45720" anchor="ctr">
+                  <a:tcPr anchor="ctr">
                     <a:lnL w="12700" cap="flat" cmpd="sng" algn="ctr">
                       <a:solidFill>
                         <a:srgbClr val="1F2937"/>
@@ -4591,6 +4454,11 @@
                     </a:solidFill>
                   </a:tcPr>
                 </a:tc>
+                <a:extLst>
+                  <a:ext uri="{0D108BD9-81ED-4DB2-BD59-A6C34878D82A}">
+                    <a16:rowId xmlns:a16="http://schemas.microsoft.com/office/drawing/2014/main" val="10004"/>
+                  </a:ext>
+                </a:extLst>
               </a:tr>
               <a:tr h="475488">
                 <a:tc>
@@ -4598,7 +4466,7 @@
                     <a:bodyPr/>
                     <a:lstStyle/>
                     <a:p>
-                      <a:pPr algn="ctr" indent="0" marL="0">
+                      <a:pPr marL="0" indent="0" algn="ctr">
                         <a:buNone/>
                       </a:pPr>
                       <a:r>
@@ -4612,7 +4480,7 @@
                       <a:endParaRPr lang="en-US" sz="850" dirty="0"/>
                     </a:p>
                   </a:txBody>
-                  <a:tcPr marL="91440" marR="91440" marT="45720" marB="45720" anchor="ctr">
+                  <a:tcPr anchor="ctr">
                     <a:lnL w="12700" cap="flat" cmpd="sng" algn="ctr">
                       <a:solidFill>
                         <a:srgbClr val="1F2937"/>
@@ -4659,7 +4527,7 @@
                     <a:bodyPr/>
                     <a:lstStyle/>
                     <a:p>
-                      <a:pPr algn="ctr" indent="0" marL="0">
+                      <a:pPr marL="0" indent="0" algn="ctr">
                         <a:buNone/>
                       </a:pPr>
                       <a:r>
@@ -4673,7 +4541,7 @@
                       <a:endParaRPr lang="en-US" sz="850" dirty="0"/>
                     </a:p>
                   </a:txBody>
-                  <a:tcPr marL="91440" marR="91440" marT="45720" marB="45720" anchor="ctr">
+                  <a:tcPr anchor="ctr">
                     <a:lnL w="12700" cap="flat" cmpd="sng" algn="ctr">
                       <a:solidFill>
                         <a:srgbClr val="1F2937"/>
@@ -4720,7 +4588,7 @@
                     <a:bodyPr/>
                     <a:lstStyle/>
                     <a:p>
-                      <a:pPr algn="ctr" indent="0" marL="0">
+                      <a:pPr marL="0" indent="0" algn="ctr">
                         <a:buNone/>
                       </a:pPr>
                       <a:r>
@@ -4734,7 +4602,7 @@
                       <a:endParaRPr lang="en-US" sz="850" dirty="0"/>
                     </a:p>
                   </a:txBody>
-                  <a:tcPr marL="91440" marR="91440" marT="45720" marB="45720" anchor="ctr">
+                  <a:tcPr anchor="ctr">
                     <a:lnL w="12700" cap="flat" cmpd="sng" algn="ctr">
                       <a:solidFill>
                         <a:srgbClr val="1F2937"/>
@@ -4781,7 +4649,7 @@
                     <a:bodyPr/>
                     <a:lstStyle/>
                     <a:p>
-                      <a:pPr algn="ctr" indent="0" marL="0">
+                      <a:pPr marL="0" indent="0" algn="ctr">
                         <a:buNone/>
                       </a:pPr>
                       <a:r>
@@ -4795,7 +4663,7 @@
                       <a:endParaRPr lang="en-US" sz="850" dirty="0"/>
                     </a:p>
                   </a:txBody>
-                  <a:tcPr marL="91440" marR="91440" marT="45720" marB="45720" anchor="ctr">
+                  <a:tcPr anchor="ctr">
                     <a:lnL w="12700" cap="flat" cmpd="sng" algn="ctr">
                       <a:solidFill>
                         <a:srgbClr val="1F2937"/>
@@ -4842,7 +4710,7 @@
                     <a:bodyPr/>
                     <a:lstStyle/>
                     <a:p>
-                      <a:pPr algn="ctr" indent="0" marL="0">
+                      <a:pPr marL="0" indent="0" algn="ctr">
                         <a:buNone/>
                       </a:pPr>
                       <a:r>
@@ -4856,7 +4724,7 @@
                       <a:endParaRPr lang="en-US" sz="850" dirty="0"/>
                     </a:p>
                   </a:txBody>
-                  <a:tcPr marL="91440" marR="91440" marT="45720" marB="45720" anchor="ctr">
+                  <a:tcPr anchor="ctr">
                     <a:lnL w="12700" cap="flat" cmpd="sng" algn="ctr">
                       <a:solidFill>
                         <a:srgbClr val="1F2937"/>
@@ -4898,6 +4766,11 @@
                     </a:solidFill>
                   </a:tcPr>
                 </a:tc>
+                <a:extLst>
+                  <a:ext uri="{0D108BD9-81ED-4DB2-BD59-A6C34878D82A}">
+                    <a16:rowId xmlns:a16="http://schemas.microsoft.com/office/drawing/2014/main" val="10005"/>
+                  </a:ext>
+                </a:extLst>
               </a:tr>
               <a:tr h="475488">
                 <a:tc>
@@ -4905,7 +4778,7 @@
                     <a:bodyPr/>
                     <a:lstStyle/>
                     <a:p>
-                      <a:pPr algn="ctr" indent="0" marL="0">
+                      <a:pPr marL="0" indent="0" algn="ctr">
                         <a:buNone/>
                       </a:pPr>
                       <a:r>
@@ -4919,7 +4792,7 @@
                       <a:endParaRPr lang="en-US" sz="850" dirty="0"/>
                     </a:p>
                   </a:txBody>
-                  <a:tcPr marL="91440" marR="91440" marT="45720" marB="45720" anchor="ctr">
+                  <a:tcPr anchor="ctr">
                     <a:lnL w="12700" cap="flat" cmpd="sng" algn="ctr">
                       <a:solidFill>
                         <a:srgbClr val="1F2937"/>
@@ -4966,7 +4839,7 @@
                     <a:bodyPr/>
                     <a:lstStyle/>
                     <a:p>
-                      <a:pPr algn="ctr" indent="0" marL="0">
+                      <a:pPr marL="0" indent="0" algn="ctr">
                         <a:buNone/>
                       </a:pPr>
                       <a:r>
@@ -4980,7 +4853,7 @@
                       <a:endParaRPr lang="en-US" sz="850" dirty="0"/>
                     </a:p>
                   </a:txBody>
-                  <a:tcPr marL="91440" marR="91440" marT="45720" marB="45720" anchor="ctr">
+                  <a:tcPr anchor="ctr">
                     <a:lnL w="12700" cap="flat" cmpd="sng" algn="ctr">
                       <a:solidFill>
                         <a:srgbClr val="1F2937"/>
@@ -5027,7 +4900,7 @@
                     <a:bodyPr/>
                     <a:lstStyle/>
                     <a:p>
-                      <a:pPr algn="ctr" indent="0" marL="0">
+                      <a:pPr marL="0" indent="0" algn="ctr">
                         <a:buNone/>
                       </a:pPr>
                       <a:r>
@@ -5041,7 +4914,7 @@
                       <a:endParaRPr lang="en-US" sz="850" dirty="0"/>
                     </a:p>
                   </a:txBody>
-                  <a:tcPr marL="91440" marR="91440" marT="45720" marB="45720" anchor="ctr">
+                  <a:tcPr anchor="ctr">
                     <a:lnL w="12700" cap="flat" cmpd="sng" algn="ctr">
                       <a:solidFill>
                         <a:srgbClr val="1F2937"/>
@@ -5088,7 +4961,7 @@
                     <a:bodyPr/>
                     <a:lstStyle/>
                     <a:p>
-                      <a:pPr algn="ctr" indent="0" marL="0">
+                      <a:pPr marL="0" indent="0" algn="ctr">
                         <a:buNone/>
                       </a:pPr>
                       <a:r>
@@ -5102,7 +4975,7 @@
                       <a:endParaRPr lang="en-US" sz="850" dirty="0"/>
                     </a:p>
                   </a:txBody>
-                  <a:tcPr marL="91440" marR="91440" marT="45720" marB="45720" anchor="ctr">
+                  <a:tcPr anchor="ctr">
                     <a:lnL w="12700" cap="flat" cmpd="sng" algn="ctr">
                       <a:solidFill>
                         <a:srgbClr val="1F2937"/>
@@ -5149,7 +5022,7 @@
                     <a:bodyPr/>
                     <a:lstStyle/>
                     <a:p>
-                      <a:pPr algn="ctr" indent="0" marL="0">
+                      <a:pPr marL="0" indent="0" algn="ctr">
                         <a:buNone/>
                       </a:pPr>
                       <a:r>
@@ -5163,7 +5036,7 @@
                       <a:endParaRPr lang="en-US" sz="850" dirty="0"/>
                     </a:p>
                   </a:txBody>
-                  <a:tcPr marL="91440" marR="91440" marT="45720" marB="45720" anchor="ctr">
+                  <a:tcPr anchor="ctr">
                     <a:lnL w="12700" cap="flat" cmpd="sng" algn="ctr">
                       <a:solidFill>
                         <a:srgbClr val="1F2937"/>
@@ -5205,6 +5078,11 @@
                     </a:solidFill>
                   </a:tcPr>
                 </a:tc>
+                <a:extLst>
+                  <a:ext uri="{0D108BD9-81ED-4DB2-BD59-A6C34878D82A}">
+                    <a16:rowId xmlns:a16="http://schemas.microsoft.com/office/drawing/2014/main" val="10006"/>
+                  </a:ext>
+                </a:extLst>
               </a:tr>
               <a:tr h="475488">
                 <a:tc>
@@ -5212,7 +5090,7 @@
                     <a:bodyPr/>
                     <a:lstStyle/>
                     <a:p>
-                      <a:pPr algn="ctr" indent="0" marL="0">
+                      <a:pPr marL="0" indent="0" algn="ctr">
                         <a:buNone/>
                       </a:pPr>
                       <a:r>
@@ -5226,7 +5104,7 @@
                       <a:endParaRPr lang="en-US" sz="850" dirty="0"/>
                     </a:p>
                   </a:txBody>
-                  <a:tcPr marL="91440" marR="91440" marT="45720" marB="45720" anchor="ctr">
+                  <a:tcPr anchor="ctr">
                     <a:lnL w="12700" cap="flat" cmpd="sng" algn="ctr">
                       <a:solidFill>
                         <a:srgbClr val="1F2937"/>
@@ -5273,7 +5151,7 @@
                     <a:bodyPr/>
                     <a:lstStyle/>
                     <a:p>
-                      <a:pPr algn="ctr" indent="0" marL="0">
+                      <a:pPr marL="0" indent="0" algn="ctr">
                         <a:buNone/>
                       </a:pPr>
                       <a:r>
@@ -5287,7 +5165,7 @@
                       <a:endParaRPr lang="en-US" sz="850" dirty="0"/>
                     </a:p>
                   </a:txBody>
-                  <a:tcPr marL="91440" marR="91440" marT="45720" marB="45720" anchor="ctr">
+                  <a:tcPr anchor="ctr">
                     <a:lnL w="12700" cap="flat" cmpd="sng" algn="ctr">
                       <a:solidFill>
                         <a:srgbClr val="1F2937"/>
@@ -5334,7 +5212,7 @@
                     <a:bodyPr/>
                     <a:lstStyle/>
                     <a:p>
-                      <a:pPr algn="ctr" indent="0" marL="0">
+                      <a:pPr marL="0" indent="0" algn="ctr">
                         <a:buNone/>
                       </a:pPr>
                       <a:r>
@@ -5348,7 +5226,7 @@
                       <a:endParaRPr lang="en-US" sz="850" dirty="0"/>
                     </a:p>
                   </a:txBody>
-                  <a:tcPr marL="91440" marR="91440" marT="45720" marB="45720" anchor="ctr">
+                  <a:tcPr anchor="ctr">
                     <a:lnL w="12700" cap="flat" cmpd="sng" algn="ctr">
                       <a:solidFill>
                         <a:srgbClr val="1F2937"/>
@@ -5395,7 +5273,7 @@
                     <a:bodyPr/>
                     <a:lstStyle/>
                     <a:p>
-                      <a:pPr algn="ctr" indent="0" marL="0">
+                      <a:pPr marL="0" indent="0" algn="ctr">
                         <a:buNone/>
                       </a:pPr>
                       <a:r>
@@ -5409,7 +5287,7 @@
                       <a:endParaRPr lang="en-US" sz="850" dirty="0"/>
                     </a:p>
                   </a:txBody>
-                  <a:tcPr marL="91440" marR="91440" marT="45720" marB="45720" anchor="ctr">
+                  <a:tcPr anchor="ctr">
                     <a:lnL w="12700" cap="flat" cmpd="sng" algn="ctr">
                       <a:solidFill>
                         <a:srgbClr val="1F2937"/>
@@ -5456,7 +5334,7 @@
                     <a:bodyPr/>
                     <a:lstStyle/>
                     <a:p>
-                      <a:pPr algn="ctr" indent="0" marL="0">
+                      <a:pPr marL="0" indent="0" algn="ctr">
                         <a:buNone/>
                       </a:pPr>
                       <a:r>
@@ -5470,7 +5348,7 @@
                       <a:endParaRPr lang="en-US" sz="850" dirty="0"/>
                     </a:p>
                   </a:txBody>
-                  <a:tcPr marL="91440" marR="91440" marT="45720" marB="45720" anchor="ctr">
+                  <a:tcPr anchor="ctr">
                     <a:lnL w="12700" cap="flat" cmpd="sng" algn="ctr">
                       <a:solidFill>
                         <a:srgbClr val="1F2937"/>
@@ -5512,6 +5390,11 @@
                     </a:solidFill>
                   </a:tcPr>
                 </a:tc>
+                <a:extLst>
+                  <a:ext uri="{0D108BD9-81ED-4DB2-BD59-A6C34878D82A}">
+                    <a16:rowId xmlns:a16="http://schemas.microsoft.com/office/drawing/2014/main" val="10007"/>
+                  </a:ext>
+                </a:extLst>
               </a:tr>
               <a:tr h="475488">
                 <a:tc>
@@ -5519,7 +5402,7 @@
                     <a:bodyPr/>
                     <a:lstStyle/>
                     <a:p>
-                      <a:pPr algn="ctr" indent="0" marL="0">
+                      <a:pPr marL="0" indent="0" algn="ctr">
                         <a:buNone/>
                       </a:pPr>
                       <a:r>
@@ -5533,7 +5416,7 @@
                       <a:endParaRPr lang="en-US" sz="850" dirty="0"/>
                     </a:p>
                   </a:txBody>
-                  <a:tcPr marL="91440" marR="91440" marT="45720" marB="45720" anchor="ctr">
+                  <a:tcPr anchor="ctr">
                     <a:lnL w="12700" cap="flat" cmpd="sng" algn="ctr">
                       <a:solidFill>
                         <a:srgbClr val="1F2937"/>
@@ -5580,7 +5463,7 @@
                     <a:bodyPr/>
                     <a:lstStyle/>
                     <a:p>
-                      <a:pPr algn="ctr" indent="0" marL="0">
+                      <a:pPr marL="0" indent="0" algn="ctr">
                         <a:buNone/>
                       </a:pPr>
                       <a:r>
@@ -5594,7 +5477,7 @@
                       <a:endParaRPr lang="en-US" sz="850" dirty="0"/>
                     </a:p>
                   </a:txBody>
-                  <a:tcPr marL="91440" marR="91440" marT="45720" marB="45720" anchor="ctr">
+                  <a:tcPr anchor="ctr">
                     <a:lnL w="12700" cap="flat" cmpd="sng" algn="ctr">
                       <a:solidFill>
                         <a:srgbClr val="1F2937"/>
@@ -5641,7 +5524,7 @@
                     <a:bodyPr/>
                     <a:lstStyle/>
                     <a:p>
-                      <a:pPr algn="ctr" indent="0" marL="0">
+                      <a:pPr marL="0" indent="0" algn="ctr">
                         <a:buNone/>
                       </a:pPr>
                       <a:r>
@@ -5655,7 +5538,7 @@
                       <a:endParaRPr lang="en-US" sz="850" dirty="0"/>
                     </a:p>
                   </a:txBody>
-                  <a:tcPr marL="91440" marR="91440" marT="45720" marB="45720" anchor="ctr">
+                  <a:tcPr anchor="ctr">
                     <a:lnL w="12700" cap="flat" cmpd="sng" algn="ctr">
                       <a:solidFill>
                         <a:srgbClr val="1F2937"/>
@@ -5702,7 +5585,7 @@
                     <a:bodyPr/>
                     <a:lstStyle/>
                     <a:p>
-                      <a:pPr algn="ctr" indent="0" marL="0">
+                      <a:pPr marL="0" indent="0" algn="ctr">
                         <a:buNone/>
                       </a:pPr>
                       <a:r>
@@ -5716,7 +5599,7 @@
                       <a:endParaRPr lang="en-US" sz="850" dirty="0"/>
                     </a:p>
                   </a:txBody>
-                  <a:tcPr marL="91440" marR="91440" marT="45720" marB="45720" anchor="ctr">
+                  <a:tcPr anchor="ctr">
                     <a:lnL w="12700" cap="flat" cmpd="sng" algn="ctr">
                       <a:solidFill>
                         <a:srgbClr val="1F2937"/>
@@ -5763,7 +5646,7 @@
                     <a:bodyPr/>
                     <a:lstStyle/>
                     <a:p>
-                      <a:pPr algn="ctr" indent="0" marL="0">
+                      <a:pPr marL="0" indent="0" algn="ctr">
                         <a:buNone/>
                       </a:pPr>
                       <a:r>
@@ -5777,7 +5660,7 @@
                       <a:endParaRPr lang="en-US" sz="850" dirty="0"/>
                     </a:p>
                   </a:txBody>
-                  <a:tcPr marL="91440" marR="91440" marT="45720" marB="45720" anchor="ctr">
+                  <a:tcPr anchor="ctr">
                     <a:lnL w="12700" cap="flat" cmpd="sng" algn="ctr">
                       <a:solidFill>
                         <a:srgbClr val="1F2937"/>
@@ -5819,6 +5702,11 @@
                     </a:solidFill>
                   </a:tcPr>
                 </a:tc>
+                <a:extLst>
+                  <a:ext uri="{0D108BD9-81ED-4DB2-BD59-A6C34878D82A}">
+                    <a16:rowId xmlns:a16="http://schemas.microsoft.com/office/drawing/2014/main" val="10008"/>
+                  </a:ext>
+                </a:extLst>
               </a:tr>
               <a:tr h="475488">
                 <a:tc>
@@ -5826,7 +5714,7 @@
                     <a:bodyPr/>
                     <a:lstStyle/>
                     <a:p>
-                      <a:pPr algn="ctr" indent="0" marL="0">
+                      <a:pPr marL="0" indent="0" algn="ctr">
                         <a:buNone/>
                       </a:pPr>
                       <a:r>
@@ -5840,7 +5728,7 @@
                       <a:endParaRPr lang="en-US" sz="850" dirty="0"/>
                     </a:p>
                   </a:txBody>
-                  <a:tcPr marL="91440" marR="91440" marT="45720" marB="45720" anchor="ctr">
+                  <a:tcPr anchor="ctr">
                     <a:lnL w="12700" cap="flat" cmpd="sng" algn="ctr">
                       <a:solidFill>
                         <a:srgbClr val="1F2937"/>
@@ -5887,7 +5775,7 @@
                     <a:bodyPr/>
                     <a:lstStyle/>
                     <a:p>
-                      <a:pPr algn="ctr" indent="0" marL="0">
+                      <a:pPr marL="0" indent="0" algn="ctr">
                         <a:buNone/>
                       </a:pPr>
                       <a:r>
@@ -5901,7 +5789,7 @@
                       <a:endParaRPr lang="en-US" sz="850" dirty="0"/>
                     </a:p>
                   </a:txBody>
-                  <a:tcPr marL="91440" marR="91440" marT="45720" marB="45720" anchor="ctr">
+                  <a:tcPr anchor="ctr">
                     <a:lnL w="12700" cap="flat" cmpd="sng" algn="ctr">
                       <a:solidFill>
                         <a:srgbClr val="1F2937"/>
@@ -5948,7 +5836,7 @@
                     <a:bodyPr/>
                     <a:lstStyle/>
                     <a:p>
-                      <a:pPr algn="ctr" indent="0" marL="0">
+                      <a:pPr marL="0" indent="0" algn="ctr">
                         <a:buNone/>
                       </a:pPr>
                       <a:r>
@@ -5962,7 +5850,7 @@
                       <a:endParaRPr lang="en-US" sz="850" dirty="0"/>
                     </a:p>
                   </a:txBody>
-                  <a:tcPr marL="91440" marR="91440" marT="45720" marB="45720" anchor="ctr">
+                  <a:tcPr anchor="ctr">
                     <a:lnL w="12700" cap="flat" cmpd="sng" algn="ctr">
                       <a:solidFill>
                         <a:srgbClr val="1F2937"/>
@@ -6009,7 +5897,7 @@
                     <a:bodyPr/>
                     <a:lstStyle/>
                     <a:p>
-                      <a:pPr algn="ctr" indent="0" marL="0">
+                      <a:pPr marL="0" indent="0" algn="ctr">
                         <a:buNone/>
                       </a:pPr>
                       <a:r>
@@ -6023,7 +5911,7 @@
                       <a:endParaRPr lang="en-US" sz="850" dirty="0"/>
                     </a:p>
                   </a:txBody>
-                  <a:tcPr marL="91440" marR="91440" marT="45720" marB="45720" anchor="ctr">
+                  <a:tcPr anchor="ctr">
                     <a:lnL w="12700" cap="flat" cmpd="sng" algn="ctr">
                       <a:solidFill>
                         <a:srgbClr val="1F2937"/>
@@ -6070,7 +5958,7 @@
                     <a:bodyPr/>
                     <a:lstStyle/>
                     <a:p>
-                      <a:pPr algn="ctr" indent="0" marL="0">
+                      <a:pPr marL="0" indent="0" algn="ctr">
                         <a:buNone/>
                       </a:pPr>
                       <a:r>
@@ -6084,7 +5972,7 @@
                       <a:endParaRPr lang="en-US" sz="850" dirty="0"/>
                     </a:p>
                   </a:txBody>
-                  <a:tcPr marL="91440" marR="91440" marT="45720" marB="45720" anchor="ctr">
+                  <a:tcPr anchor="ctr">
                     <a:lnL w="12700" cap="flat" cmpd="sng" algn="ctr">
                       <a:solidFill>
                         <a:srgbClr val="1F2937"/>
@@ -6126,6 +6014,11 @@
                     </a:solidFill>
                   </a:tcPr>
                 </a:tc>
+                <a:extLst>
+                  <a:ext uri="{0D108BD9-81ED-4DB2-BD59-A6C34878D82A}">
+                    <a16:rowId xmlns:a16="http://schemas.microsoft.com/office/drawing/2014/main" val="10009"/>
+                  </a:ext>
+                </a:extLst>
               </a:tr>
             </a:tbl>
           </a:graphicData>
@@ -6147,6 +6040,7 @@
         <a:solidFill>
           <a:srgbClr val="090E1A"/>
         </a:solidFill>
+        <a:effectLst/>
       </p:bgPr>
     </p:bg>
     <p:spTree>
@@ -6187,6 +6081,13 @@
             <a:prstDash val="solid"/>
           </a:ln>
         </p:spPr>
+        <p:txBody>
+          <a:bodyPr/>
+          <a:lstStyle/>
+          <a:p>
+            <a:endParaRPr lang="en-IN"/>
+          </a:p>
+        </p:txBody>
       </p:sp>
       <p:sp>
         <p:nvSpPr>
@@ -6209,7 +6110,7 @@
           <a:bodyPr wrap="square" rtlCol="0" anchor="ctr"/>
           <a:lstStyle/>
           <a:p>
-            <a:pPr indent="0" marL="0">
+            <a:pPr marL="0" indent="0">
               <a:buNone/>
             </a:pPr>
             <a:r>
@@ -6248,7 +6149,7 @@
           <a:bodyPr wrap="square" rtlCol="0" anchor="ctr"/>
           <a:lstStyle/>
           <a:p>
-            <a:pPr indent="0" marL="0">
+            <a:pPr marL="0" indent="0">
               <a:buNone/>
             </a:pPr>
             <a:r>
@@ -6287,6 +6188,13 @@
           </a:solidFill>
           <a:ln/>
         </p:spPr>
+        <p:txBody>
+          <a:bodyPr/>
+          <a:lstStyle/>
+          <a:p>
+            <a:endParaRPr lang="en-IN"/>
+          </a:p>
+        </p:txBody>
       </p:sp>
       <p:sp>
         <p:nvSpPr>
@@ -6309,7 +6217,7 @@
           <a:bodyPr wrap="square" rtlCol="0" anchor="ctr"/>
           <a:lstStyle/>
           <a:p>
-            <a:pPr algn="ctr" indent="0" marL="0">
+            <a:pPr marL="0" indent="0" algn="ctr">
               <a:buNone/>
             </a:pPr>
             <a:r>
@@ -6348,7 +6256,7 @@
           <a:bodyPr wrap="square" rtlCol="0" anchor="ctr"/>
           <a:lstStyle/>
           <a:p>
-            <a:pPr indent="0" marL="0">
+            <a:pPr marL="0" indent="0">
               <a:buNone/>
             </a:pPr>
             <a:r>
@@ -6387,7 +6295,7 @@
           <a:bodyPr wrap="square" rtlCol="0" anchor="ctr"/>
           <a:lstStyle/>
           <a:p>
-            <a:pPr algn="r" indent="0" marL="0">
+            <a:pPr marL="0" indent="0" algn="r">
               <a:buNone/>
             </a:pPr>
             <a:r>
@@ -6431,6 +6339,13 @@
             <a:prstDash val="solid"/>
           </a:ln>
         </p:spPr>
+        <p:txBody>
+          <a:bodyPr/>
+          <a:lstStyle/>
+          <a:p>
+            <a:endParaRPr lang="en-IN"/>
+          </a:p>
+        </p:txBody>
       </p:sp>
       <p:sp>
         <p:nvSpPr>
@@ -6453,7 +6368,7 @@
           <a:bodyPr wrap="square" rtlCol="0" anchor="ctr"/>
           <a:lstStyle/>
           <a:p>
-            <a:pPr indent="0" marL="0">
+            <a:pPr marL="0" indent="0">
               <a:buNone/>
             </a:pPr>
             <a:r>
@@ -6489,7 +6404,7 @@
           <a:bodyPr wrap="square" rtlCol="0" anchor="ctr"/>
           <a:lstStyle/>
           <a:p>
-            <a:pPr indent="0" marL="0">
+            <a:pPr marL="0" indent="0">
               <a:buNone/>
             </a:pPr>
             <a:r>
@@ -6525,7 +6440,7 @@
           <a:bodyPr wrap="square" rtlCol="0" anchor="ctr"/>
           <a:lstStyle/>
           <a:p>
-            <a:pPr indent="0" marL="0">
+            <a:pPr marL="0" indent="0">
               <a:buNone/>
             </a:pPr>
             <a:r>
@@ -6562,6 +6477,13 @@
             <a:prstDash val="solid"/>
           </a:ln>
         </p:spPr>
+        <p:txBody>
+          <a:bodyPr/>
+          <a:lstStyle/>
+          <a:p>
+            <a:endParaRPr lang="en-IN"/>
+          </a:p>
+        </p:txBody>
       </p:sp>
       <p:sp>
         <p:nvSpPr>
@@ -6584,7 +6506,7 @@
           <a:bodyPr wrap="square" rtlCol="0" anchor="ctr"/>
           <a:lstStyle/>
           <a:p>
-            <a:pPr indent="0" marL="0">
+            <a:pPr marL="0" indent="0">
               <a:buNone/>
             </a:pPr>
             <a:r>
@@ -6620,7 +6542,7 @@
           <a:bodyPr wrap="square" rtlCol="0" anchor="ctr"/>
           <a:lstStyle/>
           <a:p>
-            <a:pPr indent="0" marL="0">
+            <a:pPr marL="0" indent="0">
               <a:lnSpc>
                 <a:spcPts val="1600"/>
               </a:lnSpc>
@@ -6667,6 +6589,13 @@
             <a:prstDash val="solid"/>
           </a:ln>
         </p:spPr>
+        <p:txBody>
+          <a:bodyPr/>
+          <a:lstStyle/>
+          <a:p>
+            <a:endParaRPr lang="en-IN"/>
+          </a:p>
+        </p:txBody>
       </p:sp>
       <p:sp>
         <p:nvSpPr>
@@ -6689,7 +6618,7 @@
           <a:bodyPr wrap="square" rtlCol="0" anchor="ctr"/>
           <a:lstStyle/>
           <a:p>
-            <a:pPr indent="0" marL="0">
+            <a:pPr marL="0" indent="0">
               <a:buNone/>
             </a:pPr>
             <a:r>
@@ -6725,7 +6654,7 @@
           <a:bodyPr wrap="square" rtlCol="0" anchor="ctr"/>
           <a:lstStyle/>
           <a:p>
-            <a:pPr indent="0" marL="0">
+            <a:pPr marL="0" indent="0">
               <a:buNone/>
             </a:pPr>
             <a:r>
@@ -6761,7 +6690,7 @@
           <a:bodyPr wrap="square" rtlCol="0" anchor="ctr"/>
           <a:lstStyle/>
           <a:p>
-            <a:pPr indent="0" marL="0">
+            <a:pPr marL="0" indent="0">
               <a:buNone/>
             </a:pPr>
             <a:r>
@@ -6798,6 +6727,13 @@
             <a:prstDash val="solid"/>
           </a:ln>
         </p:spPr>
+        <p:txBody>
+          <a:bodyPr/>
+          <a:lstStyle/>
+          <a:p>
+            <a:endParaRPr lang="en-IN"/>
+          </a:p>
+        </p:txBody>
       </p:sp>
       <p:sp>
         <p:nvSpPr>
@@ -6820,7 +6756,7 @@
           <a:bodyPr wrap="square" rtlCol="0" anchor="ctr"/>
           <a:lstStyle/>
           <a:p>
-            <a:pPr indent="0" marL="0">
+            <a:pPr marL="0" indent="0">
               <a:buNone/>
             </a:pPr>
             <a:r>
@@ -6856,7 +6792,7 @@
           <a:bodyPr wrap="square" rtlCol="0" anchor="ctr"/>
           <a:lstStyle/>
           <a:p>
-            <a:pPr indent="0" marL="0">
+            <a:pPr marL="0" indent="0">
               <a:lnSpc>
                 <a:spcPts val="1600"/>
               </a:lnSpc>
@@ -6903,6 +6839,13 @@
             <a:prstDash val="solid"/>
           </a:ln>
         </p:spPr>
+        <p:txBody>
+          <a:bodyPr/>
+          <a:lstStyle/>
+          <a:p>
+            <a:endParaRPr lang="en-IN"/>
+          </a:p>
+        </p:txBody>
       </p:sp>
       <p:sp>
         <p:nvSpPr>
@@ -6925,7 +6868,7 @@
           <a:bodyPr wrap="square" rtlCol="0" anchor="ctr"/>
           <a:lstStyle/>
           <a:p>
-            <a:pPr indent="0" marL="0">
+            <a:pPr marL="0" indent="0">
               <a:buNone/>
             </a:pPr>
             <a:r>
@@ -6961,7 +6904,7 @@
           <a:bodyPr wrap="square" rtlCol="0" anchor="ctr"/>
           <a:lstStyle/>
           <a:p>
-            <a:pPr indent="0" marL="0">
+            <a:pPr marL="0" indent="0">
               <a:buNone/>
             </a:pPr>
             <a:r>
@@ -6997,7 +6940,7 @@
           <a:bodyPr wrap="square" rtlCol="0" anchor="ctr"/>
           <a:lstStyle/>
           <a:p>
-            <a:pPr indent="0" marL="0">
+            <a:pPr marL="0" indent="0">
               <a:buNone/>
             </a:pPr>
             <a:r>
@@ -7034,6 +6977,13 @@
             <a:prstDash val="solid"/>
           </a:ln>
         </p:spPr>
+        <p:txBody>
+          <a:bodyPr/>
+          <a:lstStyle/>
+          <a:p>
+            <a:endParaRPr lang="en-IN"/>
+          </a:p>
+        </p:txBody>
       </p:sp>
       <p:sp>
         <p:nvSpPr>
@@ -7056,7 +7006,7 @@
           <a:bodyPr wrap="square" rtlCol="0" anchor="ctr"/>
           <a:lstStyle/>
           <a:p>
-            <a:pPr indent="0" marL="0">
+            <a:pPr marL="0" indent="0">
               <a:buNone/>
             </a:pPr>
             <a:r>
@@ -7092,7 +7042,7 @@
           <a:bodyPr wrap="square" rtlCol="0" anchor="ctr"/>
           <a:lstStyle/>
           <a:p>
-            <a:pPr indent="0" marL="0">
+            <a:pPr marL="0" indent="0">
               <a:lnSpc>
                 <a:spcPts val="1600"/>
               </a:lnSpc>
@@ -7129,6 +7079,7 @@
         <a:solidFill>
           <a:srgbClr val="090E1A"/>
         </a:solidFill>
+        <a:effectLst/>
       </p:bgPr>
     </p:bg>
     <p:spTree>
@@ -7169,6 +7120,13 @@
             <a:prstDash val="solid"/>
           </a:ln>
         </p:spPr>
+        <p:txBody>
+          <a:bodyPr/>
+          <a:lstStyle/>
+          <a:p>
+            <a:endParaRPr lang="en-IN"/>
+          </a:p>
+        </p:txBody>
       </p:sp>
       <p:sp>
         <p:nvSpPr>
@@ -7191,7 +7149,7 @@
           <a:bodyPr wrap="square" rtlCol="0" anchor="ctr"/>
           <a:lstStyle/>
           <a:p>
-            <a:pPr indent="0" marL="0">
+            <a:pPr marL="0" indent="0">
               <a:buNone/>
             </a:pPr>
             <a:r>
@@ -7230,7 +7188,7 @@
           <a:bodyPr wrap="square" rtlCol="0" anchor="ctr"/>
           <a:lstStyle/>
           <a:p>
-            <a:pPr indent="0" marL="0">
+            <a:pPr marL="0" indent="0">
               <a:buNone/>
             </a:pPr>
             <a:r>
@@ -7269,6 +7227,13 @@
           </a:solidFill>
           <a:ln/>
         </p:spPr>
+        <p:txBody>
+          <a:bodyPr/>
+          <a:lstStyle/>
+          <a:p>
+            <a:endParaRPr lang="en-IN"/>
+          </a:p>
+        </p:txBody>
       </p:sp>
       <p:sp>
         <p:nvSpPr>
@@ -7291,7 +7256,7 @@
           <a:bodyPr wrap="square" rtlCol="0" anchor="ctr"/>
           <a:lstStyle/>
           <a:p>
-            <a:pPr algn="ctr" indent="0" marL="0">
+            <a:pPr marL="0" indent="0" algn="ctr">
               <a:buNone/>
             </a:pPr>
             <a:r>
@@ -7330,7 +7295,7 @@
           <a:bodyPr wrap="square" rtlCol="0" anchor="ctr"/>
           <a:lstStyle/>
           <a:p>
-            <a:pPr indent="0" marL="0">
+            <a:pPr marL="0" indent="0">
               <a:buNone/>
             </a:pPr>
             <a:r>
@@ -7369,7 +7334,7 @@
           <a:bodyPr wrap="square" rtlCol="0" anchor="ctr"/>
           <a:lstStyle/>
           <a:p>
-            <a:pPr algn="r" indent="0" marL="0">
+            <a:pPr marL="0" indent="0" algn="r">
               <a:buNone/>
             </a:pPr>
             <a:r>
@@ -7413,6 +7378,13 @@
             <a:prstDash val="solid"/>
           </a:ln>
         </p:spPr>
+        <p:txBody>
+          <a:bodyPr/>
+          <a:lstStyle/>
+          <a:p>
+            <a:endParaRPr lang="en-IN"/>
+          </a:p>
+        </p:txBody>
       </p:sp>
       <p:sp>
         <p:nvSpPr>
@@ -7435,6 +7407,13 @@
           </a:solidFill>
           <a:ln/>
         </p:spPr>
+        <p:txBody>
+          <a:bodyPr/>
+          <a:lstStyle/>
+          <a:p>
+            <a:endParaRPr lang="en-IN"/>
+          </a:p>
+        </p:txBody>
       </p:sp>
       <p:sp>
         <p:nvSpPr>
@@ -7457,7 +7436,7 @@
           <a:bodyPr wrap="square" rtlCol="0" anchor="ctr"/>
           <a:lstStyle/>
           <a:p>
-            <a:pPr algn="ctr" indent="0" marL="0">
+            <a:pPr marL="0" indent="0" algn="ctr">
               <a:buNone/>
             </a:pPr>
             <a:r>
@@ -7493,7 +7472,7 @@
           <a:bodyPr wrap="square" rtlCol="0" anchor="ctr"/>
           <a:lstStyle/>
           <a:p>
-            <a:pPr algn="ctr" indent="0" marL="0">
+            <a:pPr marL="0" indent="0" algn="ctr">
               <a:buNone/>
             </a:pPr>
             <a:r>
@@ -7529,7 +7508,7 @@
           <a:bodyPr wrap="square" rtlCol="0" anchor="ctr"/>
           <a:lstStyle/>
           <a:p>
-            <a:pPr indent="0" marL="0">
+            <a:pPr marL="0" indent="0">
               <a:lnSpc>
                 <a:spcPts val="1800"/>
               </a:lnSpc>
@@ -7573,6 +7552,13 @@
             <a:prstDash val="solid"/>
           </a:ln>
         </p:spPr>
+        <p:txBody>
+          <a:bodyPr/>
+          <a:lstStyle/>
+          <a:p>
+            <a:endParaRPr lang="en-IN"/>
+          </a:p>
+        </p:txBody>
       </p:sp>
       <p:sp>
         <p:nvSpPr>
@@ -7595,6 +7581,13 @@
           </a:solidFill>
           <a:ln/>
         </p:spPr>
+        <p:txBody>
+          <a:bodyPr/>
+          <a:lstStyle/>
+          <a:p>
+            <a:endParaRPr lang="en-IN"/>
+          </a:p>
+        </p:txBody>
       </p:sp>
       <p:sp>
         <p:nvSpPr>
@@ -7617,7 +7610,7 @@
           <a:bodyPr wrap="square" rtlCol="0" anchor="ctr"/>
           <a:lstStyle/>
           <a:p>
-            <a:pPr algn="ctr" indent="0" marL="0">
+            <a:pPr marL="0" indent="0" algn="ctr">
               <a:buNone/>
             </a:pPr>
             <a:r>
@@ -7653,7 +7646,7 @@
           <a:bodyPr wrap="square" rtlCol="0" anchor="ctr"/>
           <a:lstStyle/>
           <a:p>
-            <a:pPr algn="ctr" indent="0" marL="0">
+            <a:pPr marL="0" indent="0" algn="ctr">
               <a:buNone/>
             </a:pPr>
             <a:r>
@@ -7689,7 +7682,7 @@
           <a:bodyPr wrap="square" rtlCol="0" anchor="ctr"/>
           <a:lstStyle/>
           <a:p>
-            <a:pPr indent="0" marL="0">
+            <a:pPr marL="0" indent="0">
               <a:lnSpc>
                 <a:spcPts val="1800"/>
               </a:lnSpc>
@@ -7733,6 +7726,13 @@
             <a:prstDash val="solid"/>
           </a:ln>
         </p:spPr>
+        <p:txBody>
+          <a:bodyPr/>
+          <a:lstStyle/>
+          <a:p>
+            <a:endParaRPr lang="en-IN"/>
+          </a:p>
+        </p:txBody>
       </p:sp>
       <p:sp>
         <p:nvSpPr>
@@ -7755,6 +7755,13 @@
           </a:solidFill>
           <a:ln/>
         </p:spPr>
+        <p:txBody>
+          <a:bodyPr/>
+          <a:lstStyle/>
+          <a:p>
+            <a:endParaRPr lang="en-IN"/>
+          </a:p>
+        </p:txBody>
       </p:sp>
       <p:sp>
         <p:nvSpPr>
@@ -7777,7 +7784,7 @@
           <a:bodyPr wrap="square" rtlCol="0" anchor="ctr"/>
           <a:lstStyle/>
           <a:p>
-            <a:pPr algn="ctr" indent="0" marL="0">
+            <a:pPr marL="0" indent="0" algn="ctr">
               <a:buNone/>
             </a:pPr>
             <a:r>
@@ -7813,7 +7820,7 @@
           <a:bodyPr wrap="square" rtlCol="0" anchor="ctr"/>
           <a:lstStyle/>
           <a:p>
-            <a:pPr algn="ctr" indent="0" marL="0">
+            <a:pPr marL="0" indent="0" algn="ctr">
               <a:buNone/>
             </a:pPr>
             <a:r>
@@ -7849,7 +7856,7 @@
           <a:bodyPr wrap="square" rtlCol="0" anchor="ctr"/>
           <a:lstStyle/>
           <a:p>
-            <a:pPr indent="0" marL="0">
+            <a:pPr marL="0" indent="0">
               <a:lnSpc>
                 <a:spcPts val="1800"/>
               </a:lnSpc>
@@ -7893,6 +7900,13 @@
             <a:prstDash val="solid"/>
           </a:ln>
         </p:spPr>
+        <p:txBody>
+          <a:bodyPr/>
+          <a:lstStyle/>
+          <a:p>
+            <a:endParaRPr lang="en-IN"/>
+          </a:p>
+        </p:txBody>
       </p:sp>
       <p:sp>
         <p:nvSpPr>
@@ -7915,6 +7929,13 @@
           </a:solidFill>
           <a:ln/>
         </p:spPr>
+        <p:txBody>
+          <a:bodyPr/>
+          <a:lstStyle/>
+          <a:p>
+            <a:endParaRPr lang="en-IN"/>
+          </a:p>
+        </p:txBody>
       </p:sp>
       <p:sp>
         <p:nvSpPr>
@@ -7937,7 +7958,7 @@
           <a:bodyPr wrap="square" rtlCol="0" anchor="ctr"/>
           <a:lstStyle/>
           <a:p>
-            <a:pPr algn="ctr" indent="0" marL="0">
+            <a:pPr marL="0" indent="0" algn="ctr">
               <a:buNone/>
             </a:pPr>
             <a:r>
@@ -7973,7 +7994,7 @@
           <a:bodyPr wrap="square" rtlCol="0" anchor="ctr"/>
           <a:lstStyle/>
           <a:p>
-            <a:pPr algn="ctr" indent="0" marL="0">
+            <a:pPr marL="0" indent="0" algn="ctr">
               <a:buNone/>
             </a:pPr>
             <a:r>
@@ -8009,7 +8030,7 @@
           <a:bodyPr wrap="square" rtlCol="0" anchor="ctr"/>
           <a:lstStyle/>
           <a:p>
-            <a:pPr indent="0" marL="0">
+            <a:pPr marL="0" indent="0">
               <a:lnSpc>
                 <a:spcPts val="1800"/>
               </a:lnSpc>
@@ -8043,6 +8064,7 @@
         <a:solidFill>
           <a:srgbClr val="090E1A"/>
         </a:solidFill>
+        <a:effectLst/>
       </p:bgPr>
     </p:bg>
     <p:spTree>
@@ -8083,6 +8105,13 @@
             <a:prstDash val="solid"/>
           </a:ln>
         </p:spPr>
+        <p:txBody>
+          <a:bodyPr/>
+          <a:lstStyle/>
+          <a:p>
+            <a:endParaRPr lang="en-IN"/>
+          </a:p>
+        </p:txBody>
       </p:sp>
       <p:sp>
         <p:nvSpPr>
@@ -8105,7 +8134,7 @@
           <a:bodyPr wrap="square" rtlCol="0" anchor="ctr"/>
           <a:lstStyle/>
           <a:p>
-            <a:pPr indent="0" marL="0">
+            <a:pPr marL="0" indent="0">
               <a:buNone/>
             </a:pPr>
             <a:r>
@@ -8144,7 +8173,7 @@
           <a:bodyPr wrap="square" rtlCol="0" anchor="ctr"/>
           <a:lstStyle/>
           <a:p>
-            <a:pPr indent="0" marL="0">
+            <a:pPr marL="0" indent="0">
               <a:buNone/>
             </a:pPr>
             <a:r>
@@ -8183,6 +8212,13 @@
           </a:solidFill>
           <a:ln/>
         </p:spPr>
+        <p:txBody>
+          <a:bodyPr/>
+          <a:lstStyle/>
+          <a:p>
+            <a:endParaRPr lang="en-IN"/>
+          </a:p>
+        </p:txBody>
       </p:sp>
       <p:sp>
         <p:nvSpPr>
@@ -8205,7 +8241,7 @@
           <a:bodyPr wrap="square" rtlCol="0" anchor="ctr"/>
           <a:lstStyle/>
           <a:p>
-            <a:pPr algn="ctr" indent="0" marL="0">
+            <a:pPr marL="0" indent="0" algn="ctr">
               <a:buNone/>
             </a:pPr>
             <a:r>
@@ -8244,7 +8280,7 @@
           <a:bodyPr wrap="square" rtlCol="0" anchor="ctr"/>
           <a:lstStyle/>
           <a:p>
-            <a:pPr indent="0" marL="0">
+            <a:pPr marL="0" indent="0">
               <a:buNone/>
             </a:pPr>
             <a:r>
@@ -8283,7 +8319,7 @@
           <a:bodyPr wrap="square" rtlCol="0" anchor="ctr"/>
           <a:lstStyle/>
           <a:p>
-            <a:pPr algn="r" indent="0" marL="0">
+            <a:pPr marL="0" indent="0" algn="r">
               <a:buNone/>
             </a:pPr>
             <a:r>
@@ -8327,6 +8363,13 @@
             <a:prstDash val="solid"/>
           </a:ln>
         </p:spPr>
+        <p:txBody>
+          <a:bodyPr/>
+          <a:lstStyle/>
+          <a:p>
+            <a:endParaRPr lang="en-IN"/>
+          </a:p>
+        </p:txBody>
       </p:sp>
       <p:sp>
         <p:nvSpPr>
@@ -8349,7 +8392,7 @@
           <a:bodyPr wrap="square" rtlCol="0" anchor="ctr"/>
           <a:lstStyle/>
           <a:p>
-            <a:pPr indent="0" marL="0">
+            <a:pPr marL="0" indent="0">
               <a:buNone/>
             </a:pPr>
             <a:r>
@@ -8385,6 +8428,13 @@
           </a:solidFill>
           <a:ln/>
         </p:spPr>
+        <p:txBody>
+          <a:bodyPr/>
+          <a:lstStyle/>
+          <a:p>
+            <a:endParaRPr lang="en-IN"/>
+          </a:p>
+        </p:txBody>
       </p:sp>
       <p:sp>
         <p:nvSpPr>
@@ -8407,7 +8457,7 @@
           <a:bodyPr wrap="square" rtlCol="0" anchor="ctr"/>
           <a:lstStyle/>
           <a:p>
-            <a:pPr indent="0" marL="0">
+            <a:pPr marL="0" indent="0">
               <a:buNone/>
             </a:pPr>
             <a:r>
@@ -8443,7 +8493,7 @@
           <a:bodyPr wrap="square" rtlCol="0" anchor="ctr"/>
           <a:lstStyle/>
           <a:p>
-            <a:pPr indent="0" marL="0">
+            <a:pPr marL="0" indent="0">
               <a:buNone/>
             </a:pPr>
             <a:r>
@@ -8479,6 +8529,13 @@
           </a:solidFill>
           <a:ln/>
         </p:spPr>
+        <p:txBody>
+          <a:bodyPr/>
+          <a:lstStyle/>
+          <a:p>
+            <a:endParaRPr lang="en-IN"/>
+          </a:p>
+        </p:txBody>
       </p:sp>
       <p:sp>
         <p:nvSpPr>
@@ -8501,7 +8558,7 @@
           <a:bodyPr wrap="square" rtlCol="0" anchor="ctr"/>
           <a:lstStyle/>
           <a:p>
-            <a:pPr indent="0" marL="0">
+            <a:pPr marL="0" indent="0">
               <a:buNone/>
             </a:pPr>
             <a:r>
@@ -8537,7 +8594,7 @@
           <a:bodyPr wrap="square" rtlCol="0" anchor="ctr"/>
           <a:lstStyle/>
           <a:p>
-            <a:pPr indent="0" marL="0">
+            <a:pPr marL="0" indent="0">
               <a:buNone/>
             </a:pPr>
             <a:r>
@@ -8573,6 +8630,13 @@
           </a:solidFill>
           <a:ln/>
         </p:spPr>
+        <p:txBody>
+          <a:bodyPr/>
+          <a:lstStyle/>
+          <a:p>
+            <a:endParaRPr lang="en-IN"/>
+          </a:p>
+        </p:txBody>
       </p:sp>
       <p:sp>
         <p:nvSpPr>
@@ -8595,7 +8659,7 @@
           <a:bodyPr wrap="square" rtlCol="0" anchor="ctr"/>
           <a:lstStyle/>
           <a:p>
-            <a:pPr indent="0" marL="0">
+            <a:pPr marL="0" indent="0">
               <a:buNone/>
             </a:pPr>
             <a:r>
@@ -8631,7 +8695,7 @@
           <a:bodyPr wrap="square" rtlCol="0" anchor="ctr"/>
           <a:lstStyle/>
           <a:p>
-            <a:pPr indent="0" marL="0">
+            <a:pPr marL="0" indent="0">
               <a:buNone/>
             </a:pPr>
             <a:r>
@@ -8667,6 +8731,13 @@
           </a:solidFill>
           <a:ln/>
         </p:spPr>
+        <p:txBody>
+          <a:bodyPr/>
+          <a:lstStyle/>
+          <a:p>
+            <a:endParaRPr lang="en-IN"/>
+          </a:p>
+        </p:txBody>
       </p:sp>
       <p:sp>
         <p:nvSpPr>
@@ -8689,7 +8760,7 @@
           <a:bodyPr wrap="square" rtlCol="0" anchor="ctr"/>
           <a:lstStyle/>
           <a:p>
-            <a:pPr indent="0" marL="0">
+            <a:pPr marL="0" indent="0">
               <a:buNone/>
             </a:pPr>
             <a:r>
@@ -8725,7 +8796,7 @@
           <a:bodyPr wrap="square" rtlCol="0" anchor="ctr"/>
           <a:lstStyle/>
           <a:p>
-            <a:pPr indent="0" marL="0">
+            <a:pPr marL="0" indent="0">
               <a:buNone/>
             </a:pPr>
             <a:r>
@@ -8761,6 +8832,13 @@
           </a:solidFill>
           <a:ln/>
         </p:spPr>
+        <p:txBody>
+          <a:bodyPr/>
+          <a:lstStyle/>
+          <a:p>
+            <a:endParaRPr lang="en-IN"/>
+          </a:p>
+        </p:txBody>
       </p:sp>
       <p:sp>
         <p:nvSpPr>
@@ -8783,7 +8861,7 @@
           <a:bodyPr wrap="square" rtlCol="0" anchor="ctr"/>
           <a:lstStyle/>
           <a:p>
-            <a:pPr indent="0" marL="0">
+            <a:pPr marL="0" indent="0">
               <a:buNone/>
             </a:pPr>
             <a:r>
@@ -8819,7 +8897,7 @@
           <a:bodyPr wrap="square" rtlCol="0" anchor="ctr"/>
           <a:lstStyle/>
           <a:p>
-            <a:pPr indent="0" marL="0">
+            <a:pPr marL="0" indent="0">
               <a:buNone/>
             </a:pPr>
             <a:r>
@@ -8855,6 +8933,13 @@
           </a:solidFill>
           <a:ln/>
         </p:spPr>
+        <p:txBody>
+          <a:bodyPr/>
+          <a:lstStyle/>
+          <a:p>
+            <a:endParaRPr lang="en-IN"/>
+          </a:p>
+        </p:txBody>
       </p:sp>
       <p:sp>
         <p:nvSpPr>
@@ -8877,7 +8962,7 @@
           <a:bodyPr wrap="square" rtlCol="0" anchor="ctr"/>
           <a:lstStyle/>
           <a:p>
-            <a:pPr indent="0" marL="0">
+            <a:pPr marL="0" indent="0">
               <a:buNone/>
             </a:pPr>
             <a:r>
@@ -8913,7 +8998,7 @@
           <a:bodyPr wrap="square" rtlCol="0" anchor="ctr"/>
           <a:lstStyle/>
           <a:p>
-            <a:pPr indent="0" marL="0">
+            <a:pPr marL="0" indent="0">
               <a:buNone/>
             </a:pPr>
             <a:r>
@@ -8954,6 +9039,13 @@
             <a:prstDash val="solid"/>
           </a:ln>
         </p:spPr>
+        <p:txBody>
+          <a:bodyPr/>
+          <a:lstStyle/>
+          <a:p>
+            <a:endParaRPr lang="en-IN"/>
+          </a:p>
+        </p:txBody>
       </p:sp>
       <p:sp>
         <p:nvSpPr>
@@ -8976,7 +9068,7 @@
           <a:bodyPr wrap="square" rtlCol="0" anchor="ctr"/>
           <a:lstStyle/>
           <a:p>
-            <a:pPr indent="0" marL="0">
+            <a:pPr marL="0" indent="0">
               <a:buNone/>
             </a:pPr>
             <a:r>
@@ -9012,6 +9104,13 @@
           </a:solidFill>
           <a:ln/>
         </p:spPr>
+        <p:txBody>
+          <a:bodyPr/>
+          <a:lstStyle/>
+          <a:p>
+            <a:endParaRPr lang="en-IN"/>
+          </a:p>
+        </p:txBody>
       </p:sp>
       <p:sp>
         <p:nvSpPr>
@@ -9034,7 +9133,7 @@
           <a:bodyPr wrap="square" rtlCol="0" anchor="ctr"/>
           <a:lstStyle/>
           <a:p>
-            <a:pPr indent="0" marL="0">
+            <a:pPr marL="0" indent="0">
               <a:buNone/>
             </a:pPr>
             <a:r>
@@ -9070,7 +9169,7 @@
           <a:bodyPr wrap="square" rtlCol="0" anchor="ctr"/>
           <a:lstStyle/>
           <a:p>
-            <a:pPr indent="0" marL="0">
+            <a:pPr marL="0" indent="0">
               <a:buNone/>
             </a:pPr>
             <a:r>
@@ -9106,6 +9205,13 @@
           </a:solidFill>
           <a:ln/>
         </p:spPr>
+        <p:txBody>
+          <a:bodyPr/>
+          <a:lstStyle/>
+          <a:p>
+            <a:endParaRPr lang="en-IN"/>
+          </a:p>
+        </p:txBody>
       </p:sp>
       <p:sp>
         <p:nvSpPr>
@@ -9128,7 +9234,7 @@
           <a:bodyPr wrap="square" rtlCol="0" anchor="ctr"/>
           <a:lstStyle/>
           <a:p>
-            <a:pPr indent="0" marL="0">
+            <a:pPr marL="0" indent="0">
               <a:buNone/>
             </a:pPr>
             <a:r>
@@ -9164,7 +9270,7 @@
           <a:bodyPr wrap="square" rtlCol="0" anchor="ctr"/>
           <a:lstStyle/>
           <a:p>
-            <a:pPr indent="0" marL="0">
+            <a:pPr marL="0" indent="0">
               <a:buNone/>
             </a:pPr>
             <a:r>
@@ -9200,6 +9306,13 @@
           </a:solidFill>
           <a:ln/>
         </p:spPr>
+        <p:txBody>
+          <a:bodyPr/>
+          <a:lstStyle/>
+          <a:p>
+            <a:endParaRPr lang="en-IN"/>
+          </a:p>
+        </p:txBody>
       </p:sp>
       <p:sp>
         <p:nvSpPr>
@@ -9222,7 +9335,7 @@
           <a:bodyPr wrap="square" rtlCol="0" anchor="ctr"/>
           <a:lstStyle/>
           <a:p>
-            <a:pPr indent="0" marL="0">
+            <a:pPr marL="0" indent="0">
               <a:buNone/>
             </a:pPr>
             <a:r>
@@ -9258,7 +9371,7 @@
           <a:bodyPr wrap="square" rtlCol="0" anchor="ctr"/>
           <a:lstStyle/>
           <a:p>
-            <a:pPr indent="0" marL="0">
+            <a:pPr marL="0" indent="0">
               <a:buNone/>
             </a:pPr>
             <a:r>
@@ -9294,6 +9407,13 @@
           </a:solidFill>
           <a:ln/>
         </p:spPr>
+        <p:txBody>
+          <a:bodyPr/>
+          <a:lstStyle/>
+          <a:p>
+            <a:endParaRPr lang="en-IN"/>
+          </a:p>
+        </p:txBody>
       </p:sp>
       <p:sp>
         <p:nvSpPr>
@@ -9316,7 +9436,7 @@
           <a:bodyPr wrap="square" rtlCol="0" anchor="ctr"/>
           <a:lstStyle/>
           <a:p>
-            <a:pPr indent="0" marL="0">
+            <a:pPr marL="0" indent="0">
               <a:buNone/>
             </a:pPr>
             <a:r>
@@ -9352,7 +9472,7 @@
           <a:bodyPr wrap="square" rtlCol="0" anchor="ctr"/>
           <a:lstStyle/>
           <a:p>
-            <a:pPr indent="0" marL="0">
+            <a:pPr marL="0" indent="0">
               <a:buNone/>
             </a:pPr>
             <a:r>
@@ -9383,6 +9503,7 @@
         <a:solidFill>
           <a:srgbClr val="090E1A"/>
         </a:solidFill>
+        <a:effectLst/>
       </p:bgPr>
     </p:bg>
     <p:spTree>
@@ -9423,6 +9544,13 @@
             <a:prstDash val="solid"/>
           </a:ln>
         </p:spPr>
+        <p:txBody>
+          <a:bodyPr/>
+          <a:lstStyle/>
+          <a:p>
+            <a:endParaRPr lang="en-IN"/>
+          </a:p>
+        </p:txBody>
       </p:sp>
       <p:sp>
         <p:nvSpPr>
@@ -9445,7 +9573,7 @@
           <a:bodyPr wrap="square" rtlCol="0" anchor="ctr"/>
           <a:lstStyle/>
           <a:p>
-            <a:pPr indent="0" marL="0">
+            <a:pPr marL="0" indent="0">
               <a:buNone/>
             </a:pPr>
             <a:r>
@@ -9484,7 +9612,7 @@
           <a:bodyPr wrap="square" rtlCol="0" anchor="ctr"/>
           <a:lstStyle/>
           <a:p>
-            <a:pPr indent="0" marL="0">
+            <a:pPr marL="0" indent="0">
               <a:buNone/>
             </a:pPr>
             <a:r>
@@ -9523,6 +9651,13 @@
           </a:solidFill>
           <a:ln/>
         </p:spPr>
+        <p:txBody>
+          <a:bodyPr/>
+          <a:lstStyle/>
+          <a:p>
+            <a:endParaRPr lang="en-IN"/>
+          </a:p>
+        </p:txBody>
       </p:sp>
       <p:sp>
         <p:nvSpPr>
@@ -9545,7 +9680,7 @@
           <a:bodyPr wrap="square" rtlCol="0" anchor="ctr"/>
           <a:lstStyle/>
           <a:p>
-            <a:pPr algn="ctr" indent="0" marL="0">
+            <a:pPr marL="0" indent="0" algn="ctr">
               <a:buNone/>
             </a:pPr>
             <a:r>
@@ -9584,7 +9719,7 @@
           <a:bodyPr wrap="square" rtlCol="0" anchor="ctr"/>
           <a:lstStyle/>
           <a:p>
-            <a:pPr indent="0" marL="0">
+            <a:pPr marL="0" indent="0">
               <a:buNone/>
             </a:pPr>
             <a:r>
@@ -9623,7 +9758,7 @@
           <a:bodyPr wrap="square" rtlCol="0" anchor="ctr"/>
           <a:lstStyle/>
           <a:p>
-            <a:pPr algn="r" indent="0" marL="0">
+            <a:pPr marL="0" indent="0" algn="r">
               <a:buNone/>
             </a:pPr>
             <a:r>
@@ -9667,6 +9802,13 @@
             <a:prstDash val="solid"/>
           </a:ln>
         </p:spPr>
+        <p:txBody>
+          <a:bodyPr/>
+          <a:lstStyle/>
+          <a:p>
+            <a:endParaRPr lang="en-IN"/>
+          </a:p>
+        </p:txBody>
       </p:sp>
       <p:sp>
         <p:nvSpPr>
@@ -9689,7 +9831,7 @@
           <a:bodyPr wrap="square" rtlCol="0" anchor="ctr"/>
           <a:lstStyle/>
           <a:p>
-            <a:pPr indent="0" marL="0">
+            <a:pPr marL="0" indent="0">
               <a:buNone/>
             </a:pPr>
             <a:r>
@@ -9725,6 +9867,13 @@
           </a:solidFill>
           <a:ln/>
         </p:spPr>
+        <p:txBody>
+          <a:bodyPr/>
+          <a:lstStyle/>
+          <a:p>
+            <a:endParaRPr lang="en-IN"/>
+          </a:p>
+        </p:txBody>
       </p:sp>
       <p:sp>
         <p:nvSpPr>
@@ -9747,7 +9896,7 @@
           <a:bodyPr wrap="square" rtlCol="0" anchor="ctr"/>
           <a:lstStyle/>
           <a:p>
-            <a:pPr algn="ctr" indent="0" marL="0">
+            <a:pPr marL="0" indent="0" algn="ctr">
               <a:buNone/>
             </a:pPr>
             <a:r>
@@ -9783,7 +9932,7 @@
           <a:bodyPr wrap="square" rtlCol="0" anchor="ctr"/>
           <a:lstStyle/>
           <a:p>
-            <a:pPr indent="0" marL="0">
+            <a:pPr marL="0" indent="0">
               <a:buNone/>
             </a:pPr>
             <a:r>
@@ -9819,7 +9968,7 @@
           <a:bodyPr wrap="square" rtlCol="0" anchor="ctr"/>
           <a:lstStyle/>
           <a:p>
-            <a:pPr indent="0" marL="0">
+            <a:pPr marL="0" indent="0">
               <a:buNone/>
             </a:pPr>
             <a:r>
@@ -9860,6 +10009,13 @@
             <a:prstDash val="solid"/>
           </a:ln>
         </p:spPr>
+        <p:txBody>
+          <a:bodyPr/>
+          <a:lstStyle/>
+          <a:p>
+            <a:endParaRPr lang="en-IN"/>
+          </a:p>
+        </p:txBody>
       </p:sp>
       <p:sp>
         <p:nvSpPr>
@@ -9882,7 +10038,7 @@
           <a:bodyPr wrap="square" rtlCol="0" anchor="ctr"/>
           <a:lstStyle/>
           <a:p>
-            <a:pPr indent="0" marL="0">
+            <a:pPr marL="0" indent="0">
               <a:buNone/>
             </a:pPr>
             <a:r>
@@ -9918,6 +10074,13 @@
           </a:solidFill>
           <a:ln/>
         </p:spPr>
+        <p:txBody>
+          <a:bodyPr/>
+          <a:lstStyle/>
+          <a:p>
+            <a:endParaRPr lang="en-IN"/>
+          </a:p>
+        </p:txBody>
       </p:sp>
       <p:sp>
         <p:nvSpPr>
@@ -9940,7 +10103,7 @@
           <a:bodyPr wrap="square" rtlCol="0" anchor="ctr"/>
           <a:lstStyle/>
           <a:p>
-            <a:pPr algn="ctr" indent="0" marL="0">
+            <a:pPr marL="0" indent="0" algn="ctr">
               <a:buNone/>
             </a:pPr>
             <a:r>
@@ -9976,7 +10139,7 @@
           <a:bodyPr wrap="square" rtlCol="0" anchor="ctr"/>
           <a:lstStyle/>
           <a:p>
-            <a:pPr indent="0" marL="0">
+            <a:pPr marL="0" indent="0">
               <a:buNone/>
             </a:pPr>
             <a:r>
@@ -10012,7 +10175,7 @@
           <a:bodyPr wrap="square" rtlCol="0" anchor="ctr"/>
           <a:lstStyle/>
           <a:p>
-            <a:pPr indent="0" marL="0">
+            <a:pPr marL="0" indent="0">
               <a:buNone/>
             </a:pPr>
             <a:r>
@@ -10053,6 +10216,13 @@
             <a:prstDash val="solid"/>
           </a:ln>
         </p:spPr>
+        <p:txBody>
+          <a:bodyPr/>
+          <a:lstStyle/>
+          <a:p>
+            <a:endParaRPr lang="en-IN"/>
+          </a:p>
+        </p:txBody>
       </p:sp>
       <p:sp>
         <p:nvSpPr>
@@ -10075,7 +10245,7 @@
           <a:bodyPr wrap="square" rtlCol="0" anchor="ctr"/>
           <a:lstStyle/>
           <a:p>
-            <a:pPr indent="0" marL="0">
+            <a:pPr marL="0" indent="0">
               <a:buNone/>
             </a:pPr>
             <a:r>
@@ -10098,7 +10268,7 @@
         </p:nvSpPr>
         <p:spPr>
           <a:xfrm>
-            <a:off x="9509760" y="3931920"/>
+            <a:off x="9052560" y="4039145"/>
             <a:ext cx="1920240" cy="320040"/>
           </a:xfrm>
           <a:prstGeom prst="roundRect">
@@ -10111,6 +10281,13 @@
           </a:solidFill>
           <a:ln/>
         </p:spPr>
+        <p:txBody>
+          <a:bodyPr/>
+          <a:lstStyle/>
+          <a:p>
+            <a:endParaRPr lang="en-IN"/>
+          </a:p>
+        </p:txBody>
       </p:sp>
       <p:sp>
         <p:nvSpPr>
@@ -10133,7 +10310,7 @@
           <a:bodyPr wrap="square" rtlCol="0" anchor="ctr"/>
           <a:lstStyle/>
           <a:p>
-            <a:pPr algn="ctr" indent="0" marL="0">
+            <a:pPr marL="0" indent="0" algn="ctr">
               <a:buNone/>
             </a:pPr>
             <a:r>
@@ -10169,7 +10346,7 @@
           <a:bodyPr wrap="square" rtlCol="0" anchor="ctr"/>
           <a:lstStyle/>
           <a:p>
-            <a:pPr indent="0" marL="0">
+            <a:pPr marL="0" indent="0">
               <a:buNone/>
             </a:pPr>
             <a:r>
@@ -10205,7 +10382,7 @@
           <a:bodyPr wrap="square" rtlCol="0" anchor="ctr"/>
           <a:lstStyle/>
           <a:p>
-            <a:pPr indent="0" marL="0">
+            <a:pPr marL="0" indent="0">
               <a:buNone/>
             </a:pPr>
             <a:r>
@@ -10246,6 +10423,13 @@
             <a:prstDash val="solid"/>
           </a:ln>
         </p:spPr>
+        <p:txBody>
+          <a:bodyPr/>
+          <a:lstStyle/>
+          <a:p>
+            <a:endParaRPr lang="en-IN"/>
+          </a:p>
+        </p:txBody>
       </p:sp>
       <p:sp>
         <p:nvSpPr>
@@ -10268,7 +10452,7 @@
           <a:bodyPr wrap="square" rtlCol="0" anchor="ctr"/>
           <a:lstStyle/>
           <a:p>
-            <a:pPr indent="0" marL="0">
+            <a:pPr marL="0" indent="0">
               <a:buNone/>
             </a:pPr>
             <a:r>
@@ -10304,6 +10488,13 @@
           </a:solidFill>
           <a:ln/>
         </p:spPr>
+        <p:txBody>
+          <a:bodyPr/>
+          <a:lstStyle/>
+          <a:p>
+            <a:endParaRPr lang="en-IN"/>
+          </a:p>
+        </p:txBody>
       </p:sp>
       <p:sp>
         <p:nvSpPr>
@@ -10326,7 +10517,7 @@
           <a:bodyPr wrap="square" rtlCol="0" anchor="ctr"/>
           <a:lstStyle/>
           <a:p>
-            <a:pPr algn="ctr" indent="0" marL="0">
+            <a:pPr marL="0" indent="0" algn="ctr">
               <a:buNone/>
             </a:pPr>
             <a:r>
@@ -10362,7 +10553,7 @@
           <a:bodyPr wrap="square" rtlCol="0" anchor="ctr"/>
           <a:lstStyle/>
           <a:p>
-            <a:pPr indent="0" marL="0">
+            <a:pPr marL="0" indent="0">
               <a:buNone/>
             </a:pPr>
             <a:r>
@@ -10398,7 +10589,7 @@
           <a:bodyPr wrap="square" rtlCol="0" anchor="ctr"/>
           <a:lstStyle/>
           <a:p>
-            <a:pPr indent="0" marL="0">
+            <a:pPr marL="0" indent="0">
               <a:buNone/>
             </a:pPr>
             <a:r>
@@ -10429,6 +10620,7 @@
         <a:solidFill>
           <a:srgbClr val="090E1A"/>
         </a:solidFill>
+        <a:effectLst/>
       </p:bgPr>
     </p:bg>
     <p:spTree>
@@ -10469,6 +10661,13 @@
             <a:prstDash val="solid"/>
           </a:ln>
         </p:spPr>
+        <p:txBody>
+          <a:bodyPr/>
+          <a:lstStyle/>
+          <a:p>
+            <a:endParaRPr lang="en-IN"/>
+          </a:p>
+        </p:txBody>
       </p:sp>
       <p:sp>
         <p:nvSpPr>
@@ -10491,7 +10690,7 @@
           <a:bodyPr wrap="square" rtlCol="0" anchor="ctr"/>
           <a:lstStyle/>
           <a:p>
-            <a:pPr indent="0" marL="0">
+            <a:pPr marL="0" indent="0">
               <a:buNone/>
             </a:pPr>
             <a:r>
@@ -10530,7 +10729,7 @@
           <a:bodyPr wrap="square" rtlCol="0" anchor="ctr"/>
           <a:lstStyle/>
           <a:p>
-            <a:pPr indent="0" marL="0">
+            <a:pPr marL="0" indent="0">
               <a:buNone/>
             </a:pPr>
             <a:r>
@@ -10569,6 +10768,13 @@
           </a:solidFill>
           <a:ln/>
         </p:spPr>
+        <p:txBody>
+          <a:bodyPr/>
+          <a:lstStyle/>
+          <a:p>
+            <a:endParaRPr lang="en-IN"/>
+          </a:p>
+        </p:txBody>
       </p:sp>
       <p:sp>
         <p:nvSpPr>
@@ -10591,7 +10797,7 @@
           <a:bodyPr wrap="square" rtlCol="0" anchor="ctr"/>
           <a:lstStyle/>
           <a:p>
-            <a:pPr algn="ctr" indent="0" marL="0">
+            <a:pPr marL="0" indent="0" algn="ctr">
               <a:buNone/>
             </a:pPr>
             <a:r>
@@ -10630,7 +10836,7 @@
           <a:bodyPr wrap="square" rtlCol="0" anchor="ctr"/>
           <a:lstStyle/>
           <a:p>
-            <a:pPr indent="0" marL="0">
+            <a:pPr marL="0" indent="0">
               <a:buNone/>
             </a:pPr>
             <a:r>
@@ -10669,7 +10875,7 @@
           <a:bodyPr wrap="square" rtlCol="0" anchor="ctr"/>
           <a:lstStyle/>
           <a:p>
-            <a:pPr algn="r" indent="0" marL="0">
+            <a:pPr marL="0" indent="0" algn="r">
               <a:buNone/>
             </a:pPr>
             <a:r>
@@ -10713,6 +10919,13 @@
             <a:prstDash val="solid"/>
           </a:ln>
         </p:spPr>
+        <p:txBody>
+          <a:bodyPr/>
+          <a:lstStyle/>
+          <a:p>
+            <a:endParaRPr lang="en-IN"/>
+          </a:p>
+        </p:txBody>
       </p:sp>
       <p:sp>
         <p:nvSpPr>
@@ -10735,7 +10948,7 @@
           <a:bodyPr wrap="square" rtlCol="0" anchor="ctr"/>
           <a:lstStyle/>
           <a:p>
-            <a:pPr indent="0" marL="0">
+            <a:pPr marL="0" indent="0">
               <a:buNone/>
             </a:pPr>
             <a:r>
@@ -10771,6 +10984,13 @@
           </a:solidFill>
           <a:ln/>
         </p:spPr>
+        <p:txBody>
+          <a:bodyPr/>
+          <a:lstStyle/>
+          <a:p>
+            <a:endParaRPr lang="en-IN"/>
+          </a:p>
+        </p:txBody>
       </p:sp>
       <p:sp>
         <p:nvSpPr>
@@ -10793,7 +11013,7 @@
           <a:bodyPr wrap="square" rtlCol="0" anchor="ctr"/>
           <a:lstStyle/>
           <a:p>
-            <a:pPr indent="0" marL="0">
+            <a:pPr marL="0" indent="0">
               <a:buNone/>
             </a:pPr>
             <a:r>
@@ -10829,6 +11049,13 @@
           </a:solidFill>
           <a:ln/>
         </p:spPr>
+        <p:txBody>
+          <a:bodyPr/>
+          <a:lstStyle/>
+          <a:p>
+            <a:endParaRPr lang="en-IN"/>
+          </a:p>
+        </p:txBody>
       </p:sp>
       <p:sp>
         <p:nvSpPr>
@@ -10851,7 +11078,7 @@
           <a:bodyPr wrap="square" rtlCol="0" anchor="ctr"/>
           <a:lstStyle/>
           <a:p>
-            <a:pPr indent="0" marL="0">
+            <a:pPr marL="0" indent="0">
               <a:buNone/>
             </a:pPr>
             <a:r>
@@ -10887,6 +11114,13 @@
           </a:solidFill>
           <a:ln/>
         </p:spPr>
+        <p:txBody>
+          <a:bodyPr/>
+          <a:lstStyle/>
+          <a:p>
+            <a:endParaRPr lang="en-IN"/>
+          </a:p>
+        </p:txBody>
       </p:sp>
       <p:sp>
         <p:nvSpPr>
@@ -10909,7 +11143,7 @@
           <a:bodyPr wrap="square" rtlCol="0" anchor="ctr"/>
           <a:lstStyle/>
           <a:p>
-            <a:pPr indent="0" marL="0">
+            <a:pPr marL="0" indent="0">
               <a:buNone/>
             </a:pPr>
             <a:r>
@@ -10945,6 +11179,13 @@
           </a:solidFill>
           <a:ln/>
         </p:spPr>
+        <p:txBody>
+          <a:bodyPr/>
+          <a:lstStyle/>
+          <a:p>
+            <a:endParaRPr lang="en-IN"/>
+          </a:p>
+        </p:txBody>
       </p:sp>
       <p:sp>
         <p:nvSpPr>
@@ -10967,7 +11208,7 @@
           <a:bodyPr wrap="square" rtlCol="0" anchor="ctr"/>
           <a:lstStyle/>
           <a:p>
-            <a:pPr indent="0" marL="0">
+            <a:pPr marL="0" indent="0">
               <a:buNone/>
             </a:pPr>
             <a:r>
@@ -11003,6 +11244,13 @@
           </a:solidFill>
           <a:ln/>
         </p:spPr>
+        <p:txBody>
+          <a:bodyPr/>
+          <a:lstStyle/>
+          <a:p>
+            <a:endParaRPr lang="en-IN"/>
+          </a:p>
+        </p:txBody>
       </p:sp>
       <p:sp>
         <p:nvSpPr>
@@ -11025,7 +11273,7 @@
           <a:bodyPr wrap="square" rtlCol="0" anchor="ctr"/>
           <a:lstStyle/>
           <a:p>
-            <a:pPr indent="0" marL="0">
+            <a:pPr marL="0" indent="0">
               <a:buNone/>
             </a:pPr>
             <a:r>
@@ -11061,6 +11309,13 @@
           </a:solidFill>
           <a:ln/>
         </p:spPr>
+        <p:txBody>
+          <a:bodyPr/>
+          <a:lstStyle/>
+          <a:p>
+            <a:endParaRPr lang="en-IN"/>
+          </a:p>
+        </p:txBody>
       </p:sp>
       <p:sp>
         <p:nvSpPr>
@@ -11083,7 +11338,7 @@
           <a:bodyPr wrap="square" rtlCol="0" anchor="ctr"/>
           <a:lstStyle/>
           <a:p>
-            <a:pPr indent="0" marL="0">
+            <a:pPr marL="0" indent="0">
               <a:buNone/>
             </a:pPr>
             <a:r>
@@ -11124,6 +11379,13 @@
             <a:prstDash val="solid"/>
           </a:ln>
         </p:spPr>
+        <p:txBody>
+          <a:bodyPr/>
+          <a:lstStyle/>
+          <a:p>
+            <a:endParaRPr lang="en-IN"/>
+          </a:p>
+        </p:txBody>
       </p:sp>
       <p:sp>
         <p:nvSpPr>
@@ -11146,7 +11408,7 @@
           <a:bodyPr wrap="square" rtlCol="0" anchor="ctr"/>
           <a:lstStyle/>
           <a:p>
-            <a:pPr indent="0" marL="0">
+            <a:pPr marL="0" indent="0">
               <a:buNone/>
             </a:pPr>
             <a:r>
@@ -11182,7 +11444,7 @@
           <a:bodyPr wrap="square" rtlCol="0" anchor="ctr"/>
           <a:lstStyle/>
           <a:p>
-            <a:pPr indent="0" marL="0">
+            <a:pPr marL="0" indent="0">
               <a:buNone/>
             </a:pPr>
             <a:r>
@@ -11221,6 +11483,13 @@
             <a:prstDash val="solid"/>
           </a:ln>
         </p:spPr>
+        <p:txBody>
+          <a:bodyPr/>
+          <a:lstStyle/>
+          <a:p>
+            <a:endParaRPr lang="en-IN"/>
+          </a:p>
+        </p:txBody>
       </p:sp>
       <p:sp>
         <p:nvSpPr>
@@ -11243,7 +11512,7 @@
           <a:bodyPr wrap="square" rtlCol="0" anchor="ctr"/>
           <a:lstStyle/>
           <a:p>
-            <a:pPr indent="0" marL="0">
+            <a:pPr marL="0" indent="0">
               <a:buNone/>
             </a:pPr>
             <a:r>
@@ -11279,7 +11548,7 @@
           <a:bodyPr wrap="square" rtlCol="0" anchor="ctr"/>
           <a:lstStyle/>
           <a:p>
-            <a:pPr indent="0" marL="0">
+            <a:pPr marL="0" indent="0">
               <a:lnSpc>
                 <a:spcPts val="1600"/>
               </a:lnSpc>
@@ -11317,6 +11586,7 @@
         <a:solidFill>
           <a:srgbClr val="090E1A"/>
         </a:solidFill>
+        <a:effectLst/>
       </p:bgPr>
     </p:bg>
     <p:spTree>
@@ -11357,6 +11627,13 @@
             <a:prstDash val="solid"/>
           </a:ln>
         </p:spPr>
+        <p:txBody>
+          <a:bodyPr/>
+          <a:lstStyle/>
+          <a:p>
+            <a:endParaRPr lang="en-IN"/>
+          </a:p>
+        </p:txBody>
       </p:sp>
       <p:sp>
         <p:nvSpPr>
@@ -11379,7 +11656,7 @@
           <a:bodyPr wrap="square" rtlCol="0" anchor="ctr"/>
           <a:lstStyle/>
           <a:p>
-            <a:pPr indent="0" marL="0">
+            <a:pPr marL="0" indent="0">
               <a:buNone/>
             </a:pPr>
             <a:r>
@@ -11418,7 +11695,7 @@
           <a:bodyPr wrap="square" rtlCol="0" anchor="ctr"/>
           <a:lstStyle/>
           <a:p>
-            <a:pPr indent="0" marL="0">
+            <a:pPr marL="0" indent="0">
               <a:buNone/>
             </a:pPr>
             <a:r>
@@ -11457,6 +11734,13 @@
           </a:solidFill>
           <a:ln/>
         </p:spPr>
+        <p:txBody>
+          <a:bodyPr/>
+          <a:lstStyle/>
+          <a:p>
+            <a:endParaRPr lang="en-IN"/>
+          </a:p>
+        </p:txBody>
       </p:sp>
       <p:sp>
         <p:nvSpPr>
@@ -11479,7 +11763,7 @@
           <a:bodyPr wrap="square" rtlCol="0" anchor="ctr"/>
           <a:lstStyle/>
           <a:p>
-            <a:pPr algn="ctr" indent="0" marL="0">
+            <a:pPr marL="0" indent="0" algn="ctr">
               <a:buNone/>
             </a:pPr>
             <a:r>
@@ -11518,7 +11802,7 @@
           <a:bodyPr wrap="square" rtlCol="0" anchor="ctr"/>
           <a:lstStyle/>
           <a:p>
-            <a:pPr indent="0" marL="0">
+            <a:pPr marL="0" indent="0">
               <a:buNone/>
             </a:pPr>
             <a:r>
@@ -11557,7 +11841,7 @@
           <a:bodyPr wrap="square" rtlCol="0" anchor="ctr"/>
           <a:lstStyle/>
           <a:p>
-            <a:pPr algn="r" indent="0" marL="0">
+            <a:pPr marL="0" indent="0" algn="r">
               <a:buNone/>
             </a:pPr>
             <a:r>
@@ -11601,6 +11885,13 @@
             <a:prstDash val="solid"/>
           </a:ln>
         </p:spPr>
+        <p:txBody>
+          <a:bodyPr/>
+          <a:lstStyle/>
+          <a:p>
+            <a:endParaRPr lang="en-IN"/>
+          </a:p>
+        </p:txBody>
       </p:sp>
       <p:sp>
         <p:nvSpPr>
@@ -11623,6 +11914,13 @@
           </a:solidFill>
           <a:ln/>
         </p:spPr>
+        <p:txBody>
+          <a:bodyPr/>
+          <a:lstStyle/>
+          <a:p>
+            <a:endParaRPr lang="en-IN"/>
+          </a:p>
+        </p:txBody>
       </p:sp>
       <p:sp>
         <p:nvSpPr>
@@ -11645,7 +11943,7 @@
           <a:bodyPr wrap="square" rtlCol="0" anchor="ctr"/>
           <a:lstStyle/>
           <a:p>
-            <a:pPr algn="ctr" indent="0" marL="0">
+            <a:pPr marL="0" indent="0" algn="ctr">
               <a:buNone/>
             </a:pPr>
             <a:r>
@@ -11681,7 +11979,7 @@
           <a:bodyPr wrap="square" rtlCol="0" anchor="ctr"/>
           <a:lstStyle/>
           <a:p>
-            <a:pPr algn="ctr" indent="0" marL="0">
+            <a:pPr marL="0" indent="0" algn="ctr">
               <a:buNone/>
             </a:pPr>
             <a:r>
@@ -11717,7 +12015,7 @@
           <a:bodyPr wrap="square" rtlCol="0" anchor="ctr"/>
           <a:lstStyle/>
           <a:p>
-            <a:pPr algn="l" indent="0" marL="0">
+            <a:pPr marL="0" indent="0" algn="l">
               <a:lnSpc>
                 <a:spcPts val="1800"/>
               </a:lnSpc>
@@ -11761,6 +12059,13 @@
             <a:prstDash val="solid"/>
           </a:ln>
         </p:spPr>
+        <p:txBody>
+          <a:bodyPr/>
+          <a:lstStyle/>
+          <a:p>
+            <a:endParaRPr lang="en-IN"/>
+          </a:p>
+        </p:txBody>
       </p:sp>
       <p:sp>
         <p:nvSpPr>
@@ -11783,6 +12088,13 @@
           </a:solidFill>
           <a:ln/>
         </p:spPr>
+        <p:txBody>
+          <a:bodyPr/>
+          <a:lstStyle/>
+          <a:p>
+            <a:endParaRPr lang="en-IN"/>
+          </a:p>
+        </p:txBody>
       </p:sp>
       <p:sp>
         <p:nvSpPr>
@@ -11805,7 +12117,7 @@
           <a:bodyPr wrap="square" rtlCol="0" anchor="ctr"/>
           <a:lstStyle/>
           <a:p>
-            <a:pPr algn="ctr" indent="0" marL="0">
+            <a:pPr marL="0" indent="0" algn="ctr">
               <a:buNone/>
             </a:pPr>
             <a:r>
@@ -11841,7 +12153,7 @@
           <a:bodyPr wrap="square" rtlCol="0" anchor="ctr"/>
           <a:lstStyle/>
           <a:p>
-            <a:pPr algn="ctr" indent="0" marL="0">
+            <a:pPr marL="0" indent="0" algn="ctr">
               <a:buNone/>
             </a:pPr>
             <a:r>
@@ -11877,7 +12189,7 @@
           <a:bodyPr wrap="square" rtlCol="0" anchor="ctr"/>
           <a:lstStyle/>
           <a:p>
-            <a:pPr algn="l" indent="0" marL="0">
+            <a:pPr marL="0" indent="0" algn="l">
               <a:lnSpc>
                 <a:spcPts val="1800"/>
               </a:lnSpc>
@@ -11921,6 +12233,13 @@
             <a:prstDash val="solid"/>
           </a:ln>
         </p:spPr>
+        <p:txBody>
+          <a:bodyPr/>
+          <a:lstStyle/>
+          <a:p>
+            <a:endParaRPr lang="en-IN"/>
+          </a:p>
+        </p:txBody>
       </p:sp>
       <p:sp>
         <p:nvSpPr>
@@ -11943,6 +12262,13 @@
           </a:solidFill>
           <a:ln/>
         </p:spPr>
+        <p:txBody>
+          <a:bodyPr/>
+          <a:lstStyle/>
+          <a:p>
+            <a:endParaRPr lang="en-IN"/>
+          </a:p>
+        </p:txBody>
       </p:sp>
       <p:sp>
         <p:nvSpPr>
@@ -11965,7 +12291,7 @@
           <a:bodyPr wrap="square" rtlCol="0" anchor="ctr"/>
           <a:lstStyle/>
           <a:p>
-            <a:pPr algn="ctr" indent="0" marL="0">
+            <a:pPr marL="0" indent="0" algn="ctr">
               <a:buNone/>
             </a:pPr>
             <a:r>
@@ -12001,7 +12327,7 @@
           <a:bodyPr wrap="square" rtlCol="0" anchor="ctr"/>
           <a:lstStyle/>
           <a:p>
-            <a:pPr algn="ctr" indent="0" marL="0">
+            <a:pPr marL="0" indent="0" algn="ctr">
               <a:buNone/>
             </a:pPr>
             <a:r>
@@ -12037,7 +12363,7 @@
           <a:bodyPr wrap="square" rtlCol="0" anchor="ctr"/>
           <a:lstStyle/>
           <a:p>
-            <a:pPr algn="l" indent="0" marL="0">
+            <a:pPr marL="0" indent="0" algn="l">
               <a:lnSpc>
                 <a:spcPts val="1800"/>
               </a:lnSpc>
@@ -12081,6 +12407,13 @@
             <a:prstDash val="solid"/>
           </a:ln>
         </p:spPr>
+        <p:txBody>
+          <a:bodyPr/>
+          <a:lstStyle/>
+          <a:p>
+            <a:endParaRPr lang="en-IN"/>
+          </a:p>
+        </p:txBody>
       </p:sp>
       <p:sp>
         <p:nvSpPr>
@@ -12103,6 +12436,13 @@
           </a:solidFill>
           <a:ln/>
         </p:spPr>
+        <p:txBody>
+          <a:bodyPr/>
+          <a:lstStyle/>
+          <a:p>
+            <a:endParaRPr lang="en-IN"/>
+          </a:p>
+        </p:txBody>
       </p:sp>
       <p:sp>
         <p:nvSpPr>
@@ -12125,7 +12465,7 @@
           <a:bodyPr wrap="square" rtlCol="0" anchor="ctr"/>
           <a:lstStyle/>
           <a:p>
-            <a:pPr algn="ctr" indent="0" marL="0">
+            <a:pPr marL="0" indent="0" algn="ctr">
               <a:buNone/>
             </a:pPr>
             <a:r>
@@ -12161,7 +12501,7 @@
           <a:bodyPr wrap="square" rtlCol="0" anchor="ctr"/>
           <a:lstStyle/>
           <a:p>
-            <a:pPr algn="ctr" indent="0" marL="0">
+            <a:pPr marL="0" indent="0" algn="ctr">
               <a:buNone/>
             </a:pPr>
             <a:r>
@@ -12197,7 +12537,7 @@
           <a:bodyPr wrap="square" rtlCol="0" anchor="ctr"/>
           <a:lstStyle/>
           <a:p>
-            <a:pPr algn="l" indent="0" marL="0">
+            <a:pPr marL="0" indent="0" algn="l">
               <a:lnSpc>
                 <a:spcPts val="1800"/>
               </a:lnSpc>
@@ -12231,6 +12571,7 @@
         <a:solidFill>
           <a:srgbClr val="090E1A"/>
         </a:solidFill>
+        <a:effectLst/>
       </p:bgPr>
     </p:bg>
     <p:spTree>
@@ -12271,6 +12612,13 @@
             <a:prstDash val="solid"/>
           </a:ln>
         </p:spPr>
+        <p:txBody>
+          <a:bodyPr/>
+          <a:lstStyle/>
+          <a:p>
+            <a:endParaRPr lang="en-IN"/>
+          </a:p>
+        </p:txBody>
       </p:sp>
       <p:sp>
         <p:nvSpPr>
@@ -12293,7 +12641,7 @@
           <a:bodyPr wrap="square" rtlCol="0" anchor="ctr"/>
           <a:lstStyle/>
           <a:p>
-            <a:pPr indent="0" marL="0">
+            <a:pPr marL="0" indent="0">
               <a:buNone/>
             </a:pPr>
             <a:r>
@@ -12332,7 +12680,7 @@
           <a:bodyPr wrap="square" rtlCol="0" anchor="ctr"/>
           <a:lstStyle/>
           <a:p>
-            <a:pPr indent="0" marL="0">
+            <a:pPr marL="0" indent="0">
               <a:buNone/>
             </a:pPr>
             <a:r>
@@ -12371,6 +12719,13 @@
           </a:solidFill>
           <a:ln/>
         </p:spPr>
+        <p:txBody>
+          <a:bodyPr/>
+          <a:lstStyle/>
+          <a:p>
+            <a:endParaRPr lang="en-IN"/>
+          </a:p>
+        </p:txBody>
       </p:sp>
       <p:sp>
         <p:nvSpPr>
@@ -12393,7 +12748,7 @@
           <a:bodyPr wrap="square" rtlCol="0" anchor="ctr"/>
           <a:lstStyle/>
           <a:p>
-            <a:pPr algn="ctr" indent="0" marL="0">
+            <a:pPr marL="0" indent="0" algn="ctr">
               <a:buNone/>
             </a:pPr>
             <a:r>
@@ -12432,7 +12787,7 @@
           <a:bodyPr wrap="square" rtlCol="0" anchor="ctr"/>
           <a:lstStyle/>
           <a:p>
-            <a:pPr indent="0" marL="0">
+            <a:pPr marL="0" indent="0">
               <a:buNone/>
             </a:pPr>
             <a:r>
@@ -12471,7 +12826,7 @@
           <a:bodyPr wrap="square" rtlCol="0" anchor="ctr"/>
           <a:lstStyle/>
           <a:p>
-            <a:pPr algn="r" indent="0" marL="0">
+            <a:pPr marL="0" indent="0" algn="r">
               <a:buNone/>
             </a:pPr>
             <a:r>
@@ -12515,6 +12870,13 @@
             <a:prstDash val="solid"/>
           </a:ln>
         </p:spPr>
+        <p:txBody>
+          <a:bodyPr/>
+          <a:lstStyle/>
+          <a:p>
+            <a:endParaRPr lang="en-IN"/>
+          </a:p>
+        </p:txBody>
       </p:sp>
       <p:sp>
         <p:nvSpPr>
@@ -12537,6 +12899,13 @@
           </a:solidFill>
           <a:ln/>
         </p:spPr>
+        <p:txBody>
+          <a:bodyPr/>
+          <a:lstStyle/>
+          <a:p>
+            <a:endParaRPr lang="en-IN"/>
+          </a:p>
+        </p:txBody>
       </p:sp>
       <p:sp>
         <p:nvSpPr>
@@ -12559,7 +12928,7 @@
           <a:bodyPr wrap="square" rtlCol="0" anchor="ctr"/>
           <a:lstStyle/>
           <a:p>
-            <a:pPr algn="ctr" indent="0" marL="0">
+            <a:pPr marL="0" indent="0" algn="ctr">
               <a:buNone/>
             </a:pPr>
             <a:r>
@@ -12595,7 +12964,7 @@
           <a:bodyPr wrap="square" rtlCol="0" anchor="ctr"/>
           <a:lstStyle/>
           <a:p>
-            <a:pPr indent="0" marL="0">
+            <a:pPr marL="0" indent="0">
               <a:buNone/>
             </a:pPr>
             <a:r>
@@ -12631,7 +13000,7 @@
           <a:bodyPr wrap="square" rtlCol="0" anchor="ctr"/>
           <a:lstStyle/>
           <a:p>
-            <a:pPr indent="0" marL="0">
+            <a:pPr marL="0" indent="0">
               <a:buNone/>
             </a:pPr>
             <a:r>
@@ -12667,7 +13036,7 @@
           <a:bodyPr wrap="square" rtlCol="0" anchor="ctr"/>
           <a:lstStyle/>
           <a:p>
-            <a:pPr indent="0" marL="0">
+            <a:pPr marL="0" indent="0">
               <a:buNone/>
             </a:pPr>
             <a:r>
@@ -12677,42 +13046,9 @@
                 </a:solidFill>
               </a:rPr>
               <a:t>• Full administrative oversight across company databases
-</a:t>
-            </a:r>
-            <a:pPr indent="0" marL="0">
-              <a:buNone/>
-            </a:pPr>
-            <a:r>
-              <a:rPr lang="en-US" sz="850" dirty="0">
-                <a:solidFill>
-                  <a:srgbClr val="F9FAFB"/>
-                </a:solidFill>
-              </a:rPr>
-              <a:t>• Multi-office kiosk provisioning &amp; master QR secret keys
-</a:t>
-            </a:r>
-            <a:pPr indent="0" marL="0">
-              <a:buNone/>
-            </a:pPr>
-            <a:r>
-              <a:rPr lang="en-US" sz="850" dirty="0">
-                <a:solidFill>
-                  <a:srgbClr val="F9FAFB"/>
-                </a:solidFill>
-              </a:rPr>
-              <a:t>• Executive approval queue for HR Manager WFH requests
-</a:t>
-            </a:r>
-            <a:pPr indent="0" marL="0">
-              <a:buNone/>
-            </a:pPr>
-            <a:r>
-              <a:rPr lang="en-US" sz="850" dirty="0">
-                <a:solidFill>
-                  <a:srgbClr val="F9FAFB"/>
-                </a:solidFill>
-              </a:rPr>
-              <a:t>• Immutable system security logs &amp; budget management
+• Multi-office kiosk provisioning &amp; master QR secret keys
+• Executive approval queue for HR Manager WFH requests
+• Immutable system security logs &amp; budget management
 </a:t>
             </a:r>
             <a:endParaRPr lang="en-US" sz="850" dirty="0"/>
@@ -12745,6 +13081,13 @@
             <a:prstDash val="solid"/>
           </a:ln>
         </p:spPr>
+        <p:txBody>
+          <a:bodyPr/>
+          <a:lstStyle/>
+          <a:p>
+            <a:endParaRPr lang="en-IN"/>
+          </a:p>
+        </p:txBody>
       </p:sp>
       <p:sp>
         <p:nvSpPr>
@@ -12767,6 +13110,13 @@
           </a:solidFill>
           <a:ln/>
         </p:spPr>
+        <p:txBody>
+          <a:bodyPr/>
+          <a:lstStyle/>
+          <a:p>
+            <a:endParaRPr lang="en-IN"/>
+          </a:p>
+        </p:txBody>
       </p:sp>
       <p:sp>
         <p:nvSpPr>
@@ -12789,7 +13139,7 @@
           <a:bodyPr wrap="square" rtlCol="0" anchor="ctr"/>
           <a:lstStyle/>
           <a:p>
-            <a:pPr algn="ctr" indent="0" marL="0">
+            <a:pPr marL="0" indent="0" algn="ctr">
               <a:buNone/>
             </a:pPr>
             <a:r>
@@ -12825,7 +13175,7 @@
           <a:bodyPr wrap="square" rtlCol="0" anchor="ctr"/>
           <a:lstStyle/>
           <a:p>
-            <a:pPr indent="0" marL="0">
+            <a:pPr marL="0" indent="0">
               <a:buNone/>
             </a:pPr>
             <a:r>
@@ -12861,7 +13211,7 @@
           <a:bodyPr wrap="square" rtlCol="0" anchor="ctr"/>
           <a:lstStyle/>
           <a:p>
-            <a:pPr indent="0" marL="0">
+            <a:pPr marL="0" indent="0">
               <a:buNone/>
             </a:pPr>
             <a:r>
@@ -12897,7 +13247,7 @@
           <a:bodyPr wrap="square" rtlCol="0" anchor="ctr"/>
           <a:lstStyle/>
           <a:p>
-            <a:pPr indent="0" marL="0">
+            <a:pPr marL="0" indent="0">
               <a:buNone/>
             </a:pPr>
             <a:r>
@@ -12907,42 +13257,9 @@
                 </a:solidFill>
               </a:rPr>
               <a:t>• Complete workforce directory, profiling &amp; status management
-</a:t>
-            </a:r>
-            <a:pPr indent="0" marL="0">
-              <a:buNone/>
-            </a:pPr>
-            <a:r>
-              <a:rPr lang="en-US" sz="850" dirty="0">
-                <a:solidFill>
-                  <a:srgbClr val="F9FAFB"/>
-                </a:solidFill>
-              </a:rPr>
-              <a:t>• Manual punch regularization &amp; biometric anomaly resolution
-</a:t>
-            </a:r>
-            <a:pPr indent="0" marL="0">
-              <a:buNone/>
-            </a:pPr>
-            <a:r>
-              <a:rPr lang="en-US" sz="850" dirty="0">
-                <a:solidFill>
-                  <a:srgbClr val="F9FAFB"/>
-                </a:solidFill>
-              </a:rPr>
-              <a:t>• Staff leave &amp; WFH request review &amp; approval processing
-</a:t>
-            </a:r>
-            <a:pPr indent="0" marL="0">
-              <a:buNone/>
-            </a:pPr>
-            <a:r>
-              <a:rPr lang="en-US" sz="850" dirty="0">
-                <a:solidFill>
-                  <a:srgbClr val="F9FAFB"/>
-                </a:solidFill>
-              </a:rPr>
-              <a:t>• One-click monthly payroll batch calculation &amp; slip release
+• Manual punch regularization &amp; biometric anomaly resolution
+• Staff leave &amp; WFH request review &amp; approval processing
+• One-click monthly payroll batch calculation &amp; slip release
 </a:t>
             </a:r>
             <a:endParaRPr lang="en-US" sz="850" dirty="0"/>
@@ -12975,6 +13292,13 @@
             <a:prstDash val="solid"/>
           </a:ln>
         </p:spPr>
+        <p:txBody>
+          <a:bodyPr/>
+          <a:lstStyle/>
+          <a:p>
+            <a:endParaRPr lang="en-IN"/>
+          </a:p>
+        </p:txBody>
       </p:sp>
       <p:sp>
         <p:nvSpPr>
@@ -12997,6 +13321,13 @@
           </a:solidFill>
           <a:ln/>
         </p:spPr>
+        <p:txBody>
+          <a:bodyPr/>
+          <a:lstStyle/>
+          <a:p>
+            <a:endParaRPr lang="en-IN"/>
+          </a:p>
+        </p:txBody>
       </p:sp>
       <p:sp>
         <p:nvSpPr>
@@ -13019,7 +13350,7 @@
           <a:bodyPr wrap="square" rtlCol="0" anchor="ctr"/>
           <a:lstStyle/>
           <a:p>
-            <a:pPr algn="ctr" indent="0" marL="0">
+            <a:pPr marL="0" indent="0" algn="ctr">
               <a:buNone/>
             </a:pPr>
             <a:r>
@@ -13055,7 +13386,7 @@
           <a:bodyPr wrap="square" rtlCol="0" anchor="ctr"/>
           <a:lstStyle/>
           <a:p>
-            <a:pPr indent="0" marL="0">
+            <a:pPr marL="0" indent="0">
               <a:buNone/>
             </a:pPr>
             <a:r>
@@ -13091,7 +13422,7 @@
           <a:bodyPr wrap="square" rtlCol="0" anchor="ctr"/>
           <a:lstStyle/>
           <a:p>
-            <a:pPr indent="0" marL="0">
+            <a:pPr marL="0" indent="0">
               <a:buNone/>
             </a:pPr>
             <a:r>
@@ -13127,7 +13458,7 @@
           <a:bodyPr wrap="square" rtlCol="0" anchor="ctr"/>
           <a:lstStyle/>
           <a:p>
-            <a:pPr indent="0" marL="0">
+            <a:pPr marL="0" indent="0">
               <a:buNone/>
             </a:pPr>
             <a:r>
@@ -13137,42 +13468,9 @@
                 </a:solidFill>
               </a:rPr>
               <a:t>• Team attendance tracking &amp; daily on-duty headcount
-</a:t>
-            </a:r>
-            <a:pPr indent="0" marL="0">
-              <a:buNone/>
-            </a:pPr>
-            <a:r>
-              <a:rPr lang="en-US" sz="850" dirty="0">
-                <a:solidFill>
-                  <a:srgbClr val="F9FAFB"/>
-                </a:solidFill>
-              </a:rPr>
-              <a:t>• Shift schedule planning &amp; rotational roster management
-</a:t>
-            </a:r>
-            <a:pPr indent="0" marL="0">
-              <a:buNone/>
-            </a:pPr>
-            <a:r>
-              <a:rPr lang="en-US" sz="850" dirty="0">
-                <a:solidFill>
-                  <a:srgbClr val="F9FAFB"/>
-                </a:solidFill>
-              </a:rPr>
-              <a:t>• First-line review for departmental leave &amp; WFH applications
-</a:t>
-            </a:r>
-            <a:pPr indent="0" marL="0">
-              <a:buNone/>
-            </a:pPr>
-            <a:r>
-              <a:rPr lang="en-US" sz="850" dirty="0">
-                <a:solidFill>
-                  <a:srgbClr val="F9FAFB"/>
-                </a:solidFill>
-              </a:rPr>
-              <a:t>• Quarterly KPI objective evaluations &amp; progress reports
+• Shift schedule planning &amp; rotational roster management
+• First-line review for departmental leave &amp; WFH applications
+• Quarterly KPI objective evaluations &amp; progress reports
 </a:t>
             </a:r>
             <a:endParaRPr lang="en-US" sz="850" dirty="0"/>
@@ -13205,6 +13503,13 @@
             <a:prstDash val="solid"/>
           </a:ln>
         </p:spPr>
+        <p:txBody>
+          <a:bodyPr/>
+          <a:lstStyle/>
+          <a:p>
+            <a:endParaRPr lang="en-IN"/>
+          </a:p>
+        </p:txBody>
       </p:sp>
       <p:sp>
         <p:nvSpPr>
@@ -13227,6 +13532,13 @@
           </a:solidFill>
           <a:ln/>
         </p:spPr>
+        <p:txBody>
+          <a:bodyPr/>
+          <a:lstStyle/>
+          <a:p>
+            <a:endParaRPr lang="en-IN"/>
+          </a:p>
+        </p:txBody>
       </p:sp>
       <p:sp>
         <p:nvSpPr>
@@ -13249,7 +13561,7 @@
           <a:bodyPr wrap="square" rtlCol="0" anchor="ctr"/>
           <a:lstStyle/>
           <a:p>
-            <a:pPr algn="ctr" indent="0" marL="0">
+            <a:pPr marL="0" indent="0" algn="ctr">
               <a:buNone/>
             </a:pPr>
             <a:r>
@@ -13285,7 +13597,7 @@
           <a:bodyPr wrap="square" rtlCol="0" anchor="ctr"/>
           <a:lstStyle/>
           <a:p>
-            <a:pPr indent="0" marL="0">
+            <a:pPr marL="0" indent="0">
               <a:buNone/>
             </a:pPr>
             <a:r>
@@ -13321,7 +13633,7 @@
           <a:bodyPr wrap="square" rtlCol="0" anchor="ctr"/>
           <a:lstStyle/>
           <a:p>
-            <a:pPr indent="0" marL="0">
+            <a:pPr marL="0" indent="0">
               <a:buNone/>
             </a:pPr>
             <a:r>
@@ -13357,7 +13669,7 @@
           <a:bodyPr wrap="square" rtlCol="0" anchor="ctr"/>
           <a:lstStyle/>
           <a:p>
-            <a:pPr indent="0" marL="0">
+            <a:pPr marL="0" indent="0">
               <a:buNone/>
             </a:pPr>
             <a:r>
@@ -13367,42 +13679,9 @@
                 </a:solidFill>
               </a:rPr>
               <a:t>• Dynamic QR scanning for instantaneous Punch In / Punch Out
-</a:t>
-            </a:r>
-            <a:pPr indent="0" marL="0">
-              <a:buNone/>
-            </a:pPr>
-            <a:r>
-              <a:rPr lang="en-US" sz="850" dirty="0">
-                <a:solidFill>
-                  <a:srgbClr val="F9FAFB"/>
-                </a:solidFill>
-              </a:rPr>
-              <a:t>• Persistent check-in badge &amp; monthly calendar attendance log
-</a:t>
-            </a:r>
-            <a:pPr indent="0" marL="0">
-              <a:buNone/>
-            </a:pPr>
-            <a:r>
-              <a:rPr lang="en-US" sz="850" dirty="0">
-                <a:solidFill>
-                  <a:srgbClr val="F9FAFB"/>
-                </a:solidFill>
-              </a:rPr>
-              <a:t>• Self-service Leave &amp; WFH application submission
-</a:t>
-            </a:r>
-            <a:pPr indent="0" marL="0">
-              <a:buNone/>
-            </a:pPr>
-            <a:r>
-              <a:rPr lang="en-US" sz="850" dirty="0">
-                <a:solidFill>
-                  <a:srgbClr val="F9FAFB"/>
-                </a:solidFill>
-              </a:rPr>
-              <a:t>• Confidential salary slip PDF download &amp; Helpdesk tickets
+• Persistent check-in badge &amp; monthly calendar attendance log
+• Self-service Leave &amp; WFH application submission
+• Confidential salary slip PDF download &amp; Helpdesk tickets
 </a:t>
             </a:r>
             <a:endParaRPr lang="en-US" sz="850" dirty="0"/>
@@ -13425,6 +13704,7 @@
         <a:solidFill>
           <a:srgbClr val="090E1A"/>
         </a:solidFill>
+        <a:effectLst/>
       </p:bgPr>
     </p:bg>
     <p:spTree>
@@ -13465,6 +13745,13 @@
             <a:prstDash val="solid"/>
           </a:ln>
         </p:spPr>
+        <p:txBody>
+          <a:bodyPr/>
+          <a:lstStyle/>
+          <a:p>
+            <a:endParaRPr lang="en-IN"/>
+          </a:p>
+        </p:txBody>
       </p:sp>
       <p:sp>
         <p:nvSpPr>
@@ -13487,7 +13774,7 @@
           <a:bodyPr wrap="square" rtlCol="0" anchor="ctr"/>
           <a:lstStyle/>
           <a:p>
-            <a:pPr indent="0" marL="0">
+            <a:pPr marL="0" indent="0">
               <a:buNone/>
             </a:pPr>
             <a:r>
@@ -13526,7 +13813,7 @@
           <a:bodyPr wrap="square" rtlCol="0" anchor="ctr"/>
           <a:lstStyle/>
           <a:p>
-            <a:pPr indent="0" marL="0">
+            <a:pPr marL="0" indent="0">
               <a:buNone/>
             </a:pPr>
             <a:r>
@@ -13565,6 +13852,13 @@
           </a:solidFill>
           <a:ln/>
         </p:spPr>
+        <p:txBody>
+          <a:bodyPr/>
+          <a:lstStyle/>
+          <a:p>
+            <a:endParaRPr lang="en-IN"/>
+          </a:p>
+        </p:txBody>
       </p:sp>
       <p:sp>
         <p:nvSpPr>
@@ -13587,7 +13881,7 @@
           <a:bodyPr wrap="square" rtlCol="0" anchor="ctr"/>
           <a:lstStyle/>
           <a:p>
-            <a:pPr algn="ctr" indent="0" marL="0">
+            <a:pPr marL="0" indent="0" algn="ctr">
               <a:buNone/>
             </a:pPr>
             <a:r>
@@ -13626,7 +13920,7 @@
           <a:bodyPr wrap="square" rtlCol="0" anchor="ctr"/>
           <a:lstStyle/>
           <a:p>
-            <a:pPr indent="0" marL="0">
+            <a:pPr marL="0" indent="0">
               <a:buNone/>
             </a:pPr>
             <a:r>
@@ -13665,7 +13959,7 @@
           <a:bodyPr wrap="square" rtlCol="0" anchor="ctr"/>
           <a:lstStyle/>
           <a:p>
-            <a:pPr algn="r" indent="0" marL="0">
+            <a:pPr marL="0" indent="0" algn="r">
               <a:buNone/>
             </a:pPr>
             <a:r>
@@ -13709,6 +14003,13 @@
             <a:prstDash val="solid"/>
           </a:ln>
         </p:spPr>
+        <p:txBody>
+          <a:bodyPr/>
+          <a:lstStyle/>
+          <a:p>
+            <a:endParaRPr lang="en-IN"/>
+          </a:p>
+        </p:txBody>
       </p:sp>
       <p:sp>
         <p:nvSpPr>
@@ -13731,7 +14032,7 @@
           <a:bodyPr wrap="square" rtlCol="0" anchor="ctr"/>
           <a:lstStyle/>
           <a:p>
-            <a:pPr indent="0" marL="0">
+            <a:pPr marL="0" indent="0">
               <a:buNone/>
             </a:pPr>
             <a:r>
@@ -13767,7 +14068,7 @@
           <a:bodyPr wrap="square" rtlCol="0" anchor="ctr"/>
           <a:lstStyle/>
           <a:p>
-            <a:pPr indent="0" marL="0">
+            <a:pPr marL="0" indent="0">
               <a:buNone/>
             </a:pPr>
             <a:r>
@@ -13803,7 +14104,7 @@
           <a:bodyPr wrap="square" rtlCol="0" anchor="ctr"/>
           <a:lstStyle/>
           <a:p>
-            <a:pPr indent="0" marL="0">
+            <a:pPr marL="0" indent="0">
               <a:buNone/>
             </a:pPr>
             <a:r>
@@ -13817,7 +14118,7 @@
             <a:endParaRPr lang="en-US" sz="950" dirty="0"/>
           </a:p>
           <a:p>
-            <a:pPr indent="0" marL="0">
+            <a:pPr marL="0" indent="0">
               <a:buNone/>
             </a:pPr>
             <a:r>
@@ -13854,6 +14155,13 @@
             <a:prstDash val="solid"/>
           </a:ln>
         </p:spPr>
+        <p:txBody>
+          <a:bodyPr/>
+          <a:lstStyle/>
+          <a:p>
+            <a:endParaRPr lang="en-IN"/>
+          </a:p>
+        </p:txBody>
       </p:sp>
       <p:sp>
         <p:nvSpPr>
@@ -13876,7 +14184,7 @@
           <a:bodyPr wrap="square" rtlCol="0" anchor="ctr"/>
           <a:lstStyle/>
           <a:p>
-            <a:pPr indent="0" marL="0">
+            <a:pPr marL="0" indent="0">
               <a:buNone/>
             </a:pPr>
             <a:r>
@@ -13912,7 +14220,7 @@
           <a:bodyPr wrap="square" rtlCol="0" anchor="ctr"/>
           <a:lstStyle/>
           <a:p>
-            <a:pPr indent="0" marL="0">
+            <a:pPr marL="0" indent="0">
               <a:buNone/>
             </a:pPr>
             <a:r>
@@ -13958,6 +14266,13 @@
             <a:prstDash val="solid"/>
           </a:ln>
         </p:spPr>
+        <p:txBody>
+          <a:bodyPr/>
+          <a:lstStyle/>
+          <a:p>
+            <a:endParaRPr lang="en-IN"/>
+          </a:p>
+        </p:txBody>
       </p:sp>
       <p:sp>
         <p:nvSpPr>
@@ -13980,7 +14295,7 @@
           <a:bodyPr wrap="square" rtlCol="0" anchor="ctr"/>
           <a:lstStyle/>
           <a:p>
-            <a:pPr indent="0" marL="0">
+            <a:pPr marL="0" indent="0">
               <a:buNone/>
             </a:pPr>
             <a:r>
@@ -14021,6 +14336,13 @@
             <a:prstDash val="solid"/>
           </a:ln>
         </p:spPr>
+        <p:txBody>
+          <a:bodyPr/>
+          <a:lstStyle/>
+          <a:p>
+            <a:endParaRPr lang="en-IN"/>
+          </a:p>
+        </p:txBody>
       </p:sp>
       <p:sp>
         <p:nvSpPr>
@@ -14043,7 +14365,7 @@
           <a:bodyPr wrap="square" rtlCol="0" anchor="ctr"/>
           <a:lstStyle/>
           <a:p>
-            <a:pPr indent="0" marL="0">
+            <a:pPr marL="0" indent="0">
               <a:buNone/>
             </a:pPr>
             <a:r>
@@ -14079,7 +14401,7 @@
           <a:bodyPr wrap="square" rtlCol="0" anchor="ctr"/>
           <a:lstStyle/>
           <a:p>
-            <a:pPr indent="0" marL="0">
+            <a:pPr marL="0" indent="0">
               <a:buNone/>
             </a:pPr>
             <a:r>
@@ -14120,6 +14442,13 @@
             <a:prstDash val="solid"/>
           </a:ln>
         </p:spPr>
+        <p:txBody>
+          <a:bodyPr/>
+          <a:lstStyle/>
+          <a:p>
+            <a:endParaRPr lang="en-IN"/>
+          </a:p>
+        </p:txBody>
       </p:sp>
       <p:sp>
         <p:nvSpPr>
@@ -14142,7 +14471,7 @@
           <a:bodyPr wrap="square" rtlCol="0" anchor="ctr"/>
           <a:lstStyle/>
           <a:p>
-            <a:pPr indent="0" marL="0">
+            <a:pPr marL="0" indent="0">
               <a:buNone/>
             </a:pPr>
             <a:r>
@@ -14178,7 +14507,7 @@
           <a:bodyPr wrap="square" rtlCol="0" anchor="ctr"/>
           <a:lstStyle/>
           <a:p>
-            <a:pPr indent="0" marL="0">
+            <a:pPr marL="0" indent="0">
               <a:buNone/>
             </a:pPr>
             <a:r>
@@ -14219,6 +14548,13 @@
             <a:prstDash val="solid"/>
           </a:ln>
         </p:spPr>
+        <p:txBody>
+          <a:bodyPr/>
+          <a:lstStyle/>
+          <a:p>
+            <a:endParaRPr lang="en-IN"/>
+          </a:p>
+        </p:txBody>
       </p:sp>
       <p:sp>
         <p:nvSpPr>
@@ -14241,7 +14577,7 @@
           <a:bodyPr wrap="square" rtlCol="0" anchor="ctr"/>
           <a:lstStyle/>
           <a:p>
-            <a:pPr indent="0" marL="0">
+            <a:pPr marL="0" indent="0">
               <a:buNone/>
             </a:pPr>
             <a:r>
@@ -14277,7 +14613,7 @@
           <a:bodyPr wrap="square" rtlCol="0" anchor="ctr"/>
           <a:lstStyle/>
           <a:p>
-            <a:pPr indent="0" marL="0">
+            <a:pPr marL="0" indent="0">
               <a:buNone/>
             </a:pPr>
             <a:r>
@@ -14318,6 +14654,13 @@
             <a:prstDash val="solid"/>
           </a:ln>
         </p:spPr>
+        <p:txBody>
+          <a:bodyPr/>
+          <a:lstStyle/>
+          <a:p>
+            <a:endParaRPr lang="en-IN"/>
+          </a:p>
+        </p:txBody>
       </p:sp>
       <p:sp>
         <p:nvSpPr>
@@ -14340,7 +14683,7 @@
           <a:bodyPr wrap="square" rtlCol="0" anchor="ctr"/>
           <a:lstStyle/>
           <a:p>
-            <a:pPr indent="0" marL="0">
+            <a:pPr marL="0" indent="0">
               <a:buNone/>
             </a:pPr>
             <a:r>
@@ -14376,7 +14719,7 @@
           <a:bodyPr wrap="square" rtlCol="0" anchor="ctr"/>
           <a:lstStyle/>
           <a:p>
-            <a:pPr indent="0" marL="0">
+            <a:pPr marL="0" indent="0">
               <a:buNone/>
             </a:pPr>
             <a:r>
@@ -14407,6 +14750,7 @@
         <a:solidFill>
           <a:srgbClr val="090E1A"/>
         </a:solidFill>
+        <a:effectLst/>
       </p:bgPr>
     </p:bg>
     <p:spTree>
@@ -14447,6 +14791,13 @@
             <a:prstDash val="solid"/>
           </a:ln>
         </p:spPr>
+        <p:txBody>
+          <a:bodyPr/>
+          <a:lstStyle/>
+          <a:p>
+            <a:endParaRPr lang="en-IN"/>
+          </a:p>
+        </p:txBody>
       </p:sp>
       <p:sp>
         <p:nvSpPr>
@@ -14469,7 +14820,7 @@
           <a:bodyPr wrap="square" rtlCol="0" anchor="ctr"/>
           <a:lstStyle/>
           <a:p>
-            <a:pPr indent="0" marL="0">
+            <a:pPr marL="0" indent="0">
               <a:buNone/>
             </a:pPr>
             <a:r>
@@ -14508,7 +14859,7 @@
           <a:bodyPr wrap="square" rtlCol="0" anchor="ctr"/>
           <a:lstStyle/>
           <a:p>
-            <a:pPr indent="0" marL="0">
+            <a:pPr marL="0" indent="0">
               <a:buNone/>
             </a:pPr>
             <a:r>
@@ -14547,6 +14898,13 @@
           </a:solidFill>
           <a:ln/>
         </p:spPr>
+        <p:txBody>
+          <a:bodyPr/>
+          <a:lstStyle/>
+          <a:p>
+            <a:endParaRPr lang="en-IN"/>
+          </a:p>
+        </p:txBody>
       </p:sp>
       <p:sp>
         <p:nvSpPr>
@@ -14569,7 +14927,7 @@
           <a:bodyPr wrap="square" rtlCol="0" anchor="ctr"/>
           <a:lstStyle/>
           <a:p>
-            <a:pPr algn="ctr" indent="0" marL="0">
+            <a:pPr marL="0" indent="0" algn="ctr">
               <a:buNone/>
             </a:pPr>
             <a:r>
@@ -14608,7 +14966,7 @@
           <a:bodyPr wrap="square" rtlCol="0" anchor="ctr"/>
           <a:lstStyle/>
           <a:p>
-            <a:pPr indent="0" marL="0">
+            <a:pPr marL="0" indent="0">
               <a:buNone/>
             </a:pPr>
             <a:r>
@@ -14647,7 +15005,7 @@
           <a:bodyPr wrap="square" rtlCol="0" anchor="ctr"/>
           <a:lstStyle/>
           <a:p>
-            <a:pPr algn="r" indent="0" marL="0">
+            <a:pPr marL="0" indent="0" algn="r">
               <a:buNone/>
             </a:pPr>
             <a:r>
@@ -14691,6 +15049,13 @@
             <a:prstDash val="solid"/>
           </a:ln>
         </p:spPr>
+        <p:txBody>
+          <a:bodyPr/>
+          <a:lstStyle/>
+          <a:p>
+            <a:endParaRPr lang="en-IN"/>
+          </a:p>
+        </p:txBody>
       </p:sp>
       <p:sp>
         <p:nvSpPr>
@@ -14713,7 +15078,7 @@
           <a:bodyPr wrap="square" rtlCol="0" anchor="ctr"/>
           <a:lstStyle/>
           <a:p>
-            <a:pPr indent="0" marL="0">
+            <a:pPr marL="0" indent="0">
               <a:buNone/>
             </a:pPr>
             <a:r>
@@ -14749,7 +15114,7 @@
           <a:bodyPr wrap="square" rtlCol="0" anchor="ctr"/>
           <a:lstStyle/>
           <a:p>
-            <a:pPr indent="0" marL="0">
+            <a:pPr marL="0" indent="0">
               <a:buNone/>
             </a:pPr>
             <a:r>
@@ -14790,6 +15155,13 @@
             <a:prstDash val="solid"/>
           </a:ln>
         </p:spPr>
+        <p:txBody>
+          <a:bodyPr/>
+          <a:lstStyle/>
+          <a:p>
+            <a:endParaRPr lang="en-IN"/>
+          </a:p>
+        </p:txBody>
       </p:sp>
       <p:sp>
         <p:nvSpPr>
@@ -14812,7 +15184,7 @@
           <a:bodyPr wrap="square" rtlCol="0" anchor="ctr"/>
           <a:lstStyle/>
           <a:p>
-            <a:pPr indent="0" marL="0">
+            <a:pPr marL="0" indent="0">
               <a:buNone/>
             </a:pPr>
             <a:r>
@@ -14848,7 +15220,7 @@
           <a:bodyPr wrap="square" rtlCol="0" anchor="ctr"/>
           <a:lstStyle/>
           <a:p>
-            <a:pPr indent="0" marL="0">
+            <a:pPr marL="0" indent="0">
               <a:buNone/>
             </a:pPr>
             <a:r>
@@ -14885,6 +15257,13 @@
             <a:prstDash val="solid"/>
           </a:ln>
         </p:spPr>
+        <p:txBody>
+          <a:bodyPr/>
+          <a:lstStyle/>
+          <a:p>
+            <a:endParaRPr lang="en-IN"/>
+          </a:p>
+        </p:txBody>
       </p:sp>
       <p:sp>
         <p:nvSpPr>
@@ -14907,7 +15286,7 @@
           <a:bodyPr wrap="square" rtlCol="0" anchor="ctr"/>
           <a:lstStyle/>
           <a:p>
-            <a:pPr indent="0" marL="0">
+            <a:pPr marL="0" indent="0">
               <a:lnSpc>
                 <a:spcPts val="1600"/>
               </a:lnSpc>
@@ -14955,6 +15334,13 @@
             <a:prstDash val="solid"/>
           </a:ln>
         </p:spPr>
+        <p:txBody>
+          <a:bodyPr/>
+          <a:lstStyle/>
+          <a:p>
+            <a:endParaRPr lang="en-IN"/>
+          </a:p>
+        </p:txBody>
       </p:sp>
       <p:sp>
         <p:nvSpPr>
@@ -14977,7 +15363,7 @@
           <a:bodyPr wrap="square" rtlCol="0" anchor="ctr"/>
           <a:lstStyle/>
           <a:p>
-            <a:pPr indent="0" marL="0">
+            <a:pPr marL="0" indent="0">
               <a:buNone/>
             </a:pPr>
             <a:r>
@@ -15013,7 +15399,7 @@
           <a:bodyPr wrap="square" rtlCol="0" anchor="ctr"/>
           <a:lstStyle/>
           <a:p>
-            <a:pPr indent="0" marL="0">
+            <a:pPr marL="0" indent="0">
               <a:buNone/>
             </a:pPr>
             <a:r>
@@ -15050,6 +15436,13 @@
             <a:prstDash val="solid"/>
           </a:ln>
         </p:spPr>
+        <p:txBody>
+          <a:bodyPr/>
+          <a:lstStyle/>
+          <a:p>
+            <a:endParaRPr lang="en-IN"/>
+          </a:p>
+        </p:txBody>
       </p:sp>
       <p:sp>
         <p:nvSpPr>
@@ -15072,7 +15465,7 @@
           <a:bodyPr wrap="square" rtlCol="0" anchor="ctr"/>
           <a:lstStyle/>
           <a:p>
-            <a:pPr indent="0" marL="0">
+            <a:pPr marL="0" indent="0">
               <a:lnSpc>
                 <a:spcPts val="1600"/>
               </a:lnSpc>
@@ -15120,6 +15513,13 @@
             <a:prstDash val="solid"/>
           </a:ln>
         </p:spPr>
+        <p:txBody>
+          <a:bodyPr/>
+          <a:lstStyle/>
+          <a:p>
+            <a:endParaRPr lang="en-IN"/>
+          </a:p>
+        </p:txBody>
       </p:sp>
       <p:sp>
         <p:nvSpPr>
@@ -15142,7 +15542,7 @@
           <a:bodyPr wrap="square" rtlCol="0" anchor="ctr"/>
           <a:lstStyle/>
           <a:p>
-            <a:pPr indent="0" marL="0">
+            <a:pPr marL="0" indent="0">
               <a:buNone/>
             </a:pPr>
             <a:r>
@@ -15178,7 +15578,7 @@
           <a:bodyPr wrap="square" rtlCol="0" anchor="ctr"/>
           <a:lstStyle/>
           <a:p>
-            <a:pPr indent="0" marL="0">
+            <a:pPr marL="0" indent="0">
               <a:buNone/>
             </a:pPr>
             <a:r>
@@ -15215,6 +15615,13 @@
             <a:prstDash val="solid"/>
           </a:ln>
         </p:spPr>
+        <p:txBody>
+          <a:bodyPr/>
+          <a:lstStyle/>
+          <a:p>
+            <a:endParaRPr lang="en-IN"/>
+          </a:p>
+        </p:txBody>
       </p:sp>
       <p:sp>
         <p:nvSpPr>
@@ -15237,7 +15644,7 @@
           <a:bodyPr wrap="square" rtlCol="0" anchor="ctr"/>
           <a:lstStyle/>
           <a:p>
-            <a:pPr indent="0" marL="0">
+            <a:pPr marL="0" indent="0">
               <a:lnSpc>
                 <a:spcPts val="1600"/>
               </a:lnSpc>
@@ -15285,6 +15692,13 @@
             <a:prstDash val="solid"/>
           </a:ln>
         </p:spPr>
+        <p:txBody>
+          <a:bodyPr/>
+          <a:lstStyle/>
+          <a:p>
+            <a:endParaRPr lang="en-IN"/>
+          </a:p>
+        </p:txBody>
       </p:sp>
       <p:sp>
         <p:nvSpPr>
@@ -15307,7 +15721,7 @@
           <a:bodyPr wrap="square" rtlCol="0" anchor="ctr"/>
           <a:lstStyle/>
           <a:p>
-            <a:pPr indent="0" marL="0">
+            <a:pPr marL="0" indent="0">
               <a:buNone/>
             </a:pPr>
             <a:r>
@@ -15343,7 +15757,7 @@
           <a:bodyPr wrap="square" rtlCol="0" anchor="ctr"/>
           <a:lstStyle/>
           <a:p>
-            <a:pPr indent="0" marL="0">
+            <a:pPr marL="0" indent="0">
               <a:buNone/>
             </a:pPr>
             <a:r>
@@ -15380,6 +15794,13 @@
             <a:prstDash val="solid"/>
           </a:ln>
         </p:spPr>
+        <p:txBody>
+          <a:bodyPr/>
+          <a:lstStyle/>
+          <a:p>
+            <a:endParaRPr lang="en-IN"/>
+          </a:p>
+        </p:txBody>
       </p:sp>
       <p:sp>
         <p:nvSpPr>
@@ -15402,7 +15823,7 @@
           <a:bodyPr wrap="square" rtlCol="0" anchor="ctr"/>
           <a:lstStyle/>
           <a:p>
-            <a:pPr indent="0" marL="0">
+            <a:pPr marL="0" indent="0">
               <a:lnSpc>
                 <a:spcPts val="1600"/>
               </a:lnSpc>
@@ -15440,6 +15861,7 @@
         <a:solidFill>
           <a:srgbClr val="090E1A"/>
         </a:solidFill>
+        <a:effectLst/>
       </p:bgPr>
     </p:bg>
     <p:spTree>
@@ -15480,6 +15902,13 @@
             <a:prstDash val="solid"/>
           </a:ln>
         </p:spPr>
+        <p:txBody>
+          <a:bodyPr/>
+          <a:lstStyle/>
+          <a:p>
+            <a:endParaRPr lang="en-IN"/>
+          </a:p>
+        </p:txBody>
       </p:sp>
       <p:sp>
         <p:nvSpPr>
@@ -15502,7 +15931,7 @@
           <a:bodyPr wrap="square" rtlCol="0" anchor="ctr"/>
           <a:lstStyle/>
           <a:p>
-            <a:pPr indent="0" marL="0">
+            <a:pPr marL="0" indent="0">
               <a:buNone/>
             </a:pPr>
             <a:r>
@@ -15541,7 +15970,7 @@
           <a:bodyPr wrap="square" rtlCol="0" anchor="ctr"/>
           <a:lstStyle/>
           <a:p>
-            <a:pPr indent="0" marL="0">
+            <a:pPr marL="0" indent="0">
               <a:buNone/>
             </a:pPr>
             <a:r>
@@ -15580,6 +16009,13 @@
           </a:solidFill>
           <a:ln/>
         </p:spPr>
+        <p:txBody>
+          <a:bodyPr/>
+          <a:lstStyle/>
+          <a:p>
+            <a:endParaRPr lang="en-IN"/>
+          </a:p>
+        </p:txBody>
       </p:sp>
       <p:sp>
         <p:nvSpPr>
@@ -15602,7 +16038,7 @@
           <a:bodyPr wrap="square" rtlCol="0" anchor="ctr"/>
           <a:lstStyle/>
           <a:p>
-            <a:pPr algn="ctr" indent="0" marL="0">
+            <a:pPr marL="0" indent="0" algn="ctr">
               <a:buNone/>
             </a:pPr>
             <a:r>
@@ -15641,7 +16077,7 @@
           <a:bodyPr wrap="square" rtlCol="0" anchor="ctr"/>
           <a:lstStyle/>
           <a:p>
-            <a:pPr indent="0" marL="0">
+            <a:pPr marL="0" indent="0">
               <a:buNone/>
             </a:pPr>
             <a:r>
@@ -15680,7 +16116,7 @@
           <a:bodyPr wrap="square" rtlCol="0" anchor="ctr"/>
           <a:lstStyle/>
           <a:p>
-            <a:pPr algn="r" indent="0" marL="0">
+            <a:pPr marL="0" indent="0" algn="r">
               <a:buNone/>
             </a:pPr>
             <a:r>
@@ -15724,6 +16160,13 @@
             <a:prstDash val="solid"/>
           </a:ln>
         </p:spPr>
+        <p:txBody>
+          <a:bodyPr/>
+          <a:lstStyle/>
+          <a:p>
+            <a:endParaRPr lang="en-IN"/>
+          </a:p>
+        </p:txBody>
       </p:sp>
       <p:sp>
         <p:nvSpPr>
@@ -15746,7 +16189,7 @@
           <a:bodyPr wrap="square" rtlCol="0" anchor="ctr"/>
           <a:lstStyle/>
           <a:p>
-            <a:pPr indent="0" marL="0">
+            <a:pPr marL="0" indent="0">
               <a:buNone/>
             </a:pPr>
             <a:r>
@@ -15782,7 +16225,7 @@
           <a:bodyPr wrap="square" rtlCol="0" anchor="ctr"/>
           <a:lstStyle/>
           <a:p>
-            <a:pPr indent="0" marL="0">
+            <a:pPr marL="0" indent="0">
               <a:buNone/>
             </a:pPr>
             <a:r>
@@ -15818,7 +16261,7 @@
           <a:bodyPr wrap="square" rtlCol="0" anchor="ctr"/>
           <a:lstStyle/>
           <a:p>
-            <a:pPr indent="0" marL="0">
+            <a:pPr marL="0" indent="0">
               <a:buNone/>
             </a:pPr>
             <a:r>
@@ -15854,6 +16297,13 @@
           </a:solidFill>
           <a:ln/>
         </p:spPr>
+        <p:txBody>
+          <a:bodyPr/>
+          <a:lstStyle/>
+          <a:p>
+            <a:endParaRPr lang="en-IN"/>
+          </a:p>
+        </p:txBody>
       </p:sp>
       <p:sp>
         <p:nvSpPr>
@@ -15876,7 +16326,7 @@
           <a:bodyPr wrap="square" rtlCol="0" anchor="ctr"/>
           <a:lstStyle/>
           <a:p>
-            <a:pPr indent="0" marL="0">
+            <a:pPr marL="0" indent="0">
               <a:buNone/>
             </a:pPr>
             <a:r>
@@ -15912,7 +16362,7 @@
           <a:bodyPr wrap="square" rtlCol="0" anchor="ctr"/>
           <a:lstStyle/>
           <a:p>
-            <a:pPr indent="0" marL="0">
+            <a:pPr marL="0" indent="0">
               <a:buNone/>
             </a:pPr>
             <a:r>
@@ -15948,6 +16398,13 @@
           </a:solidFill>
           <a:ln/>
         </p:spPr>
+        <p:txBody>
+          <a:bodyPr/>
+          <a:lstStyle/>
+          <a:p>
+            <a:endParaRPr lang="en-IN"/>
+          </a:p>
+        </p:txBody>
       </p:sp>
       <p:sp>
         <p:nvSpPr>
@@ -15970,7 +16427,7 @@
           <a:bodyPr wrap="square" rtlCol="0" anchor="ctr"/>
           <a:lstStyle/>
           <a:p>
-            <a:pPr indent="0" marL="0">
+            <a:pPr marL="0" indent="0">
               <a:buNone/>
             </a:pPr>
             <a:r>
@@ -16006,7 +16463,7 @@
           <a:bodyPr wrap="square" rtlCol="0" anchor="ctr"/>
           <a:lstStyle/>
           <a:p>
-            <a:pPr indent="0" marL="0">
+            <a:pPr marL="0" indent="0">
               <a:buNone/>
             </a:pPr>
             <a:r>
@@ -16042,6 +16499,13 @@
           </a:solidFill>
           <a:ln/>
         </p:spPr>
+        <p:txBody>
+          <a:bodyPr/>
+          <a:lstStyle/>
+          <a:p>
+            <a:endParaRPr lang="en-IN"/>
+          </a:p>
+        </p:txBody>
       </p:sp>
       <p:sp>
         <p:nvSpPr>
@@ -16064,7 +16528,7 @@
           <a:bodyPr wrap="square" rtlCol="0" anchor="ctr"/>
           <a:lstStyle/>
           <a:p>
-            <a:pPr indent="0" marL="0">
+            <a:pPr marL="0" indent="0">
               <a:buNone/>
             </a:pPr>
             <a:r>
@@ -16100,7 +16564,7 @@
           <a:bodyPr wrap="square" rtlCol="0" anchor="ctr"/>
           <a:lstStyle/>
           <a:p>
-            <a:pPr indent="0" marL="0">
+            <a:pPr marL="0" indent="0">
               <a:buNone/>
             </a:pPr>
             <a:r>
@@ -16141,6 +16605,13 @@
             <a:prstDash val="solid"/>
           </a:ln>
         </p:spPr>
+        <p:txBody>
+          <a:bodyPr/>
+          <a:lstStyle/>
+          <a:p>
+            <a:endParaRPr lang="en-IN"/>
+          </a:p>
+        </p:txBody>
       </p:sp>
       <p:sp>
         <p:nvSpPr>
@@ -16163,7 +16634,7 @@
           <a:bodyPr wrap="square" rtlCol="0" anchor="ctr"/>
           <a:lstStyle/>
           <a:p>
-            <a:pPr indent="0" marL="0">
+            <a:pPr marL="0" indent="0">
               <a:buNone/>
             </a:pPr>
             <a:r>
@@ -16199,6 +16670,13 @@
           </a:solidFill>
           <a:ln/>
         </p:spPr>
+        <p:txBody>
+          <a:bodyPr/>
+          <a:lstStyle/>
+          <a:p>
+            <a:endParaRPr lang="en-IN"/>
+          </a:p>
+        </p:txBody>
       </p:sp>
       <p:sp>
         <p:nvSpPr>
@@ -16221,7 +16699,7 @@
           <a:bodyPr wrap="square" rtlCol="0" anchor="ctr"/>
           <a:lstStyle/>
           <a:p>
-            <a:pPr indent="0" marL="0">
+            <a:pPr marL="0" indent="0">
               <a:buNone/>
             </a:pPr>
             <a:r>
@@ -16257,7 +16735,7 @@
           <a:bodyPr wrap="square" rtlCol="0" anchor="ctr"/>
           <a:lstStyle/>
           <a:p>
-            <a:pPr indent="0" marL="0">
+            <a:pPr marL="0" indent="0">
               <a:buNone/>
             </a:pPr>
             <a:r>
@@ -16293,6 +16771,13 @@
           </a:solidFill>
           <a:ln/>
         </p:spPr>
+        <p:txBody>
+          <a:bodyPr/>
+          <a:lstStyle/>
+          <a:p>
+            <a:endParaRPr lang="en-IN"/>
+          </a:p>
+        </p:txBody>
       </p:sp>
       <p:sp>
         <p:nvSpPr>
@@ -16315,7 +16800,7 @@
           <a:bodyPr wrap="square" rtlCol="0" anchor="ctr"/>
           <a:lstStyle/>
           <a:p>
-            <a:pPr indent="0" marL="0">
+            <a:pPr marL="0" indent="0">
               <a:buNone/>
             </a:pPr>
             <a:r>
@@ -16351,7 +16836,7 @@
           <a:bodyPr wrap="square" rtlCol="0" anchor="ctr"/>
           <a:lstStyle/>
           <a:p>
-            <a:pPr indent="0" marL="0">
+            <a:pPr marL="0" indent="0">
               <a:buNone/>
             </a:pPr>
             <a:r>
@@ -16387,6 +16872,13 @@
           </a:solidFill>
           <a:ln/>
         </p:spPr>
+        <p:txBody>
+          <a:bodyPr/>
+          <a:lstStyle/>
+          <a:p>
+            <a:endParaRPr lang="en-IN"/>
+          </a:p>
+        </p:txBody>
       </p:sp>
       <p:sp>
         <p:nvSpPr>
@@ -16409,7 +16901,7 @@
           <a:bodyPr wrap="square" rtlCol="0" anchor="ctr"/>
           <a:lstStyle/>
           <a:p>
-            <a:pPr indent="0" marL="0">
+            <a:pPr marL="0" indent="0">
               <a:buNone/>
             </a:pPr>
             <a:r>
@@ -16445,7 +16937,7 @@
           <a:bodyPr wrap="square" rtlCol="0" anchor="ctr"/>
           <a:lstStyle/>
           <a:p>
-            <a:pPr indent="0" marL="0">
+            <a:pPr marL="0" indent="0">
               <a:buNone/>
             </a:pPr>
             <a:r>
@@ -16481,6 +16973,13 @@
           </a:solidFill>
           <a:ln/>
         </p:spPr>
+        <p:txBody>
+          <a:bodyPr/>
+          <a:lstStyle/>
+          <a:p>
+            <a:endParaRPr lang="en-IN"/>
+          </a:p>
+        </p:txBody>
       </p:sp>
       <p:sp>
         <p:nvSpPr>
@@ -16503,7 +17002,7 @@
           <a:bodyPr wrap="square" rtlCol="0" anchor="ctr"/>
           <a:lstStyle/>
           <a:p>
-            <a:pPr indent="0" marL="0">
+            <a:pPr marL="0" indent="0">
               <a:buNone/>
             </a:pPr>
             <a:r>
@@ -16539,7 +17038,7 @@
           <a:bodyPr wrap="square" rtlCol="0" anchor="ctr"/>
           <a:lstStyle/>
           <a:p>
-            <a:pPr indent="0" marL="0">
+            <a:pPr marL="0" indent="0">
               <a:buNone/>
             </a:pPr>
             <a:r>
@@ -16570,6 +17069,7 @@
         <a:solidFill>
           <a:srgbClr val="090E1A"/>
         </a:solidFill>
+        <a:effectLst/>
       </p:bgPr>
     </p:bg>
     <p:spTree>
@@ -16610,6 +17110,13 @@
             <a:prstDash val="solid"/>
           </a:ln>
         </p:spPr>
+        <p:txBody>
+          <a:bodyPr/>
+          <a:lstStyle/>
+          <a:p>
+            <a:endParaRPr lang="en-IN"/>
+          </a:p>
+        </p:txBody>
       </p:sp>
       <p:sp>
         <p:nvSpPr>
@@ -16632,7 +17139,7 @@
           <a:bodyPr wrap="square" rtlCol="0" anchor="ctr"/>
           <a:lstStyle/>
           <a:p>
-            <a:pPr indent="0" marL="0">
+            <a:pPr marL="0" indent="0">
               <a:buNone/>
             </a:pPr>
             <a:r>
@@ -16671,7 +17178,7 @@
           <a:bodyPr wrap="square" rtlCol="0" anchor="ctr"/>
           <a:lstStyle/>
           <a:p>
-            <a:pPr indent="0" marL="0">
+            <a:pPr marL="0" indent="0">
               <a:buNone/>
             </a:pPr>
             <a:r>
@@ -16710,6 +17217,13 @@
           </a:solidFill>
           <a:ln/>
         </p:spPr>
+        <p:txBody>
+          <a:bodyPr/>
+          <a:lstStyle/>
+          <a:p>
+            <a:endParaRPr lang="en-IN"/>
+          </a:p>
+        </p:txBody>
       </p:sp>
       <p:sp>
         <p:nvSpPr>
@@ -16732,7 +17246,7 @@
           <a:bodyPr wrap="square" rtlCol="0" anchor="ctr"/>
           <a:lstStyle/>
           <a:p>
-            <a:pPr algn="ctr" indent="0" marL="0">
+            <a:pPr marL="0" indent="0" algn="ctr">
               <a:buNone/>
             </a:pPr>
             <a:r>
@@ -16771,7 +17285,7 @@
           <a:bodyPr wrap="square" rtlCol="0" anchor="ctr"/>
           <a:lstStyle/>
           <a:p>
-            <a:pPr indent="0" marL="0">
+            <a:pPr marL="0" indent="0">
               <a:buNone/>
             </a:pPr>
             <a:r>
@@ -16810,7 +17324,7 @@
           <a:bodyPr wrap="square" rtlCol="0" anchor="ctr"/>
           <a:lstStyle/>
           <a:p>
-            <a:pPr algn="r" indent="0" marL="0">
+            <a:pPr marL="0" indent="0" algn="r">
               <a:buNone/>
             </a:pPr>
             <a:r>
@@ -16854,6 +17368,13 @@
             <a:prstDash val="solid"/>
           </a:ln>
         </p:spPr>
+        <p:txBody>
+          <a:bodyPr/>
+          <a:lstStyle/>
+          <a:p>
+            <a:endParaRPr lang="en-IN"/>
+          </a:p>
+        </p:txBody>
       </p:sp>
       <p:sp>
         <p:nvSpPr>
@@ -16876,7 +17397,7 @@
           <a:bodyPr wrap="square" rtlCol="0" anchor="ctr"/>
           <a:lstStyle/>
           <a:p>
-            <a:pPr indent="0" marL="0">
+            <a:pPr marL="0" indent="0">
               <a:buNone/>
             </a:pPr>
             <a:r>
@@ -16912,7 +17433,7 @@
           <a:bodyPr wrap="square" rtlCol="0" anchor="ctr"/>
           <a:lstStyle/>
           <a:p>
-            <a:pPr indent="0" marL="0">
+            <a:pPr marL="0" indent="0">
               <a:buNone/>
             </a:pPr>
             <a:r>
@@ -16948,7 +17469,7 @@
           <a:bodyPr wrap="square" rtlCol="0" anchor="ctr"/>
           <a:lstStyle/>
           <a:p>
-            <a:pPr indent="0" marL="0">
+            <a:pPr marL="0" indent="0">
               <a:buNone/>
             </a:pPr>
             <a:r>
@@ -16984,6 +17505,13 @@
           </a:solidFill>
           <a:ln/>
         </p:spPr>
+        <p:txBody>
+          <a:bodyPr/>
+          <a:lstStyle/>
+          <a:p>
+            <a:endParaRPr lang="en-IN"/>
+          </a:p>
+        </p:txBody>
       </p:sp>
       <p:sp>
         <p:nvSpPr>
@@ -17006,7 +17534,7 @@
           <a:bodyPr wrap="square" rtlCol="0" anchor="ctr"/>
           <a:lstStyle/>
           <a:p>
-            <a:pPr indent="0" marL="0">
+            <a:pPr marL="0" indent="0">
               <a:buNone/>
             </a:pPr>
             <a:r>
@@ -17042,7 +17570,7 @@
           <a:bodyPr wrap="square" rtlCol="0" anchor="ctr"/>
           <a:lstStyle/>
           <a:p>
-            <a:pPr indent="0" marL="0">
+            <a:pPr marL="0" indent="0">
               <a:buNone/>
             </a:pPr>
             <a:r>
@@ -17078,6 +17606,13 @@
           </a:solidFill>
           <a:ln/>
         </p:spPr>
+        <p:txBody>
+          <a:bodyPr/>
+          <a:lstStyle/>
+          <a:p>
+            <a:endParaRPr lang="en-IN"/>
+          </a:p>
+        </p:txBody>
       </p:sp>
       <p:sp>
         <p:nvSpPr>
@@ -17100,7 +17635,7 @@
           <a:bodyPr wrap="square" rtlCol="0" anchor="ctr"/>
           <a:lstStyle/>
           <a:p>
-            <a:pPr indent="0" marL="0">
+            <a:pPr marL="0" indent="0">
               <a:buNone/>
             </a:pPr>
             <a:r>
@@ -17136,7 +17671,7 @@
           <a:bodyPr wrap="square" rtlCol="0" anchor="ctr"/>
           <a:lstStyle/>
           <a:p>
-            <a:pPr indent="0" marL="0">
+            <a:pPr marL="0" indent="0">
               <a:buNone/>
             </a:pPr>
             <a:r>
@@ -17172,6 +17707,13 @@
           </a:solidFill>
           <a:ln/>
         </p:spPr>
+        <p:txBody>
+          <a:bodyPr/>
+          <a:lstStyle/>
+          <a:p>
+            <a:endParaRPr lang="en-IN"/>
+          </a:p>
+        </p:txBody>
       </p:sp>
       <p:sp>
         <p:nvSpPr>
@@ -17194,7 +17736,7 @@
           <a:bodyPr wrap="square" rtlCol="0" anchor="ctr"/>
           <a:lstStyle/>
           <a:p>
-            <a:pPr indent="0" marL="0">
+            <a:pPr marL="0" indent="0">
               <a:buNone/>
             </a:pPr>
             <a:r>
@@ -17230,7 +17772,7 @@
           <a:bodyPr wrap="square" rtlCol="0" anchor="ctr"/>
           <a:lstStyle/>
           <a:p>
-            <a:pPr indent="0" marL="0">
+            <a:pPr marL="0" indent="0">
               <a:buNone/>
             </a:pPr>
             <a:r>
@@ -17266,6 +17808,13 @@
           </a:solidFill>
           <a:ln/>
         </p:spPr>
+        <p:txBody>
+          <a:bodyPr/>
+          <a:lstStyle/>
+          <a:p>
+            <a:endParaRPr lang="en-IN"/>
+          </a:p>
+        </p:txBody>
       </p:sp>
       <p:sp>
         <p:nvSpPr>
@@ -17288,7 +17837,7 @@
           <a:bodyPr wrap="square" rtlCol="0" anchor="ctr"/>
           <a:lstStyle/>
           <a:p>
-            <a:pPr indent="0" marL="0">
+            <a:pPr marL="0" indent="0">
               <a:buNone/>
             </a:pPr>
             <a:r>
@@ -17324,7 +17873,7 @@
           <a:bodyPr wrap="square" rtlCol="0" anchor="ctr"/>
           <a:lstStyle/>
           <a:p>
-            <a:pPr indent="0" marL="0">
+            <a:pPr marL="0" indent="0">
               <a:buNone/>
             </a:pPr>
             <a:r>
@@ -17365,6 +17914,13 @@
             <a:prstDash val="solid"/>
           </a:ln>
         </p:spPr>
+        <p:txBody>
+          <a:bodyPr/>
+          <a:lstStyle/>
+          <a:p>
+            <a:endParaRPr lang="en-IN"/>
+          </a:p>
+        </p:txBody>
       </p:sp>
       <p:sp>
         <p:nvSpPr>
@@ -17387,7 +17943,7 @@
           <a:bodyPr wrap="square" rtlCol="0" anchor="ctr"/>
           <a:lstStyle/>
           <a:p>
-            <a:pPr indent="0" marL="0">
+            <a:pPr marL="0" indent="0">
               <a:buNone/>
             </a:pPr>
             <a:r>
@@ -17423,6 +17979,13 @@
           </a:solidFill>
           <a:ln/>
         </p:spPr>
+        <p:txBody>
+          <a:bodyPr/>
+          <a:lstStyle/>
+          <a:p>
+            <a:endParaRPr lang="en-IN"/>
+          </a:p>
+        </p:txBody>
       </p:sp>
       <p:sp>
         <p:nvSpPr>
@@ -17445,7 +18008,7 @@
           <a:bodyPr wrap="square" rtlCol="0" anchor="ctr"/>
           <a:lstStyle/>
           <a:p>
-            <a:pPr indent="0" marL="0">
+            <a:pPr marL="0" indent="0">
               <a:buNone/>
             </a:pPr>
             <a:r>
@@ -17481,7 +18044,7 @@
           <a:bodyPr wrap="square" rtlCol="0" anchor="ctr"/>
           <a:lstStyle/>
           <a:p>
-            <a:pPr indent="0" marL="0">
+            <a:pPr marL="0" indent="0">
               <a:buNone/>
             </a:pPr>
             <a:r>
@@ -17517,6 +18080,13 @@
           </a:solidFill>
           <a:ln/>
         </p:spPr>
+        <p:txBody>
+          <a:bodyPr/>
+          <a:lstStyle/>
+          <a:p>
+            <a:endParaRPr lang="en-IN"/>
+          </a:p>
+        </p:txBody>
       </p:sp>
       <p:sp>
         <p:nvSpPr>
@@ -17539,7 +18109,7 @@
           <a:bodyPr wrap="square" rtlCol="0" anchor="ctr"/>
           <a:lstStyle/>
           <a:p>
-            <a:pPr indent="0" marL="0">
+            <a:pPr marL="0" indent="0">
               <a:buNone/>
             </a:pPr>
             <a:r>
@@ -17575,7 +18145,7 @@
           <a:bodyPr wrap="square" rtlCol="0" anchor="ctr"/>
           <a:lstStyle/>
           <a:p>
-            <a:pPr indent="0" marL="0">
+            <a:pPr marL="0" indent="0">
               <a:buNone/>
             </a:pPr>
             <a:r>
@@ -17611,6 +18181,13 @@
           </a:solidFill>
           <a:ln/>
         </p:spPr>
+        <p:txBody>
+          <a:bodyPr/>
+          <a:lstStyle/>
+          <a:p>
+            <a:endParaRPr lang="en-IN"/>
+          </a:p>
+        </p:txBody>
       </p:sp>
       <p:sp>
         <p:nvSpPr>
@@ -17633,7 +18210,7 @@
           <a:bodyPr wrap="square" rtlCol="0" anchor="ctr"/>
           <a:lstStyle/>
           <a:p>
-            <a:pPr indent="0" marL="0">
+            <a:pPr marL="0" indent="0">
               <a:buNone/>
             </a:pPr>
             <a:r>
@@ -17669,7 +18246,7 @@
           <a:bodyPr wrap="square" rtlCol="0" anchor="ctr"/>
           <a:lstStyle/>
           <a:p>
-            <a:pPr indent="0" marL="0">
+            <a:pPr marL="0" indent="0">
               <a:buNone/>
             </a:pPr>
             <a:r>
@@ -17705,6 +18282,13 @@
           </a:solidFill>
           <a:ln/>
         </p:spPr>
+        <p:txBody>
+          <a:bodyPr/>
+          <a:lstStyle/>
+          <a:p>
+            <a:endParaRPr lang="en-IN"/>
+          </a:p>
+        </p:txBody>
       </p:sp>
       <p:sp>
         <p:nvSpPr>
@@ -17727,7 +18311,7 @@
           <a:bodyPr wrap="square" rtlCol="0" anchor="ctr"/>
           <a:lstStyle/>
           <a:p>
-            <a:pPr indent="0" marL="0">
+            <a:pPr marL="0" indent="0">
               <a:buNone/>
             </a:pPr>
             <a:r>
@@ -17763,7 +18347,7 @@
           <a:bodyPr wrap="square" rtlCol="0" anchor="ctr"/>
           <a:lstStyle/>
           <a:p>
-            <a:pPr indent="0" marL="0">
+            <a:pPr marL="0" indent="0">
               <a:buNone/>
             </a:pPr>
             <a:r>
@@ -17794,6 +18378,7 @@
         <a:solidFill>
           <a:srgbClr val="090E1A"/>
         </a:solidFill>
+        <a:effectLst/>
       </p:bgPr>
     </p:bg>
     <p:spTree>
@@ -17834,6 +18419,13 @@
             <a:prstDash val="solid"/>
           </a:ln>
         </p:spPr>
+        <p:txBody>
+          <a:bodyPr/>
+          <a:lstStyle/>
+          <a:p>
+            <a:endParaRPr lang="en-IN"/>
+          </a:p>
+        </p:txBody>
       </p:sp>
       <p:sp>
         <p:nvSpPr>
@@ -17856,7 +18448,7 @@
           <a:bodyPr wrap="square" rtlCol="0" anchor="ctr"/>
           <a:lstStyle/>
           <a:p>
-            <a:pPr indent="0" marL="0">
+            <a:pPr marL="0" indent="0">
               <a:buNone/>
             </a:pPr>
             <a:r>
@@ -17895,7 +18487,7 @@
           <a:bodyPr wrap="square" rtlCol="0" anchor="ctr"/>
           <a:lstStyle/>
           <a:p>
-            <a:pPr indent="0" marL="0">
+            <a:pPr marL="0" indent="0">
               <a:buNone/>
             </a:pPr>
             <a:r>
@@ -17934,6 +18526,13 @@
           </a:solidFill>
           <a:ln/>
         </p:spPr>
+        <p:txBody>
+          <a:bodyPr/>
+          <a:lstStyle/>
+          <a:p>
+            <a:endParaRPr lang="en-IN"/>
+          </a:p>
+        </p:txBody>
       </p:sp>
       <p:sp>
         <p:nvSpPr>
@@ -17956,7 +18555,7 @@
           <a:bodyPr wrap="square" rtlCol="0" anchor="ctr"/>
           <a:lstStyle/>
           <a:p>
-            <a:pPr algn="ctr" indent="0" marL="0">
+            <a:pPr marL="0" indent="0" algn="ctr">
               <a:buNone/>
             </a:pPr>
             <a:r>
@@ -17995,7 +18594,7 @@
           <a:bodyPr wrap="square" rtlCol="0" anchor="ctr"/>
           <a:lstStyle/>
           <a:p>
-            <a:pPr indent="0" marL="0">
+            <a:pPr marL="0" indent="0">
               <a:buNone/>
             </a:pPr>
             <a:r>
@@ -18034,7 +18633,7 @@
           <a:bodyPr wrap="square" rtlCol="0" anchor="ctr"/>
           <a:lstStyle/>
           <a:p>
-            <a:pPr algn="r" indent="0" marL="0">
+            <a:pPr marL="0" indent="0" algn="r">
               <a:buNone/>
             </a:pPr>
             <a:r>
@@ -18078,6 +18677,13 @@
             <a:prstDash val="solid"/>
           </a:ln>
         </p:spPr>
+        <p:txBody>
+          <a:bodyPr/>
+          <a:lstStyle/>
+          <a:p>
+            <a:endParaRPr lang="en-IN"/>
+          </a:p>
+        </p:txBody>
       </p:sp>
       <p:sp>
         <p:nvSpPr>
@@ -18100,6 +18706,13 @@
           </a:solidFill>
           <a:ln/>
         </p:spPr>
+        <p:txBody>
+          <a:bodyPr/>
+          <a:lstStyle/>
+          <a:p>
+            <a:endParaRPr lang="en-IN"/>
+          </a:p>
+        </p:txBody>
       </p:sp>
       <p:sp>
         <p:nvSpPr>
@@ -18122,7 +18735,7 @@
           <a:bodyPr wrap="square" rtlCol="0" anchor="ctr"/>
           <a:lstStyle/>
           <a:p>
-            <a:pPr algn="ctr" indent="0" marL="0">
+            <a:pPr marL="0" indent="0" algn="ctr">
               <a:buNone/>
             </a:pPr>
             <a:r>
@@ -18158,7 +18771,7 @@
           <a:bodyPr wrap="square" rtlCol="0" anchor="ctr"/>
           <a:lstStyle/>
           <a:p>
-            <a:pPr algn="ctr" indent="0" marL="0">
+            <a:pPr marL="0" indent="0" algn="ctr">
               <a:buNone/>
             </a:pPr>
             <a:r>
@@ -18194,7 +18807,7 @@
           <a:bodyPr wrap="square" rtlCol="0" anchor="ctr"/>
           <a:lstStyle/>
           <a:p>
-            <a:pPr indent="0" marL="0">
+            <a:pPr marL="0" indent="0">
               <a:lnSpc>
                 <a:spcPts val="1800"/>
               </a:lnSpc>
@@ -18238,6 +18851,13 @@
             <a:prstDash val="solid"/>
           </a:ln>
         </p:spPr>
+        <p:txBody>
+          <a:bodyPr/>
+          <a:lstStyle/>
+          <a:p>
+            <a:endParaRPr lang="en-IN"/>
+          </a:p>
+        </p:txBody>
       </p:sp>
       <p:sp>
         <p:nvSpPr>
@@ -18260,6 +18880,13 @@
           </a:solidFill>
           <a:ln/>
         </p:spPr>
+        <p:txBody>
+          <a:bodyPr/>
+          <a:lstStyle/>
+          <a:p>
+            <a:endParaRPr lang="en-IN"/>
+          </a:p>
+        </p:txBody>
       </p:sp>
       <p:sp>
         <p:nvSpPr>
@@ -18282,7 +18909,7 @@
           <a:bodyPr wrap="square" rtlCol="0" anchor="ctr"/>
           <a:lstStyle/>
           <a:p>
-            <a:pPr algn="ctr" indent="0" marL="0">
+            <a:pPr marL="0" indent="0" algn="ctr">
               <a:buNone/>
             </a:pPr>
             <a:r>
@@ -18318,7 +18945,7 @@
           <a:bodyPr wrap="square" rtlCol="0" anchor="ctr"/>
           <a:lstStyle/>
           <a:p>
-            <a:pPr algn="ctr" indent="0" marL="0">
+            <a:pPr marL="0" indent="0" algn="ctr">
               <a:buNone/>
             </a:pPr>
             <a:r>
@@ -18354,7 +18981,7 @@
           <a:bodyPr wrap="square" rtlCol="0" anchor="ctr"/>
           <a:lstStyle/>
           <a:p>
-            <a:pPr indent="0" marL="0">
+            <a:pPr marL="0" indent="0">
               <a:lnSpc>
                 <a:spcPts val="1800"/>
               </a:lnSpc>
@@ -18398,6 +19025,13 @@
             <a:prstDash val="solid"/>
           </a:ln>
         </p:spPr>
+        <p:txBody>
+          <a:bodyPr/>
+          <a:lstStyle/>
+          <a:p>
+            <a:endParaRPr lang="en-IN"/>
+          </a:p>
+        </p:txBody>
       </p:sp>
       <p:sp>
         <p:nvSpPr>
@@ -18420,6 +19054,13 @@
           </a:solidFill>
           <a:ln/>
         </p:spPr>
+        <p:txBody>
+          <a:bodyPr/>
+          <a:lstStyle/>
+          <a:p>
+            <a:endParaRPr lang="en-IN"/>
+          </a:p>
+        </p:txBody>
       </p:sp>
       <p:sp>
         <p:nvSpPr>
@@ -18442,7 +19083,7 @@
           <a:bodyPr wrap="square" rtlCol="0" anchor="ctr"/>
           <a:lstStyle/>
           <a:p>
-            <a:pPr algn="ctr" indent="0" marL="0">
+            <a:pPr marL="0" indent="0" algn="ctr">
               <a:buNone/>
             </a:pPr>
             <a:r>
@@ -18478,7 +19119,7 @@
           <a:bodyPr wrap="square" rtlCol="0" anchor="ctr"/>
           <a:lstStyle/>
           <a:p>
-            <a:pPr algn="ctr" indent="0" marL="0">
+            <a:pPr marL="0" indent="0" algn="ctr">
               <a:buNone/>
             </a:pPr>
             <a:r>
@@ -18514,7 +19155,7 @@
           <a:bodyPr wrap="square" rtlCol="0" anchor="ctr"/>
           <a:lstStyle/>
           <a:p>
-            <a:pPr indent="0" marL="0">
+            <a:pPr marL="0" indent="0">
               <a:lnSpc>
                 <a:spcPts val="1800"/>
               </a:lnSpc>
@@ -18558,6 +19199,13 @@
             <a:prstDash val="solid"/>
           </a:ln>
         </p:spPr>
+        <p:txBody>
+          <a:bodyPr/>
+          <a:lstStyle/>
+          <a:p>
+            <a:endParaRPr lang="en-IN"/>
+          </a:p>
+        </p:txBody>
       </p:sp>
       <p:sp>
         <p:nvSpPr>
@@ -18580,6 +19228,13 @@
           </a:solidFill>
           <a:ln/>
         </p:spPr>
+        <p:txBody>
+          <a:bodyPr/>
+          <a:lstStyle/>
+          <a:p>
+            <a:endParaRPr lang="en-IN"/>
+          </a:p>
+        </p:txBody>
       </p:sp>
       <p:sp>
         <p:nvSpPr>
@@ -18602,7 +19257,7 @@
           <a:bodyPr wrap="square" rtlCol="0" anchor="ctr"/>
           <a:lstStyle/>
           <a:p>
-            <a:pPr algn="ctr" indent="0" marL="0">
+            <a:pPr marL="0" indent="0" algn="ctr">
               <a:buNone/>
             </a:pPr>
             <a:r>
@@ -18638,7 +19293,7 @@
           <a:bodyPr wrap="square" rtlCol="0" anchor="ctr"/>
           <a:lstStyle/>
           <a:p>
-            <a:pPr algn="ctr" indent="0" marL="0">
+            <a:pPr marL="0" indent="0" algn="ctr">
               <a:buNone/>
             </a:pPr>
             <a:r>
@@ -18674,7 +19329,7 @@
           <a:bodyPr wrap="square" rtlCol="0" anchor="ctr"/>
           <a:lstStyle/>
           <a:p>
-            <a:pPr indent="0" marL="0">
+            <a:pPr marL="0" indent="0">
               <a:lnSpc>
                 <a:spcPts val="1800"/>
               </a:lnSpc>
@@ -18708,6 +19363,7 @@
         <a:solidFill>
           <a:srgbClr val="090E1A"/>
         </a:solidFill>
+        <a:effectLst/>
       </p:bgPr>
     </p:bg>
     <p:spTree>
@@ -18748,6 +19404,13 @@
             <a:prstDash val="solid"/>
           </a:ln>
         </p:spPr>
+        <p:txBody>
+          <a:bodyPr/>
+          <a:lstStyle/>
+          <a:p>
+            <a:endParaRPr lang="en-IN"/>
+          </a:p>
+        </p:txBody>
       </p:sp>
       <p:sp>
         <p:nvSpPr>
@@ -18770,7 +19433,7 @@
           <a:bodyPr wrap="square" rtlCol="0" anchor="ctr"/>
           <a:lstStyle/>
           <a:p>
-            <a:pPr indent="0" marL="0">
+            <a:pPr marL="0" indent="0">
               <a:buNone/>
             </a:pPr>
             <a:r>
@@ -18809,7 +19472,7 @@
           <a:bodyPr wrap="square" rtlCol="0" anchor="ctr"/>
           <a:lstStyle/>
           <a:p>
-            <a:pPr indent="0" marL="0">
+            <a:pPr marL="0" indent="0">
               <a:buNone/>
             </a:pPr>
             <a:r>
@@ -18848,6 +19511,13 @@
           </a:solidFill>
           <a:ln/>
         </p:spPr>
+        <p:txBody>
+          <a:bodyPr/>
+          <a:lstStyle/>
+          <a:p>
+            <a:endParaRPr lang="en-IN"/>
+          </a:p>
+        </p:txBody>
       </p:sp>
       <p:sp>
         <p:nvSpPr>
@@ -18870,7 +19540,7 @@
           <a:bodyPr wrap="square" rtlCol="0" anchor="ctr"/>
           <a:lstStyle/>
           <a:p>
-            <a:pPr algn="ctr" indent="0" marL="0">
+            <a:pPr marL="0" indent="0" algn="ctr">
               <a:buNone/>
             </a:pPr>
             <a:r>
@@ -18909,7 +19579,7 @@
           <a:bodyPr wrap="square" rtlCol="0" anchor="ctr"/>
           <a:lstStyle/>
           <a:p>
-            <a:pPr indent="0" marL="0">
+            <a:pPr marL="0" indent="0">
               <a:buNone/>
             </a:pPr>
             <a:r>
@@ -18948,7 +19618,7 @@
           <a:bodyPr wrap="square" rtlCol="0" anchor="ctr"/>
           <a:lstStyle/>
           <a:p>
-            <a:pPr algn="r" indent="0" marL="0">
+            <a:pPr marL="0" indent="0" algn="r">
               <a:buNone/>
             </a:pPr>
             <a:r>
@@ -18992,6 +19662,13 @@
             <a:prstDash val="solid"/>
           </a:ln>
         </p:spPr>
+        <p:txBody>
+          <a:bodyPr/>
+          <a:lstStyle/>
+          <a:p>
+            <a:endParaRPr lang="en-IN"/>
+          </a:p>
+        </p:txBody>
       </p:sp>
       <p:sp>
         <p:nvSpPr>
@@ -19014,7 +19691,7 @@
           <a:bodyPr wrap="square" rtlCol="0" anchor="ctr"/>
           <a:lstStyle/>
           <a:p>
-            <a:pPr indent="0" marL="0">
+            <a:pPr marL="0" indent="0">
               <a:buNone/>
             </a:pPr>
             <a:r>
@@ -19050,6 +19727,13 @@
           </a:solidFill>
           <a:ln/>
         </p:spPr>
+        <p:txBody>
+          <a:bodyPr/>
+          <a:lstStyle/>
+          <a:p>
+            <a:endParaRPr lang="en-IN"/>
+          </a:p>
+        </p:txBody>
       </p:sp>
       <p:sp>
         <p:nvSpPr>
@@ -19072,7 +19756,7 @@
           <a:bodyPr wrap="square" rtlCol="0" anchor="ctr"/>
           <a:lstStyle/>
           <a:p>
-            <a:pPr indent="0" marL="0">
+            <a:pPr marL="0" indent="0">
               <a:buNone/>
             </a:pPr>
             <a:r>
@@ -19108,7 +19792,7 @@
           <a:bodyPr wrap="square" rtlCol="0" anchor="ctr"/>
           <a:lstStyle/>
           <a:p>
-            <a:pPr indent="0" marL="0">
+            <a:pPr marL="0" indent="0">
               <a:buNone/>
             </a:pPr>
             <a:r>
@@ -19144,7 +19828,7 @@
           <a:bodyPr wrap="square" rtlCol="0" anchor="ctr"/>
           <a:lstStyle/>
           <a:p>
-            <a:pPr indent="0" marL="0">
+            <a:pPr marL="0" indent="0">
               <a:buNone/>
             </a:pPr>
             <a:r>
@@ -19180,6 +19864,13 @@
           </a:solidFill>
           <a:ln/>
         </p:spPr>
+        <p:txBody>
+          <a:bodyPr/>
+          <a:lstStyle/>
+          <a:p>
+            <a:endParaRPr lang="en-IN"/>
+          </a:p>
+        </p:txBody>
       </p:sp>
       <p:sp>
         <p:nvSpPr>
@@ -19202,7 +19893,7 @@
           <a:bodyPr wrap="square" rtlCol="0" anchor="ctr"/>
           <a:lstStyle/>
           <a:p>
-            <a:pPr indent="0" marL="0">
+            <a:pPr marL="0" indent="0">
               <a:buNone/>
             </a:pPr>
             <a:r>
@@ -19238,7 +19929,7 @@
           <a:bodyPr wrap="square" rtlCol="0" anchor="ctr"/>
           <a:lstStyle/>
           <a:p>
-            <a:pPr indent="0" marL="0">
+            <a:pPr marL="0" indent="0">
               <a:buNone/>
             </a:pPr>
             <a:r>
@@ -19274,7 +19965,7 @@
           <a:bodyPr wrap="square" rtlCol="0" anchor="ctr"/>
           <a:lstStyle/>
           <a:p>
-            <a:pPr indent="0" marL="0">
+            <a:pPr marL="0" indent="0">
               <a:buNone/>
             </a:pPr>
             <a:r>
@@ -19310,6 +20001,13 @@
           </a:solidFill>
           <a:ln/>
         </p:spPr>
+        <p:txBody>
+          <a:bodyPr/>
+          <a:lstStyle/>
+          <a:p>
+            <a:endParaRPr lang="en-IN"/>
+          </a:p>
+        </p:txBody>
       </p:sp>
       <p:sp>
         <p:nvSpPr>
@@ -19332,7 +20030,7 @@
           <a:bodyPr wrap="square" rtlCol="0" anchor="ctr"/>
           <a:lstStyle/>
           <a:p>
-            <a:pPr indent="0" marL="0">
+            <a:pPr marL="0" indent="0">
               <a:buNone/>
             </a:pPr>
             <a:r>
@@ -19368,7 +20066,7 @@
           <a:bodyPr wrap="square" rtlCol="0" anchor="ctr"/>
           <a:lstStyle/>
           <a:p>
-            <a:pPr indent="0" marL="0">
+            <a:pPr marL="0" indent="0">
               <a:buNone/>
             </a:pPr>
             <a:r>
@@ -19404,7 +20102,7 @@
           <a:bodyPr wrap="square" rtlCol="0" anchor="ctr"/>
           <a:lstStyle/>
           <a:p>
-            <a:pPr indent="0" marL="0">
+            <a:pPr marL="0" indent="0">
               <a:buNone/>
             </a:pPr>
             <a:r>
@@ -19440,6 +20138,13 @@
           </a:solidFill>
           <a:ln/>
         </p:spPr>
+        <p:txBody>
+          <a:bodyPr/>
+          <a:lstStyle/>
+          <a:p>
+            <a:endParaRPr lang="en-IN"/>
+          </a:p>
+        </p:txBody>
       </p:sp>
       <p:sp>
         <p:nvSpPr>
@@ -19462,7 +20167,7 @@
           <a:bodyPr wrap="square" rtlCol="0" anchor="ctr"/>
           <a:lstStyle/>
           <a:p>
-            <a:pPr indent="0" marL="0">
+            <a:pPr marL="0" indent="0">
               <a:buNone/>
             </a:pPr>
             <a:r>
@@ -19498,7 +20203,7 @@
           <a:bodyPr wrap="square" rtlCol="0" anchor="ctr"/>
           <a:lstStyle/>
           <a:p>
-            <a:pPr indent="0" marL="0">
+            <a:pPr marL="0" indent="0">
               <a:buNone/>
             </a:pPr>
             <a:r>
@@ -19534,7 +20239,7 @@
           <a:bodyPr wrap="square" rtlCol="0" anchor="ctr"/>
           <a:lstStyle/>
           <a:p>
-            <a:pPr indent="0" marL="0">
+            <a:pPr marL="0" indent="0">
               <a:buNone/>
             </a:pPr>
             <a:r>
@@ -19575,6 +20280,13 @@
             <a:prstDash val="solid"/>
           </a:ln>
         </p:spPr>
+        <p:txBody>
+          <a:bodyPr/>
+          <a:lstStyle/>
+          <a:p>
+            <a:endParaRPr lang="en-IN"/>
+          </a:p>
+        </p:txBody>
       </p:sp>
       <p:sp>
         <p:nvSpPr>
@@ -19597,7 +20309,7 @@
           <a:bodyPr wrap="square" rtlCol="0" anchor="ctr"/>
           <a:lstStyle/>
           <a:p>
-            <a:pPr indent="0" marL="0">
+            <a:pPr marL="0" indent="0">
               <a:buNone/>
             </a:pPr>
             <a:r>
@@ -19633,6 +20345,13 @@
           </a:solidFill>
           <a:ln/>
         </p:spPr>
+        <p:txBody>
+          <a:bodyPr/>
+          <a:lstStyle/>
+          <a:p>
+            <a:endParaRPr lang="en-IN"/>
+          </a:p>
+        </p:txBody>
       </p:sp>
       <p:sp>
         <p:nvSpPr>
@@ -19655,7 +20374,7 @@
           <a:bodyPr wrap="square" rtlCol="0" anchor="ctr"/>
           <a:lstStyle/>
           <a:p>
-            <a:pPr indent="0" marL="0">
+            <a:pPr marL="0" indent="0">
               <a:buNone/>
             </a:pPr>
             <a:r>
@@ -19691,7 +20410,7 @@
           <a:bodyPr wrap="square" rtlCol="0" anchor="ctr"/>
           <a:lstStyle/>
           <a:p>
-            <a:pPr indent="0" marL="0">
+            <a:pPr marL="0" indent="0">
               <a:buNone/>
             </a:pPr>
             <a:r>
@@ -19727,7 +20446,7 @@
           <a:bodyPr wrap="square" rtlCol="0" anchor="ctr"/>
           <a:lstStyle/>
           <a:p>
-            <a:pPr indent="0" marL="0">
+            <a:pPr marL="0" indent="0">
               <a:buNone/>
             </a:pPr>
             <a:r>
@@ -19763,6 +20482,13 @@
           </a:solidFill>
           <a:ln/>
         </p:spPr>
+        <p:txBody>
+          <a:bodyPr/>
+          <a:lstStyle/>
+          <a:p>
+            <a:endParaRPr lang="en-IN"/>
+          </a:p>
+        </p:txBody>
       </p:sp>
       <p:sp>
         <p:nvSpPr>
@@ -19785,7 +20511,7 @@
           <a:bodyPr wrap="square" rtlCol="0" anchor="ctr"/>
           <a:lstStyle/>
           <a:p>
-            <a:pPr indent="0" marL="0">
+            <a:pPr marL="0" indent="0">
               <a:buNone/>
             </a:pPr>
             <a:r>
@@ -19821,7 +20547,7 @@
           <a:bodyPr wrap="square" rtlCol="0" anchor="ctr"/>
           <a:lstStyle/>
           <a:p>
-            <a:pPr indent="0" marL="0">
+            <a:pPr marL="0" indent="0">
               <a:buNone/>
             </a:pPr>
             <a:r>
@@ -19857,7 +20583,7 @@
           <a:bodyPr wrap="square" rtlCol="0" anchor="ctr"/>
           <a:lstStyle/>
           <a:p>
-            <a:pPr indent="0" marL="0">
+            <a:pPr marL="0" indent="0">
               <a:buNone/>
             </a:pPr>
             <a:r>
@@ -19893,6 +20619,13 @@
           </a:solidFill>
           <a:ln/>
         </p:spPr>
+        <p:txBody>
+          <a:bodyPr/>
+          <a:lstStyle/>
+          <a:p>
+            <a:endParaRPr lang="en-IN"/>
+          </a:p>
+        </p:txBody>
       </p:sp>
       <p:sp>
         <p:nvSpPr>
@@ -19915,7 +20648,7 @@
           <a:bodyPr wrap="square" rtlCol="0" anchor="ctr"/>
           <a:lstStyle/>
           <a:p>
-            <a:pPr indent="0" marL="0">
+            <a:pPr marL="0" indent="0">
               <a:buNone/>
             </a:pPr>
             <a:r>
@@ -19951,7 +20684,7 @@
           <a:bodyPr wrap="square" rtlCol="0" anchor="ctr"/>
           <a:lstStyle/>
           <a:p>
-            <a:pPr indent="0" marL="0">
+            <a:pPr marL="0" indent="0">
               <a:buNone/>
             </a:pPr>
             <a:r>
@@ -19987,7 +20720,7 @@
           <a:bodyPr wrap="square" rtlCol="0" anchor="ctr"/>
           <a:lstStyle/>
           <a:p>
-            <a:pPr indent="0" marL="0">
+            <a:pPr marL="0" indent="0">
               <a:buNone/>
             </a:pPr>
             <a:r>
@@ -20023,6 +20756,13 @@
           </a:solidFill>
           <a:ln/>
         </p:spPr>
+        <p:txBody>
+          <a:bodyPr/>
+          <a:lstStyle/>
+          <a:p>
+            <a:endParaRPr lang="en-IN"/>
+          </a:p>
+        </p:txBody>
       </p:sp>
       <p:sp>
         <p:nvSpPr>
@@ -20045,7 +20785,7 @@
           <a:bodyPr wrap="square" rtlCol="0" anchor="ctr"/>
           <a:lstStyle/>
           <a:p>
-            <a:pPr indent="0" marL="0">
+            <a:pPr marL="0" indent="0">
               <a:buNone/>
             </a:pPr>
             <a:r>
@@ -20081,7 +20821,7 @@
           <a:bodyPr wrap="square" rtlCol="0" anchor="ctr"/>
           <a:lstStyle/>
           <a:p>
-            <a:pPr indent="0" marL="0">
+            <a:pPr marL="0" indent="0">
               <a:buNone/>
             </a:pPr>
             <a:r>
@@ -20117,7 +20857,7 @@
           <a:bodyPr wrap="square" rtlCol="0" anchor="ctr"/>
           <a:lstStyle/>
           <a:p>
-            <a:pPr indent="0" marL="0">
+            <a:pPr marL="0" indent="0">
               <a:buNone/>
             </a:pPr>
             <a:r>
@@ -20433,4 +21173,319 @@
     </a:ext>
   </a:extLst>
 </a:theme>
+</file>
+
+<file path=ppt/theme/theme2.xml><?xml version="1.0" encoding="utf-8"?>
+<a:theme xmlns:a="http://schemas.openxmlformats.org/drawingml/2006/main" name="Office Theme">
+  <a:themeElements>
+    <a:clrScheme name="Office">
+      <a:dk1>
+        <a:sysClr val="windowText" lastClr="000000"/>
+      </a:dk1>
+      <a:lt1>
+        <a:sysClr val="window" lastClr="FFFFFF"/>
+      </a:lt1>
+      <a:dk2>
+        <a:srgbClr val="0E2841"/>
+      </a:dk2>
+      <a:lt2>
+        <a:srgbClr val="E8E8E8"/>
+      </a:lt2>
+      <a:accent1>
+        <a:srgbClr val="156082"/>
+      </a:accent1>
+      <a:accent2>
+        <a:srgbClr val="E97132"/>
+      </a:accent2>
+      <a:accent3>
+        <a:srgbClr val="196B24"/>
+      </a:accent3>
+      <a:accent4>
+        <a:srgbClr val="0F9ED5"/>
+      </a:accent4>
+      <a:accent5>
+        <a:srgbClr val="A02B93"/>
+      </a:accent5>
+      <a:accent6>
+        <a:srgbClr val="4EA72E"/>
+      </a:accent6>
+      <a:hlink>
+        <a:srgbClr val="467886"/>
+      </a:hlink>
+      <a:folHlink>
+        <a:srgbClr val="96607D"/>
+      </a:folHlink>
+    </a:clrScheme>
+    <a:fontScheme name="Office">
+      <a:majorFont>
+        <a:latin typeface="Aptos Display" panose="02110004020202020204"/>
+        <a:ea typeface=""/>
+        <a:cs typeface=""/>
+        <a:font script="Jpan" typeface="游ゴシック Light"/>
+        <a:font script="Hang" typeface="맑은 고딕"/>
+        <a:font script="Hans" typeface="等线 Light"/>
+        <a:font script="Hant" typeface="新細明體"/>
+        <a:font script="Arab" typeface="Times New Roman"/>
+        <a:font script="Hebr" typeface="Times New Roman"/>
+        <a:font script="Thai" typeface="Angsana New"/>
+        <a:font script="Ethi" typeface="Nyala"/>
+        <a:font script="Beng" typeface="Vrinda"/>
+        <a:font script="Gujr" typeface="Shruti"/>
+        <a:font script="Khmr" typeface="MoolBoran"/>
+        <a:font script="Knda" typeface="Tunga"/>
+        <a:font script="Guru" typeface="Raavi"/>
+        <a:font script="Cans" typeface="Euphemia"/>
+        <a:font script="Cher" typeface="Plantagenet Cherokee"/>
+        <a:font script="Yiii" typeface="Microsoft Yi Baiti"/>
+        <a:font script="Tibt" typeface="Microsoft Himalaya"/>
+        <a:font script="Thaa" typeface="MV Boli"/>
+        <a:font script="Deva" typeface="Mangal"/>
+        <a:font script="Telu" typeface="Gautami"/>
+        <a:font script="Taml" typeface="Latha"/>
+        <a:font script="Syrc" typeface="Estrangelo Edessa"/>
+        <a:font script="Orya" typeface="Kalinga"/>
+        <a:font script="Mlym" typeface="Kartika"/>
+        <a:font script="Laoo" typeface="DokChampa"/>
+        <a:font script="Sinh" typeface="Iskoola Pota"/>
+        <a:font script="Mong" typeface="Mongolian Baiti"/>
+        <a:font script="Viet" typeface="Times New Roman"/>
+        <a:font script="Uigh" typeface="Microsoft Uighur"/>
+        <a:font script="Geor" typeface="Sylfaen"/>
+        <a:font script="Armn" typeface="Arial"/>
+        <a:font script="Bugi" typeface="Leelawadee UI"/>
+        <a:font script="Bopo" typeface="Microsoft JhengHei"/>
+        <a:font script="Java" typeface="Javanese Text"/>
+        <a:font script="Lisu" typeface="Segoe UI"/>
+        <a:font script="Mymr" typeface="Myanmar Text"/>
+        <a:font script="Nkoo" typeface="Ebrima"/>
+        <a:font script="Olck" typeface="Nirmala UI"/>
+        <a:font script="Osma" typeface="Ebrima"/>
+        <a:font script="Phag" typeface="Phagspa"/>
+        <a:font script="Syrn" typeface="Estrangelo Edessa"/>
+        <a:font script="Syrj" typeface="Estrangelo Edessa"/>
+        <a:font script="Syre" typeface="Estrangelo Edessa"/>
+        <a:font script="Sora" typeface="Nirmala UI"/>
+        <a:font script="Tale" typeface="Microsoft Tai Le"/>
+        <a:font script="Talu" typeface="Microsoft New Tai Lue"/>
+        <a:font script="Tfng" typeface="Ebrima"/>
+      </a:majorFont>
+      <a:minorFont>
+        <a:latin typeface="Aptos" panose="02110004020202020204"/>
+        <a:ea typeface=""/>
+        <a:cs typeface=""/>
+        <a:font script="Jpan" typeface="游ゴシック"/>
+        <a:font script="Hang" typeface="맑은 고딕"/>
+        <a:font script="Hans" typeface="等线"/>
+        <a:font script="Hant" typeface="新細明體"/>
+        <a:font script="Arab" typeface="Arial"/>
+        <a:font script="Hebr" typeface="Arial"/>
+        <a:font script="Thai" typeface="Cordia New"/>
+        <a:font script="Ethi" typeface="Nyala"/>
+        <a:font script="Beng" typeface="Vrinda"/>
+        <a:font script="Gujr" typeface="Shruti"/>
+        <a:font script="Khmr" typeface="DaunPenh"/>
+        <a:font script="Knda" typeface="Tunga"/>
+        <a:font script="Guru" typeface="Raavi"/>
+        <a:font script="Cans" typeface="Euphemia"/>
+        <a:font script="Cher" typeface="Plantagenet Cherokee"/>
+        <a:font script="Yiii" typeface="Microsoft Yi Baiti"/>
+        <a:font script="Tibt" typeface="Microsoft Himalaya"/>
+        <a:font script="Thaa" typeface="MV Boli"/>
+        <a:font script="Deva" typeface="Mangal"/>
+        <a:font script="Telu" typeface="Gautami"/>
+        <a:font script="Taml" typeface="Latha"/>
+        <a:font script="Syrc" typeface="Estrangelo Edessa"/>
+        <a:font script="Orya" typeface="Kalinga"/>
+        <a:font script="Mlym" typeface="Kartika"/>
+        <a:font script="Laoo" typeface="DokChampa"/>
+        <a:font script="Sinh" typeface="Iskoola Pota"/>
+        <a:font script="Mong" typeface="Mongolian Baiti"/>
+        <a:font script="Viet" typeface="Arial"/>
+        <a:font script="Uigh" typeface="Microsoft Uighur"/>
+        <a:font script="Geor" typeface="Sylfaen"/>
+        <a:font script="Armn" typeface="Arial"/>
+        <a:font script="Bugi" typeface="Leelawadee UI"/>
+        <a:font script="Bopo" typeface="Microsoft JhengHei"/>
+        <a:font script="Java" typeface="Javanese Text"/>
+        <a:font script="Lisu" typeface="Segoe UI"/>
+        <a:font script="Mymr" typeface="Myanmar Text"/>
+        <a:font script="Nkoo" typeface="Ebrima"/>
+        <a:font script="Olck" typeface="Nirmala UI"/>
+        <a:font script="Osma" typeface="Ebrima"/>
+        <a:font script="Phag" typeface="Phagspa"/>
+        <a:font script="Syrn" typeface="Estrangelo Edessa"/>
+        <a:font script="Syrj" typeface="Estrangelo Edessa"/>
+        <a:font script="Syre" typeface="Estrangelo Edessa"/>
+        <a:font script="Sora" typeface="Nirmala UI"/>
+        <a:font script="Tale" typeface="Microsoft Tai Le"/>
+        <a:font script="Talu" typeface="Microsoft New Tai Lue"/>
+        <a:font script="Tfng" typeface="Ebrima"/>
+      </a:minorFont>
+    </a:fontScheme>
+    <a:fmtScheme name="Office">
+      <a:fillStyleLst>
+        <a:solidFill>
+          <a:schemeClr val="phClr"/>
+        </a:solidFill>
+        <a:gradFill rotWithShape="1">
+          <a:gsLst>
+            <a:gs pos="0">
+              <a:schemeClr val="phClr">
+                <a:lumMod val="110000"/>
+                <a:satMod val="105000"/>
+                <a:tint val="67000"/>
+              </a:schemeClr>
+            </a:gs>
+            <a:gs pos="50000">
+              <a:schemeClr val="phClr">
+                <a:lumMod val="105000"/>
+                <a:satMod val="103000"/>
+                <a:tint val="73000"/>
+              </a:schemeClr>
+            </a:gs>
+            <a:gs pos="100000">
+              <a:schemeClr val="phClr">
+                <a:lumMod val="105000"/>
+                <a:satMod val="109000"/>
+                <a:tint val="81000"/>
+              </a:schemeClr>
+            </a:gs>
+          </a:gsLst>
+          <a:lin ang="5400000" scaled="0"/>
+        </a:gradFill>
+        <a:gradFill rotWithShape="1">
+          <a:gsLst>
+            <a:gs pos="0">
+              <a:schemeClr val="phClr">
+                <a:satMod val="103000"/>
+                <a:lumMod val="102000"/>
+                <a:tint val="94000"/>
+              </a:schemeClr>
+            </a:gs>
+            <a:gs pos="50000">
+              <a:schemeClr val="phClr">
+                <a:satMod val="110000"/>
+                <a:lumMod val="100000"/>
+                <a:shade val="100000"/>
+              </a:schemeClr>
+            </a:gs>
+            <a:gs pos="100000">
+              <a:schemeClr val="phClr">
+                <a:lumMod val="99000"/>
+                <a:satMod val="120000"/>
+                <a:shade val="78000"/>
+              </a:schemeClr>
+            </a:gs>
+          </a:gsLst>
+          <a:lin ang="5400000" scaled="0"/>
+        </a:gradFill>
+      </a:fillStyleLst>
+      <a:lnStyleLst>
+        <a:ln w="12700" cap="flat" cmpd="sng" algn="ctr">
+          <a:solidFill>
+            <a:schemeClr val="phClr"/>
+          </a:solidFill>
+          <a:prstDash val="solid"/>
+          <a:miter lim="800000"/>
+        </a:ln>
+        <a:ln w="19050" cap="flat" cmpd="sng" algn="ctr">
+          <a:solidFill>
+            <a:schemeClr val="phClr"/>
+          </a:solidFill>
+          <a:prstDash val="solid"/>
+          <a:miter lim="800000"/>
+        </a:ln>
+        <a:ln w="25400" cap="flat" cmpd="sng" algn="ctr">
+          <a:solidFill>
+            <a:schemeClr val="phClr"/>
+          </a:solidFill>
+          <a:prstDash val="solid"/>
+          <a:miter lim="800000"/>
+        </a:ln>
+      </a:lnStyleLst>
+      <a:effectStyleLst>
+        <a:effectStyle>
+          <a:effectLst/>
+        </a:effectStyle>
+        <a:effectStyle>
+          <a:effectLst/>
+        </a:effectStyle>
+        <a:effectStyle>
+          <a:effectLst>
+            <a:outerShdw blurRad="57150" dist="19050" dir="5400000" algn="ctr" rotWithShape="0">
+              <a:srgbClr val="000000">
+                <a:alpha val="63000"/>
+              </a:srgbClr>
+            </a:outerShdw>
+          </a:effectLst>
+        </a:effectStyle>
+      </a:effectStyleLst>
+      <a:bgFillStyleLst>
+        <a:solidFill>
+          <a:schemeClr val="phClr"/>
+        </a:solidFill>
+        <a:solidFill>
+          <a:schemeClr val="phClr">
+            <a:tint val="95000"/>
+            <a:satMod val="170000"/>
+          </a:schemeClr>
+        </a:solidFill>
+        <a:gradFill rotWithShape="1">
+          <a:gsLst>
+            <a:gs pos="0">
+              <a:schemeClr val="phClr">
+                <a:tint val="93000"/>
+                <a:satMod val="150000"/>
+                <a:shade val="98000"/>
+                <a:lumMod val="102000"/>
+              </a:schemeClr>
+            </a:gs>
+            <a:gs pos="50000">
+              <a:schemeClr val="phClr">
+                <a:tint val="98000"/>
+                <a:satMod val="130000"/>
+                <a:shade val="90000"/>
+                <a:lumMod val="103000"/>
+              </a:schemeClr>
+            </a:gs>
+            <a:gs pos="100000">
+              <a:schemeClr val="phClr">
+                <a:shade val="63000"/>
+                <a:satMod val="120000"/>
+              </a:schemeClr>
+            </a:gs>
+          </a:gsLst>
+          <a:lin ang="5400000" scaled="0"/>
+        </a:gradFill>
+      </a:bgFillStyleLst>
+    </a:fmtScheme>
+  </a:themeElements>
+  <a:objectDefaults>
+    <a:lnDef>
+      <a:spPr/>
+      <a:bodyPr/>
+      <a:lstStyle/>
+      <a:style>
+        <a:lnRef idx="2">
+          <a:schemeClr val="accent1"/>
+        </a:lnRef>
+        <a:fillRef idx="0">
+          <a:schemeClr val="accent1"/>
+        </a:fillRef>
+        <a:effectRef idx="1">
+          <a:schemeClr val="accent1"/>
+        </a:effectRef>
+        <a:fontRef idx="minor">
+          <a:schemeClr val="tx1"/>
+        </a:fontRef>
+      </a:style>
+    </a:lnDef>
+  </a:objectDefaults>
+  <a:extraClrSchemeLst/>
+  <a:extLst>
+    <a:ext uri="{05A4C25C-085E-4340-85A3-A5531E510DB2}">
+      <thm15:themeFamily xmlns:thm15="http://schemas.microsoft.com/office/thememl/2012/main" name="Office Theme" id="{2E142A2C-CD16-42D6-873A-C26D2A0506FA}" vid="{1BDDFF52-6CD6-40A5-AB3C-68EB2F1E4D0A}"/>
+    </a:ext>
+  </a:extLst>
+</a:theme>
 </file>